--- a/slides/02-ky-nang-chuyen-nghiep.pptx
+++ b/slides/02-ky-nang-chuyen-nghiep.pptx
@@ -13822,108 +13822,14 @@
     </a:clrScheme>
     <a:fontScheme name="Office">
       <a:majorFont>
-        <a:latin typeface="Calibri Light" panose="020F0302020204030204"/>
-        <a:ea typeface=""/>
-        <a:cs typeface=""/>
-        <a:font script="Jpan" typeface="游ゴシック Light"/>
-        <a:font script="Hang" typeface="맑은 고딕"/>
-        <a:font script="Hans" typeface="等线 Light"/>
-        <a:font script="Hant" typeface="新細明體"/>
-        <a:font script="Arab" typeface="Times New Roman"/>
-        <a:font script="Hebr" typeface="Times New Roman"/>
-        <a:font script="Thai" typeface="Angsana New"/>
-        <a:font script="Ethi" typeface="Nyala"/>
-        <a:font script="Beng" typeface="Vrinda"/>
-        <a:font script="Gujr" typeface="Shruti"/>
-        <a:font script="Khmr" typeface="MoolBoran"/>
-        <a:font script="Knda" typeface="Tunga"/>
-        <a:font script="Guru" typeface="Raavi"/>
-        <a:font script="Cans" typeface="Euphemia"/>
-        <a:font script="Cher" typeface="Plantagenet Cherokee"/>
-        <a:font script="Yiii" typeface="Microsoft Yi Baiti"/>
-        <a:font script="Tibt" typeface="Microsoft Himalaya"/>
-        <a:font script="Thaa" typeface="MV Boli"/>
-        <a:font script="Deva" typeface="Mangal"/>
-        <a:font script="Telu" typeface="Gautami"/>
-        <a:font script="Taml" typeface="Latha"/>
-        <a:font script="Syrc" typeface="Estrangelo Edessa"/>
-        <a:font script="Orya" typeface="Kalinga"/>
-        <a:font script="Mlym" typeface="Kartika"/>
-        <a:font script="Laoo" typeface="DokChampa"/>
-        <a:font script="Sinh" typeface="Iskoola Pota"/>
-        <a:font script="Mong" typeface="Mongolian Baiti"/>
-        <a:font script="Viet" typeface="Times New Roman"/>
-        <a:font script="Uigh" typeface="Microsoft Uighur"/>
-        <a:font script="Geor" typeface="Sylfaen"/>
-        <a:font script="Armn" typeface="Arial"/>
-        <a:font script="Bugi" typeface="Leelawadee UI"/>
-        <a:font script="Bopo" typeface="Microsoft JhengHei"/>
-        <a:font script="Java" typeface="Javanese Text"/>
-        <a:font script="Lisu" typeface="Segoe UI"/>
-        <a:font script="Mymr" typeface="Myanmar Text"/>
-        <a:font script="Nkoo" typeface="Ebrima"/>
-        <a:font script="Olck" typeface="Nirmala UI"/>
-        <a:font script="Osma" typeface="Ebrima"/>
-        <a:font script="Phag" typeface="Phagspa"/>
-        <a:font script="Syrn" typeface="Estrangelo Edessa"/>
-        <a:font script="Syrj" typeface="Estrangelo Edessa"/>
-        <a:font script="Syre" typeface="Estrangelo Edessa"/>
-        <a:font script="Sora" typeface="Nirmala UI"/>
-        <a:font script="Tale" typeface="Microsoft Tai Le"/>
-        <a:font script="Talu" typeface="Microsoft New Tai Lue"/>
-        <a:font script="Tfng" typeface="Ebrima"/>
+        <a:latin typeface="Cambria" panose="020F0302020204030204"/>
+        <a:ea typeface="Cambria"/>
+        <a:cs typeface="Cambria"/>
       </a:majorFont>
       <a:minorFont>
         <a:latin typeface="Calibri" panose="020F0502020204030204"/>
-        <a:ea typeface=""/>
-        <a:cs typeface=""/>
-        <a:font script="Jpan" typeface="游ゴシック"/>
-        <a:font script="Hang" typeface="맑은 고딕"/>
-        <a:font script="Hans" typeface="等线"/>
-        <a:font script="Hant" typeface="新細明體"/>
-        <a:font script="Arab" typeface="Arial"/>
-        <a:font script="Hebr" typeface="Arial"/>
-        <a:font script="Thai" typeface="Cordia New"/>
-        <a:font script="Ethi" typeface="Nyala"/>
-        <a:font script="Beng" typeface="Vrinda"/>
-        <a:font script="Gujr" typeface="Shruti"/>
-        <a:font script="Khmr" typeface="DaunPenh"/>
-        <a:font script="Knda" typeface="Tunga"/>
-        <a:font script="Guru" typeface="Raavi"/>
-        <a:font script="Cans" typeface="Euphemia"/>
-        <a:font script="Cher" typeface="Plantagenet Cherokee"/>
-        <a:font script="Yiii" typeface="Microsoft Yi Baiti"/>
-        <a:font script="Tibt" typeface="Microsoft Himalaya"/>
-        <a:font script="Thaa" typeface="MV Boli"/>
-        <a:font script="Deva" typeface="Mangal"/>
-        <a:font script="Telu" typeface="Gautami"/>
-        <a:font script="Taml" typeface="Latha"/>
-        <a:font script="Syrc" typeface="Estrangelo Edessa"/>
-        <a:font script="Orya" typeface="Kalinga"/>
-        <a:font script="Mlym" typeface="Kartika"/>
-        <a:font script="Laoo" typeface="DokChampa"/>
-        <a:font script="Sinh" typeface="Iskoola Pota"/>
-        <a:font script="Mong" typeface="Mongolian Baiti"/>
-        <a:font script="Viet" typeface="Arial"/>
-        <a:font script="Uigh" typeface="Microsoft Uighur"/>
-        <a:font script="Geor" typeface="Sylfaen"/>
-        <a:font script="Armn" typeface="Arial"/>
-        <a:font script="Bugi" typeface="Leelawadee UI"/>
-        <a:font script="Bopo" typeface="Microsoft JhengHei"/>
-        <a:font script="Java" typeface="Javanese Text"/>
-        <a:font script="Lisu" typeface="Segoe UI"/>
-        <a:font script="Mymr" typeface="Myanmar Text"/>
-        <a:font script="Nkoo" typeface="Ebrima"/>
-        <a:font script="Olck" typeface="Nirmala UI"/>
-        <a:font script="Osma" typeface="Ebrima"/>
-        <a:font script="Phag" typeface="Phagspa"/>
-        <a:font script="Syrn" typeface="Estrangelo Edessa"/>
-        <a:font script="Syrj" typeface="Estrangelo Edessa"/>
-        <a:font script="Syre" typeface="Estrangelo Edessa"/>
-        <a:font script="Sora" typeface="Nirmala UI"/>
-        <a:font script="Tale" typeface="Microsoft Tai Le"/>
-        <a:font script="Talu" typeface="Microsoft New Tai Lue"/>
-        <a:font script="Tfng" typeface="Ebrima"/>
+        <a:ea typeface="Calibri"/>
+        <a:cs typeface="Calibri"/>
       </a:minorFont>
     </a:fontScheme>
     <a:fmtScheme name="Office">

--- a/slides/02-ky-nang-chuyen-nghiep.pptx
+++ b/slides/02-ky-nang-chuyen-nghiep.pptx
@@ -4007,7 +4007,7 @@
         <p:spPr>
           <a:xfrm>
             <a:off x="1051560" y="1499616"/>
-            <a:ext cx="10652760" cy="1177290"/>
+            <a:ext cx="10652760" cy="960120"/>
           </a:xfrm>
           <a:prstGeom prst="rect">
             <a:avLst/>
@@ -4059,7 +4059,7 @@
         </p:nvSpPr>
         <p:spPr>
           <a:xfrm>
-            <a:off x="502920" y="2750058"/>
+            <a:off x="502920" y="2532888"/>
             <a:ext cx="384048" cy="384048"/>
           </a:xfrm>
           <a:prstGeom prst="ellipse">
@@ -4083,7 +4083,7 @@
         </p:nvSpPr>
         <p:spPr>
           <a:xfrm>
-            <a:off x="502920" y="2750058"/>
+            <a:off x="502920" y="2532888"/>
             <a:ext cx="384048" cy="384048"/>
           </a:xfrm>
           <a:prstGeom prst="rect">
@@ -4122,8 +4122,8 @@
         </p:nvSpPr>
         <p:spPr>
           <a:xfrm>
-            <a:off x="1051560" y="2676906"/>
-            <a:ext cx="10652760" cy="1177290"/>
+            <a:off x="1051560" y="2459736"/>
+            <a:ext cx="10652760" cy="960120"/>
           </a:xfrm>
           <a:prstGeom prst="rect">
             <a:avLst/>
@@ -4175,7 +4175,7 @@
         </p:nvSpPr>
         <p:spPr>
           <a:xfrm>
-            <a:off x="502920" y="3927348"/>
+            <a:off x="502920" y="3493008"/>
             <a:ext cx="384048" cy="384048"/>
           </a:xfrm>
           <a:prstGeom prst="ellipse">
@@ -4199,7 +4199,7 @@
         </p:nvSpPr>
         <p:spPr>
           <a:xfrm>
-            <a:off x="502920" y="3927348"/>
+            <a:off x="502920" y="3493008"/>
             <a:ext cx="384048" cy="384048"/>
           </a:xfrm>
           <a:prstGeom prst="rect">
@@ -4238,8 +4238,8 @@
         </p:nvSpPr>
         <p:spPr>
           <a:xfrm>
-            <a:off x="1051560" y="3854196"/>
-            <a:ext cx="10652760" cy="1177290"/>
+            <a:off x="1051560" y="3419856"/>
+            <a:ext cx="10652760" cy="960120"/>
           </a:xfrm>
           <a:prstGeom prst="rect">
             <a:avLst/>
@@ -4291,7 +4291,7 @@
         </p:nvSpPr>
         <p:spPr>
           <a:xfrm>
-            <a:off x="502920" y="5104638"/>
+            <a:off x="502920" y="4453128"/>
             <a:ext cx="384048" cy="384048"/>
           </a:xfrm>
           <a:prstGeom prst="ellipse">
@@ -4315,7 +4315,7 @@
         </p:nvSpPr>
         <p:spPr>
           <a:xfrm>
-            <a:off x="502920" y="5104638"/>
+            <a:off x="502920" y="4453128"/>
             <a:ext cx="384048" cy="384048"/>
           </a:xfrm>
           <a:prstGeom prst="rect">
@@ -4354,8 +4354,8 @@
         </p:nvSpPr>
         <p:spPr>
           <a:xfrm>
-            <a:off x="1051560" y="5031486"/>
-            <a:ext cx="10652760" cy="1177290"/>
+            <a:off x="1051560" y="4379976"/>
+            <a:ext cx="10652760" cy="960120"/>
           </a:xfrm>
           <a:prstGeom prst="rect">
             <a:avLst/>
@@ -9090,7 +9090,7 @@
         <p:spPr>
           <a:xfrm>
             <a:off x="1051560" y="1545336"/>
-            <a:ext cx="10652760" cy="1131570"/>
+            <a:ext cx="10652760" cy="960120"/>
           </a:xfrm>
           <a:prstGeom prst="rect">
             <a:avLst/>
@@ -9142,7 +9142,7 @@
         </p:nvSpPr>
         <p:spPr>
           <a:xfrm>
-            <a:off x="502920" y="2750058"/>
+            <a:off x="502920" y="2578608"/>
             <a:ext cx="384048" cy="384048"/>
           </a:xfrm>
           <a:prstGeom prst="ellipse">
@@ -9166,7 +9166,7 @@
         </p:nvSpPr>
         <p:spPr>
           <a:xfrm>
-            <a:off x="502920" y="2750058"/>
+            <a:off x="502920" y="2578608"/>
             <a:ext cx="384048" cy="384048"/>
           </a:xfrm>
           <a:prstGeom prst="rect">
@@ -9205,8 +9205,8 @@
         </p:nvSpPr>
         <p:spPr>
           <a:xfrm>
-            <a:off x="1051560" y="2676906"/>
-            <a:ext cx="10652760" cy="1131570"/>
+            <a:off x="1051560" y="2505456"/>
+            <a:ext cx="10652760" cy="960120"/>
           </a:xfrm>
           <a:prstGeom prst="rect">
             <a:avLst/>
@@ -9258,7 +9258,7 @@
         </p:nvSpPr>
         <p:spPr>
           <a:xfrm>
-            <a:off x="502920" y="3881628"/>
+            <a:off x="502920" y="3538728"/>
             <a:ext cx="384048" cy="384048"/>
           </a:xfrm>
           <a:prstGeom prst="ellipse">
@@ -9282,7 +9282,7 @@
         </p:nvSpPr>
         <p:spPr>
           <a:xfrm>
-            <a:off x="502920" y="3881628"/>
+            <a:off x="502920" y="3538728"/>
             <a:ext cx="384048" cy="384048"/>
           </a:xfrm>
           <a:prstGeom prst="rect">
@@ -9321,8 +9321,8 @@
         </p:nvSpPr>
         <p:spPr>
           <a:xfrm>
-            <a:off x="1051560" y="3808476"/>
-            <a:ext cx="10652760" cy="1131570"/>
+            <a:off x="1051560" y="3465576"/>
+            <a:ext cx="10652760" cy="960120"/>
           </a:xfrm>
           <a:prstGeom prst="rect">
             <a:avLst/>
@@ -9374,7 +9374,7 @@
         </p:nvSpPr>
         <p:spPr>
           <a:xfrm>
-            <a:off x="502920" y="5013198"/>
+            <a:off x="502920" y="4498848"/>
             <a:ext cx="384048" cy="384048"/>
           </a:xfrm>
           <a:prstGeom prst="ellipse">
@@ -9398,7 +9398,7 @@
         </p:nvSpPr>
         <p:spPr>
           <a:xfrm>
-            <a:off x="502920" y="5013198"/>
+            <a:off x="502920" y="4498848"/>
             <a:ext cx="384048" cy="384048"/>
           </a:xfrm>
           <a:prstGeom prst="rect">
@@ -9437,8 +9437,8 @@
         </p:nvSpPr>
         <p:spPr>
           <a:xfrm>
-            <a:off x="1051560" y="4940046"/>
-            <a:ext cx="10652760" cy="1131570"/>
+            <a:off x="1051560" y="4425696"/>
+            <a:ext cx="10652760" cy="960120"/>
           </a:xfrm>
           <a:prstGeom prst="rect">
             <a:avLst/>
@@ -10150,7 +10150,7 @@
         <p:spPr>
           <a:xfrm>
             <a:off x="1051560" y="1545336"/>
-            <a:ext cx="10652760" cy="1131570"/>
+            <a:ext cx="10652760" cy="960120"/>
           </a:xfrm>
           <a:prstGeom prst="rect">
             <a:avLst/>
@@ -10202,7 +10202,7 @@
         </p:nvSpPr>
         <p:spPr>
           <a:xfrm>
-            <a:off x="502920" y="2750058"/>
+            <a:off x="502920" y="2578608"/>
             <a:ext cx="384048" cy="384048"/>
           </a:xfrm>
           <a:prstGeom prst="ellipse">
@@ -10226,7 +10226,7 @@
         </p:nvSpPr>
         <p:spPr>
           <a:xfrm>
-            <a:off x="502920" y="2750058"/>
+            <a:off x="502920" y="2578608"/>
             <a:ext cx="384048" cy="384048"/>
           </a:xfrm>
           <a:prstGeom prst="rect">
@@ -10265,8 +10265,8 @@
         </p:nvSpPr>
         <p:spPr>
           <a:xfrm>
-            <a:off x="1051560" y="2676906"/>
-            <a:ext cx="10652760" cy="1131570"/>
+            <a:off x="1051560" y="2505456"/>
+            <a:ext cx="10652760" cy="960120"/>
           </a:xfrm>
           <a:prstGeom prst="rect">
             <a:avLst/>
@@ -10318,7 +10318,7 @@
         </p:nvSpPr>
         <p:spPr>
           <a:xfrm>
-            <a:off x="502920" y="3881628"/>
+            <a:off x="502920" y="3538728"/>
             <a:ext cx="384048" cy="384048"/>
           </a:xfrm>
           <a:prstGeom prst="ellipse">
@@ -10342,7 +10342,7 @@
         </p:nvSpPr>
         <p:spPr>
           <a:xfrm>
-            <a:off x="502920" y="3881628"/>
+            <a:off x="502920" y="3538728"/>
             <a:ext cx="384048" cy="384048"/>
           </a:xfrm>
           <a:prstGeom prst="rect">
@@ -10381,8 +10381,8 @@
         </p:nvSpPr>
         <p:spPr>
           <a:xfrm>
-            <a:off x="1051560" y="3808476"/>
-            <a:ext cx="10652760" cy="1131570"/>
+            <a:off x="1051560" y="3465576"/>
+            <a:ext cx="10652760" cy="960120"/>
           </a:xfrm>
           <a:prstGeom prst="rect">
             <a:avLst/>
@@ -10434,7 +10434,7 @@
         </p:nvSpPr>
         <p:spPr>
           <a:xfrm>
-            <a:off x="502920" y="5013198"/>
+            <a:off x="502920" y="4498848"/>
             <a:ext cx="384048" cy="384048"/>
           </a:xfrm>
           <a:prstGeom prst="ellipse">
@@ -10458,7 +10458,7 @@
         </p:nvSpPr>
         <p:spPr>
           <a:xfrm>
-            <a:off x="502920" y="5013198"/>
+            <a:off x="502920" y="4498848"/>
             <a:ext cx="384048" cy="384048"/>
           </a:xfrm>
           <a:prstGeom prst="rect">
@@ -10497,8 +10497,8 @@
         </p:nvSpPr>
         <p:spPr>
           <a:xfrm>
-            <a:off x="1051560" y="4940046"/>
-            <a:ext cx="10652760" cy="1131570"/>
+            <a:off x="1051560" y="4425696"/>
+            <a:ext cx="10652760" cy="960120"/>
           </a:xfrm>
           <a:prstGeom prst="rect">
             <a:avLst/>

--- a/slides/02-ky-nang-chuyen-nghiep.pptx
+++ b/slides/02-ky-nang-chuyen-nghiep.pptx
@@ -631,6 +631,32 @@
               <a:t>• LUẬT VÀNG: hỏi xong thì IM LẶNG chờ câu trả lời.</a:t>
             </a:r>
           </a:p>
+          <a:p/>
+          <a:p>
+            <a:r>
+              <a:t>NÓI ĐỦ Ý (phần đã rút khỏi slide)</a:t>
+            </a:r>
+          </a:p>
+          <a:p>
+            <a:r>
+              <a:t>• Câu hỏi đóng, ví dụ: “Anh đã nhận được báo giá chưa?”</a:t>
+            </a:r>
+          </a:p>
+          <a:p>
+            <a:r>
+              <a:t>• Câu hỏi mở khơi người đối diện chia sẻ.</a:t>
+            </a:r>
+          </a:p>
+          <a:p>
+            <a:r>
+              <a:t>• Thăm dò – đào sâu: “Cụ thể là…?”, “Anh có thể cho ví dụ?”</a:t>
+            </a:r>
+          </a:p>
+          <a:p>
+            <a:r>
+              <a:t>• Lưu ý: tránh câu hỏi dồn ép, mớm cung; hỏi xong đừng tự trả lời thay.</a:t>
+            </a:r>
+          </a:p>
         </p:txBody>
       </p:sp>
       <p:sp>
@@ -732,6 +758,32 @@
               <a:t>• Kết thúc: TÓM TẮT LẠI thời gian, địa điểm, việc cần làm trước khi cúp máy.</a:t>
             </a:r>
           </a:p>
+          <a:p/>
+          <a:p>
+            <a:r>
+              <a:t>NÓI ĐỦ Ý (phần đã rút khỏi slide)</a:t>
+            </a:r>
+          </a:p>
+          <a:p>
+            <a:r>
+              <a:t>• Chuẩn bị: tránh gọi sớm quá, muộn quá, hoặc giờ nghỉ trưa.</a:t>
+            </a:r>
+          </a:p>
+          <a:p>
+            <a:r>
+              <a:t>• Mở đầu mẫu: “Em chào anh, em là… từ công ty… Anh có tiện nghe máy 5 phút không ạ?”</a:t>
+            </a:r>
+          </a:p>
+          <a:p>
+            <a:r>
+              <a:t>• Trình bày: nói rõ ràng; tóm tắt lại thỏa thuận gồm thời gian, địa điểm, việc cần làm.</a:t>
+            </a:r>
+          </a:p>
+          <a:p>
+            <a:r>
+              <a:t>• Kết thúc: để người có vị thế cao hơn hoặc khách hàng gác máy trước.</a:t>
+            </a:r>
+          </a:p>
         </p:txBody>
       </p:sp>
       <p:sp>
@@ -838,6 +890,27 @@
               <a:t>• Văn hóa công sở: không nghe điện riêng khi đang tiếp khách hoặc đang họp.</a:t>
             </a:r>
           </a:p>
+          <a:p/>
+          <a:p>
+            <a:r>
+              <a:t>NÓI ĐỦ Ý (phần đã rút khỏi slide)</a:t>
+            </a:r>
+          </a:p>
+          <a:p>
+            <a:r>
+              <a:t>• Giọng tươi — người gọi “nghe thấy” nụ cười của bạn; ghi chú và NHẮC LẠI lời nhắn.</a:t>
+            </a:r>
+          </a:p>
+          <a:p>
+            <a:r>
+              <a:t>• Lời nhắn phải chuyển đầy đủ và đúng hạn.</a:t>
+            </a:r>
+          </a:p>
+          <a:p>
+            <a:r>
+              <a:t>• Nhắn tin / Zalo công việc cũng cần đúng chuẩn mực như email.</a:t>
+            </a:r>
+          </a:p>
         </p:txBody>
       </p:sp>
       <p:sp>
@@ -944,6 +1017,32 @@
               <a:t>• Khen công khai bạn làm tốt; góp ý chung cho cả lớp, không nêu tên bạn làm chưa tốt.</a:t>
             </a:r>
           </a:p>
+          <a:p/>
+          <a:p>
+            <a:r>
+              <a:t>NÓI ĐỦ Ý (phần đã rút khỏi slide)</a:t>
+            </a:r>
+          </a:p>
+          <a:p>
+            <a:r>
+              <a:t>• Tình huống (a): gọi điện lần đầu cho khách hàng tiềm năng để hẹn gặp giới thiệu sản phẩm.</a:t>
+            </a:r>
+          </a:p>
+          <a:p>
+            <a:r>
+              <a:t>• Tình huống (b): gọi điện xử lý việc giao hàng trễ cho khách đang khó chịu.</a:t>
+            </a:r>
+          </a:p>
+          <a:p>
+            <a:r>
+              <a:t>• Đóng vai: một bạn vai nhân viên, một bạn vai khách hàng.</a:t>
+            </a:r>
+          </a:p>
+          <a:p>
+            <a:r>
+              <a:t>• Thuyết trình: chủ đề đã chuẩn bị ở nhà; lớp nhận xét cả ngôn ngữ cơ thể.</a:t>
+            </a:r>
+          </a:p>
         </p:txBody>
       </p:sp>
       <p:sp>
@@ -1403,6 +1502,27 @@
               <a:t>• CHỐT: ấn tượng ban đầu ĐƯỢC CHUẨN BỊ, không phải may mắn.</a:t>
             </a:r>
           </a:p>
+          <a:p/>
+          <a:p>
+            <a:r>
+              <a:t>NÓI ĐỦ Ý (phần đã rút khỏi slide)</a:t>
+            </a:r>
+          </a:p>
+          <a:p>
+            <a:r>
+              <a:t>• Vài giây đầu: não bộ hình thành đánh giá gần như tức thì từ ngoại hình, thần thái, cách chào — và ấn tượng đầu rất khó đảo ngược về sau.</a:t>
+            </a:r>
+          </a:p>
+          <a:p>
+            <a:r>
+              <a:t>• Quy tắc 4×20 đầy đủ: 20 giây đầu tiên • 20 bước chân đầu tiên • 20 cm gương mặt (ánh mắt, nụ cười) • 20 từ đầu tiên — chuẩn bị kỹ cả bốn.</a:t>
+            </a:r>
+          </a:p>
+          <a:p>
+            <a:r>
+              <a:t>• Ba trụ cột: trang phục phù hợp bối cảnh VÀ vị trí; thần thái tự tin, thân thiện; lời chào – giới thiệu rõ ràng, đúng nghi thức.</a:t>
+            </a:r>
+          </a:p>
         </p:txBody>
       </p:sp>
       <p:sp>
@@ -1903,6 +2023,32 @@
               <a:t>• Mẹo nhớ thứ tự giới thiệu: giới thiệu người ÍT quan trọng VỚI người quan trọng hơn.</a:t>
             </a:r>
           </a:p>
+          <a:p/>
+          <a:p>
+            <a:r>
+              <a:t>NÓI ĐỦ Ý (phần đã rút khỏi slide)</a:t>
+            </a:r>
+          </a:p>
+          <a:p>
+            <a:r>
+              <a:t>• Chào hỏi: người nhỏ chào người lớn, nhân viên chào cấp trên trước; nói rõ tên – chức danh – đơn vị.</a:t>
+            </a:r>
+          </a:p>
+          <a:p>
+            <a:r>
+              <a:t>• Bắt tay: người có vị thế cao hơn hoặc phụ nữ chủ động đưa tay trước; không bắt quá lỏng, quá chặt, quá lâu.</a:t>
+            </a:r>
+          </a:p>
+          <a:p>
+            <a:r>
+              <a:t>• Danh thiếp: đừng nhét ngay vào túi quần — đó là chỗ sinh viên hay mắc nhất.</a:t>
+            </a:r>
+          </a:p>
+          <a:p>
+            <a:r>
+              <a:t>• Không gian chung: thang máy, phòng họp, bàn làm việc mở — không nói to chuyện riêng.</a:t>
+            </a:r>
+          </a:p>
         </p:txBody>
       </p:sp>
       <p:sp>
@@ -2105,6 +2251,27 @@
               <a:t>• Mở đầu bằng câu hỏi / con số / câu chuyện — cho lớp thử nghĩ 1 câu mở đầu cho đề tài tự chọn.</a:t>
             </a:r>
           </a:p>
+          <a:p/>
+          <a:p>
+            <a:r>
+              <a:t>NÓI ĐỦ Ý (phần đã rút khỏi slide)</a:t>
+            </a:r>
+          </a:p>
+          <a:p>
+            <a:r>
+              <a:t>• Mở đầu 10–15%: câu hỏi gây tò mò, con số ấn tượng, hoặc câu chuyện ngắn; giới thiệu bản thân rồi cho người nghe biết lộ trình bài nói.</a:t>
+            </a:r>
+          </a:p>
+          <a:p>
+            <a:r>
+              <a:t>• Thân bài 70–80%: tối đa BA ý chính; mỗi ý có câu chuyển ý rõ ràng.</a:t>
+            </a:r>
+          </a:p>
+          <a:p>
+            <a:r>
+              <a:t>• Kết luận 10–15%: đọng lại MỘT điều; chuẩn bị sẵn phần hỏi – đáp.</a:t>
+            </a:r>
+          </a:p>
         </p:txBody>
       </p:sp>
       <p:sp>
@@ -2211,6 +2378,32 @@
               <a:t>• Câu hỏi khó: nghe hết → cảm ơn → trả lời ngắn; chưa chắc thì HẸN TRẢ LỜI SAU, không bịa.</a:t>
             </a:r>
           </a:p>
+          <a:p/>
+          <a:p>
+            <a:r>
+              <a:t>NÓI ĐỦ Ý (phần đã rút khỏi slide)</a:t>
+            </a:r>
+          </a:p>
+          <a:p>
+            <a:r>
+              <a:t>• Ngôn ngữ cơ thể: di chuyển có chủ đích; không đút túi, không vặn bút.</a:t>
+            </a:r>
+          </a:p>
+          <a:p>
+            <a:r>
+              <a:t>• Giọng nói: thay đổi cả tốc độ lẫn ngữ điệu — khoảng lặng là gia vị của bài nói.</a:t>
+            </a:r>
+          </a:p>
+          <a:p>
+            <a:r>
+              <a:t>• Run sợ: run là BÌNH THƯỜNG; đến sớm làm quen không gian; tập trung vào thông điệp thay vì vào bản thân.</a:t>
+            </a:r>
+          </a:p>
+          <a:p>
+            <a:r>
+              <a:t>• Câu hỏi: chưa chắc thì hẹn trả lời sau — trung thực hơn là đoán bừa.</a:t>
+            </a:r>
+          </a:p>
         </p:txBody>
       </p:sp>
       <p:sp>
@@ -2315,6 +2508,17 @@
           <a:p>
             <a:r>
               <a:t>• Kỹ thuật diễn đạt lại: "Nếu em hiểu đúng thì ý anh/chị là…" — cho lớp tập nói câu này.</a:t>
+            </a:r>
+          </a:p>
+          <a:p/>
+          <a:p>
+            <a:r>
+              <a:t>NÓI ĐỦ Ý (phần đã rút khỏi slide)</a:t>
+            </a:r>
+          </a:p>
+          <a:p>
+            <a:r>
+              <a:t>• Lắng nghe chủ động đủ ý: tập trung toàn bộ vào người nói • không ngắt lời, không vội phán xét • ghi chú ý chính • phản hồi bằng ánh mắt, gật đầu • diễn đạt lại để xác nhận: “Nếu em hiểu đúng thì ý anh/chị là…”.</a:t>
             </a:r>
           </a:p>
         </p:txBody>
@@ -2712,7 +2916,7 @@
       </p:sp>
       <p:pic>
         <p:nvPicPr>
-          <p:cNvPr id="3" name="Image 0" descr="assets/logo_tron.png">    </p:cNvPr>
+          <p:cNvPr id="3" name="Image 0" descr="/home/user/comdraft/assets/img/dau-huong.png">    </p:cNvPr>
           <p:cNvPicPr>
             <a:picLocks noChangeAspect="1"/>
           </p:cNvPicPr>
@@ -2738,7 +2942,7 @@
       </p:pic>
       <p:pic>
         <p:nvPicPr>
-          <p:cNvPr id="4" name="Image 1" descr="assets/logo_ngang.png">    </p:cNvPr>
+          <p:cNvPr id="4" name="Image 1" descr="/home/user/comdraft/assets/img/lockup-huong.png">    </p:cNvPr>
           <p:cNvPicPr>
             <a:picLocks noChangeAspect="1"/>
           </p:cNvPicPr>
@@ -3046,6 +3250,1785 @@
 </file>
 
 <file path=ppt/slides/slide10.xml><?xml version="1.0" encoding="utf-8"?>
+<p:sld xmlns:a="http://schemas.openxmlformats.org/drawingml/2006/main" xmlns:r="http://schemas.openxmlformats.org/officeDocument/2006/relationships" xmlns:p="http://schemas.openxmlformats.org/presentationml/2006/main">
+  <p:cSld name="Slide 7">
+    <p:bg>
+      <p:bgPr>
+        <a:solidFill>
+          <a:srgbClr val="FDFBF8"/>
+        </a:solidFill>
+      </p:bgPr>
+    </p:bg>
+    <p:spTree>
+      <p:nvGrpSpPr>
+        <p:cNvPr id="1" name=""/>
+        <p:cNvGrpSpPr/>
+        <p:nvPr/>
+      </p:nvGrpSpPr>
+      <p:grpSpPr>
+        <a:xfrm>
+          <a:off x="0" y="0"/>
+          <a:ext cx="0" cy="0"/>
+          <a:chOff x="0" y="0"/>
+          <a:chExt cx="0" cy="0"/>
+        </a:xfrm>
+      </p:grpSpPr>
+      <p:pic>
+        <p:nvPicPr>
+          <p:cNvPr id="2" name="Image 0" descr="/home/user/comdraft/assets/img/dau-huong.png">    </p:cNvPr>
+          <p:cNvPicPr>
+            <a:picLocks noChangeAspect="1"/>
+          </p:cNvPicPr>
+          <p:nvPr/>
+        </p:nvPicPr>
+        <p:blipFill>
+          <a:blip r:embed="rId1"/>
+          <a:stretch>
+            <a:fillRect/>
+          </a:stretch>
+        </p:blipFill>
+        <p:spPr>
+          <a:xfrm>
+            <a:off x="411480" y="6327648"/>
+            <a:ext cx="384048" cy="384048"/>
+          </a:xfrm>
+          <a:prstGeom prst="rect">
+            <a:avLst/>
+          </a:prstGeom>
+        </p:spPr>
+      </p:pic>
+      <p:sp>
+        <p:nvSpPr>
+          <p:cNvPr id="3" name="Text 0"/>
+          <p:cNvSpPr/>
+          <p:nvPr/>
+        </p:nvSpPr>
+        <p:spPr>
+          <a:xfrm>
+            <a:off x="868680" y="6355080"/>
+            <a:ext cx="7498080" cy="310896"/>
+          </a:xfrm>
+          <a:prstGeom prst="rect">
+            <a:avLst/>
+          </a:prstGeom>
+          <a:noFill/>
+          <a:ln/>
+        </p:spPr>
+        <p:txBody>
+          <a:bodyPr wrap="square" lIns="0" tIns="0" rIns="0" bIns="0" rtlCol="0" anchor="ctr"/>
+          <a:lstStyle/>
+          <a:p>
+            <a:pPr indent="0" marL="0">
+              <a:buNone/>
+            </a:pPr>
+            <a:r>
+              <a:rPr lang="en-US" sz="900" dirty="0">
+                <a:solidFill>
+                  <a:srgbClr val="8A7A76"/>
+                </a:solidFill>
+                <a:latin typeface="Calibri" pitchFamily="34" charset="0"/>
+                <a:ea typeface="Calibri" pitchFamily="34" charset="-122"/>
+                <a:cs typeface="Calibri" pitchFamily="34" charset="-120"/>
+              </a:rPr>
+              <a:t>Je m'appelle Huong  •  GV. Đỗ Thùy Hương  •  EC1103</a:t>
+            </a:r>
+            <a:endParaRPr lang="en-US" sz="900" dirty="0"/>
+          </a:p>
+        </p:txBody>
+      </p:sp>
+      <p:sp>
+        <p:nvSpPr>
+          <p:cNvPr id="4" name="Text 1"/>
+          <p:cNvSpPr/>
+          <p:nvPr/>
+        </p:nvSpPr>
+        <p:spPr>
+          <a:xfrm>
+            <a:off x="8503920" y="6355080"/>
+            <a:ext cx="2743200" cy="310896"/>
+          </a:xfrm>
+          <a:prstGeom prst="rect">
+            <a:avLst/>
+          </a:prstGeom>
+          <a:noFill/>
+          <a:ln/>
+        </p:spPr>
+        <p:txBody>
+          <a:bodyPr wrap="square" lIns="0" tIns="0" rIns="0" bIns="0" rtlCol="0" anchor="ctr"/>
+          <a:lstStyle/>
+          <a:p>
+            <a:pPr algn="r" indent="0" marL="0">
+              <a:buNone/>
+            </a:pPr>
+            <a:r>
+              <a:rPr lang="en-US" sz="900" dirty="0">
+                <a:solidFill>
+                  <a:srgbClr val="8A7A76"/>
+                </a:solidFill>
+                <a:latin typeface="Calibri" pitchFamily="34" charset="0"/>
+                <a:ea typeface="Calibri" pitchFamily="34" charset="-122"/>
+                <a:cs typeface="Calibri" pitchFamily="34" charset="-120"/>
+              </a:rPr>
+              <a:t>Chương 2</a:t>
+            </a:r>
+            <a:endParaRPr lang="en-US" sz="900" dirty="0"/>
+          </a:p>
+        </p:txBody>
+      </p:sp>
+      <p:sp>
+        <p:nvSpPr>
+          <p:cNvPr id="5" name="Shape 2"/>
+          <p:cNvSpPr/>
+          <p:nvPr/>
+        </p:nvSpPr>
+        <p:spPr>
+          <a:xfrm>
+            <a:off x="11430000" y="6327648"/>
+            <a:ext cx="365760" cy="365760"/>
+          </a:xfrm>
+          <a:prstGeom prst="ellipse">
+            <a:avLst/>
+          </a:prstGeom>
+          <a:solidFill>
+            <a:srgbClr val="DC756A"/>
+          </a:solidFill>
+          <a:ln/>
+        </p:spPr>
+        <p:txBody>
+          <a:bodyPr/>
+          <a:p/>
+        </p:txBody>
+      </p:sp>
+      <p:sp>
+        <p:nvSpPr>
+          <p:cNvPr id="6" name="Text 3"/>
+          <p:cNvSpPr/>
+          <p:nvPr/>
+        </p:nvSpPr>
+        <p:spPr>
+          <a:xfrm>
+            <a:off x="11430000" y="6327648"/>
+            <a:ext cx="365760" cy="365760"/>
+          </a:xfrm>
+          <a:prstGeom prst="rect">
+            <a:avLst/>
+          </a:prstGeom>
+          <a:noFill/>
+          <a:ln/>
+        </p:spPr>
+        <p:txBody>
+          <a:bodyPr wrap="square" lIns="0" tIns="0" rIns="0" bIns="0" rtlCol="0" anchor="ctr"/>
+          <a:lstStyle/>
+          <a:p>
+            <a:pPr algn="ctr" indent="0" marL="0">
+              <a:buNone/>
+            </a:pPr>
+            <a:r>
+              <a:rPr lang="en-US" sz="1000" b="1" dirty="0">
+                <a:solidFill>
+                  <a:srgbClr val="FFFFFF"/>
+                </a:solidFill>
+                <a:latin typeface="Calibri" pitchFamily="34" charset="0"/>
+                <a:ea typeface="Calibri" pitchFamily="34" charset="-122"/>
+                <a:cs typeface="Calibri" pitchFamily="34" charset="-120"/>
+              </a:rPr>
+              <a:t>7</a:t>
+            </a:r>
+            <a:endParaRPr lang="en-US" sz="1000" dirty="0"/>
+          </a:p>
+        </p:txBody>
+      </p:sp>
+      <p:sp>
+        <p:nvSpPr>
+          <p:cNvPr id="7" name="Text 4"/>
+          <p:cNvSpPr/>
+          <p:nvPr/>
+        </p:nvSpPr>
+        <p:spPr>
+          <a:xfrm>
+            <a:off x="502920" y="310896"/>
+            <a:ext cx="11155680" cy="274320"/>
+          </a:xfrm>
+          <a:prstGeom prst="rect">
+            <a:avLst/>
+          </a:prstGeom>
+          <a:noFill/>
+          <a:ln/>
+        </p:spPr>
+        <p:txBody>
+          <a:bodyPr wrap="square" lIns="0" tIns="0" rIns="0" bIns="0" rtlCol="0" anchor="ctr"/>
+          <a:lstStyle/>
+          <a:p>
+            <a:pPr indent="0" marL="0">
+              <a:buNone/>
+            </a:pPr>
+            <a:r>
+              <a:rPr lang="en-US" sz="1100" b="1" spc="300" kern="0" dirty="0">
+                <a:solidFill>
+                  <a:srgbClr val="DC756A"/>
+                </a:solidFill>
+                <a:latin typeface="Calibri" pitchFamily="34" charset="0"/>
+                <a:ea typeface="Calibri" pitchFamily="34" charset="-122"/>
+                <a:cs typeface="Calibri" pitchFamily="34" charset="-120"/>
+              </a:rPr>
+              <a:t>2.2</a:t>
+            </a:r>
+            <a:endParaRPr lang="en-US" sz="1100" dirty="0"/>
+          </a:p>
+        </p:txBody>
+      </p:sp>
+      <p:sp>
+        <p:nvSpPr>
+          <p:cNvPr id="8" name="Text 5"/>
+          <p:cNvSpPr/>
+          <p:nvPr/>
+        </p:nvSpPr>
+        <p:spPr>
+          <a:xfrm>
+            <a:off x="502920" y="576072"/>
+            <a:ext cx="11155680" cy="713232"/>
+          </a:xfrm>
+          <a:prstGeom prst="rect">
+            <a:avLst/>
+          </a:prstGeom>
+          <a:noFill/>
+          <a:ln/>
+        </p:spPr>
+        <p:txBody>
+          <a:bodyPr wrap="square" lIns="0" tIns="0" rIns="0" bIns="0" rtlCol="0" anchor="ctr"/>
+          <a:lstStyle/>
+          <a:p>
+            <a:pPr indent="0" marL="0">
+              <a:buNone/>
+            </a:pPr>
+            <a:r>
+              <a:rPr lang="en-US" sz="2700" b="1" dirty="0">
+                <a:solidFill>
+                  <a:srgbClr val="AC4D33"/>
+                </a:solidFill>
+                <a:latin typeface="Cambria" pitchFamily="34" charset="0"/>
+                <a:ea typeface="Cambria" pitchFamily="34" charset="-122"/>
+                <a:cs typeface="Cambria" pitchFamily="34" charset="-120"/>
+              </a:rPr>
+              <a:t>Cấu trúc bài thuyết trình</a:t>
+            </a:r>
+            <a:endParaRPr lang="en-US" sz="2700" dirty="0"/>
+          </a:p>
+        </p:txBody>
+      </p:sp>
+      <p:sp>
+        <p:nvSpPr>
+          <p:cNvPr id="9" name="Shape 6"/>
+          <p:cNvSpPr/>
+          <p:nvPr/>
+        </p:nvSpPr>
+        <p:spPr>
+          <a:xfrm>
+            <a:off x="502920" y="1417320"/>
+            <a:ext cx="11201400" cy="1490472"/>
+          </a:xfrm>
+          <a:prstGeom prst="roundRect">
+            <a:avLst>
+              <a:gd name="adj" fmla="val 5521"/>
+            </a:avLst>
+          </a:prstGeom>
+          <a:solidFill>
+            <a:srgbClr val="FDF1EF"/>
+          </a:solidFill>
+          <a:ln w="15875">
+            <a:solidFill>
+              <a:srgbClr val="FBCEC9"/>
+            </a:solidFill>
+            <a:prstDash val="solid"/>
+          </a:ln>
+        </p:spPr>
+        <p:txBody>
+          <a:bodyPr/>
+          <a:p/>
+        </p:txBody>
+      </p:sp>
+      <p:sp>
+        <p:nvSpPr>
+          <p:cNvPr id="10" name="Text 7"/>
+          <p:cNvSpPr/>
+          <p:nvPr/>
+        </p:nvSpPr>
+        <p:spPr>
+          <a:xfrm>
+            <a:off x="722376" y="1472184"/>
+            <a:ext cx="10762488" cy="1380744"/>
+          </a:xfrm>
+          <a:prstGeom prst="rect">
+            <a:avLst/>
+          </a:prstGeom>
+          <a:noFill/>
+          <a:ln/>
+        </p:spPr>
+        <p:txBody>
+          <a:bodyPr wrap="square" lIns="0" tIns="0" rIns="0" bIns="0" rtlCol="0" anchor="ctr"/>
+          <a:lstStyle/>
+          <a:p>
+            <a:pPr indent="0" marL="0">
+              <a:buNone/>
+            </a:pPr>
+            <a:r>
+              <a:rPr lang="en-US" sz="1500" b="1" dirty="0">
+                <a:solidFill>
+                  <a:srgbClr val="AC4D33"/>
+                </a:solidFill>
+                <a:latin typeface="Calibri" pitchFamily="34" charset="0"/>
+                <a:ea typeface="Calibri" pitchFamily="34" charset="-122"/>
+                <a:cs typeface="Calibri" pitchFamily="34" charset="-120"/>
+              </a:rPr>
+              <a:t>Mở đầu (10–15%) — giành lấy sự chú ý</a:t>
+            </a:r>
+            <a:endParaRPr lang="en-US" sz="1500" dirty="0"/>
+          </a:p>
+          <a:p>
+            <a:pPr indent="0" marL="0">
+              <a:buNone/>
+            </a:pPr>
+            <a:r>
+              <a:rPr lang="en-US" sz="1300" dirty="0">
+                <a:solidFill>
+                  <a:srgbClr val="3A2B28"/>
+                </a:solidFill>
+                <a:latin typeface="Calibri" pitchFamily="34" charset="0"/>
+                <a:ea typeface="Calibri" pitchFamily="34" charset="-122"/>
+                <a:cs typeface="Calibri" pitchFamily="34" charset="-120"/>
+              </a:rPr>
+              <a:t>Câu hỏi tò mò, con số, câu chuyện ngắn — rồi cho biết lộ trình</a:t>
+            </a:r>
+            <a:endParaRPr lang="en-US" sz="1500" dirty="0"/>
+          </a:p>
+        </p:txBody>
+      </p:sp>
+      <p:sp>
+        <p:nvSpPr>
+          <p:cNvPr id="11" name="Shape 8"/>
+          <p:cNvSpPr/>
+          <p:nvPr/>
+        </p:nvSpPr>
+        <p:spPr>
+          <a:xfrm>
+            <a:off x="502920" y="3072384"/>
+            <a:ext cx="11201400" cy="1490472"/>
+          </a:xfrm>
+          <a:prstGeom prst="roundRect">
+            <a:avLst>
+              <a:gd name="adj" fmla="val 5521"/>
+            </a:avLst>
+          </a:prstGeom>
+          <a:solidFill>
+            <a:srgbClr val="FDF1EF"/>
+          </a:solidFill>
+          <a:ln w="15875">
+            <a:solidFill>
+              <a:srgbClr val="FBCEC9"/>
+            </a:solidFill>
+            <a:prstDash val="solid"/>
+          </a:ln>
+        </p:spPr>
+        <p:txBody>
+          <a:bodyPr/>
+          <a:p/>
+        </p:txBody>
+      </p:sp>
+      <p:sp>
+        <p:nvSpPr>
+          <p:cNvPr id="12" name="Text 9"/>
+          <p:cNvSpPr/>
+          <p:nvPr/>
+        </p:nvSpPr>
+        <p:spPr>
+          <a:xfrm>
+            <a:off x="722376" y="3127248"/>
+            <a:ext cx="10762488" cy="1380744"/>
+          </a:xfrm>
+          <a:prstGeom prst="rect">
+            <a:avLst/>
+          </a:prstGeom>
+          <a:noFill/>
+          <a:ln/>
+        </p:spPr>
+        <p:txBody>
+          <a:bodyPr wrap="square" lIns="0" tIns="0" rIns="0" bIns="0" rtlCol="0" anchor="ctr"/>
+          <a:lstStyle/>
+          <a:p>
+            <a:pPr indent="0" marL="0">
+              <a:buNone/>
+            </a:pPr>
+            <a:r>
+              <a:rPr lang="en-US" sz="1500" b="1" dirty="0">
+                <a:solidFill>
+                  <a:srgbClr val="AC4D33"/>
+                </a:solidFill>
+                <a:latin typeface="Calibri" pitchFamily="34" charset="0"/>
+                <a:ea typeface="Calibri" pitchFamily="34" charset="-122"/>
+                <a:cs typeface="Calibri" pitchFamily="34" charset="-120"/>
+              </a:rPr>
+              <a:t>Thân bài (70–80%) — tối đa 3 ý chính</a:t>
+            </a:r>
+            <a:endParaRPr lang="en-US" sz="1500" dirty="0"/>
+          </a:p>
+          <a:p>
+            <a:pPr indent="0" marL="0">
+              <a:buNone/>
+            </a:pPr>
+            <a:r>
+              <a:rPr lang="en-US" sz="1300" dirty="0">
+                <a:solidFill>
+                  <a:srgbClr val="3A2B28"/>
+                </a:solidFill>
+                <a:latin typeface="Calibri" pitchFamily="34" charset="0"/>
+                <a:ea typeface="Calibri" pitchFamily="34" charset="-122"/>
+                <a:cs typeface="Calibri" pitchFamily="34" charset="-120"/>
+              </a:rPr>
+              <a:t>Mỗi ý: luận điểm → dẫn chứng → ví dụ; ý mạnh nhất đặt đầu hoặc cuối</a:t>
+            </a:r>
+            <a:endParaRPr lang="en-US" sz="1500" dirty="0"/>
+          </a:p>
+        </p:txBody>
+      </p:sp>
+      <p:sp>
+        <p:nvSpPr>
+          <p:cNvPr id="13" name="Shape 10"/>
+          <p:cNvSpPr/>
+          <p:nvPr/>
+        </p:nvSpPr>
+        <p:spPr>
+          <a:xfrm>
+            <a:off x="502920" y="4727448"/>
+            <a:ext cx="11201400" cy="1490472"/>
+          </a:xfrm>
+          <a:prstGeom prst="roundRect">
+            <a:avLst>
+              <a:gd name="adj" fmla="val 5521"/>
+            </a:avLst>
+          </a:prstGeom>
+          <a:solidFill>
+            <a:srgbClr val="FDF1EF"/>
+          </a:solidFill>
+          <a:ln w="15875">
+            <a:solidFill>
+              <a:srgbClr val="FBCEC9"/>
+            </a:solidFill>
+            <a:prstDash val="solid"/>
+          </a:ln>
+        </p:spPr>
+        <p:txBody>
+          <a:bodyPr/>
+          <a:p/>
+        </p:txBody>
+      </p:sp>
+      <p:sp>
+        <p:nvSpPr>
+          <p:cNvPr id="14" name="Text 11"/>
+          <p:cNvSpPr/>
+          <p:nvPr/>
+        </p:nvSpPr>
+        <p:spPr>
+          <a:xfrm>
+            <a:off x="722376" y="4782312"/>
+            <a:ext cx="10762488" cy="1380744"/>
+          </a:xfrm>
+          <a:prstGeom prst="rect">
+            <a:avLst/>
+          </a:prstGeom>
+          <a:noFill/>
+          <a:ln/>
+        </p:spPr>
+        <p:txBody>
+          <a:bodyPr wrap="square" lIns="0" tIns="0" rIns="0" bIns="0" rtlCol="0" anchor="ctr"/>
+          <a:lstStyle/>
+          <a:p>
+            <a:pPr indent="0" marL="0">
+              <a:buNone/>
+            </a:pPr>
+            <a:r>
+              <a:rPr lang="en-US" sz="1500" b="1" dirty="0">
+                <a:solidFill>
+                  <a:srgbClr val="AC4D33"/>
+                </a:solidFill>
+                <a:latin typeface="Calibri" pitchFamily="34" charset="0"/>
+                <a:ea typeface="Calibri" pitchFamily="34" charset="-122"/>
+                <a:cs typeface="Calibri" pitchFamily="34" charset="-120"/>
+              </a:rPr>
+              <a:t>Kết luận (10–15%) — đọng lại một điều</a:t>
+            </a:r>
+            <a:endParaRPr lang="en-US" sz="1500" dirty="0"/>
+          </a:p>
+          <a:p>
+            <a:pPr indent="0" marL="0">
+              <a:buNone/>
+            </a:pPr>
+            <a:r>
+              <a:rPr lang="en-US" sz="1300" dirty="0">
+                <a:solidFill>
+                  <a:srgbClr val="3A2B28"/>
+                </a:solidFill>
+                <a:latin typeface="Calibri" pitchFamily="34" charset="0"/>
+                <a:ea typeface="Calibri" pitchFamily="34" charset="-122"/>
+                <a:cs typeface="Calibri" pitchFamily="34" charset="-120"/>
+              </a:rPr>
+              <a:t>Tóm tắt 3 ý, nhấn thông điệp, kêu gọi hành động cụ thể</a:t>
+            </a:r>
+            <a:endParaRPr lang="en-US" sz="1500" dirty="0"/>
+          </a:p>
+        </p:txBody>
+      </p:sp>
+    </p:spTree>
+  </p:cSld>
+  <p:clrMapOvr>
+    <a:masterClrMapping/>
+  </p:clrMapOvr>
+</p:sld>
+</file>
+
+<file path=ppt/slides/slide11.xml><?xml version="1.0" encoding="utf-8"?>
+<p:sld xmlns:a="http://schemas.openxmlformats.org/drawingml/2006/main" xmlns:r="http://schemas.openxmlformats.org/officeDocument/2006/relationships" xmlns:p="http://schemas.openxmlformats.org/presentationml/2006/main">
+  <p:cSld name="Slide 8">
+    <p:bg>
+      <p:bgPr>
+        <a:solidFill>
+          <a:srgbClr val="FDFBF8"/>
+        </a:solidFill>
+      </p:bgPr>
+    </p:bg>
+    <p:spTree>
+      <p:nvGrpSpPr>
+        <p:cNvPr id="1" name=""/>
+        <p:cNvGrpSpPr/>
+        <p:nvPr/>
+      </p:nvGrpSpPr>
+      <p:grpSpPr>
+        <a:xfrm>
+          <a:off x="0" y="0"/>
+          <a:ext cx="0" cy="0"/>
+          <a:chOff x="0" y="0"/>
+          <a:chExt cx="0" cy="0"/>
+        </a:xfrm>
+      </p:grpSpPr>
+      <p:pic>
+        <p:nvPicPr>
+          <p:cNvPr id="2" name="Image 0" descr="/home/user/comdraft/assets/img/dau-huong.png">    </p:cNvPr>
+          <p:cNvPicPr>
+            <a:picLocks noChangeAspect="1"/>
+          </p:cNvPicPr>
+          <p:nvPr/>
+        </p:nvPicPr>
+        <p:blipFill>
+          <a:blip r:embed="rId1"/>
+          <a:stretch>
+            <a:fillRect/>
+          </a:stretch>
+        </p:blipFill>
+        <p:spPr>
+          <a:xfrm>
+            <a:off x="411480" y="6327648"/>
+            <a:ext cx="384048" cy="384048"/>
+          </a:xfrm>
+          <a:prstGeom prst="rect">
+            <a:avLst/>
+          </a:prstGeom>
+        </p:spPr>
+      </p:pic>
+      <p:sp>
+        <p:nvSpPr>
+          <p:cNvPr id="3" name="Text 0"/>
+          <p:cNvSpPr/>
+          <p:nvPr/>
+        </p:nvSpPr>
+        <p:spPr>
+          <a:xfrm>
+            <a:off x="868680" y="6355080"/>
+            <a:ext cx="7498080" cy="310896"/>
+          </a:xfrm>
+          <a:prstGeom prst="rect">
+            <a:avLst/>
+          </a:prstGeom>
+          <a:noFill/>
+          <a:ln/>
+        </p:spPr>
+        <p:txBody>
+          <a:bodyPr wrap="square" lIns="0" tIns="0" rIns="0" bIns="0" rtlCol="0" anchor="ctr"/>
+          <a:lstStyle/>
+          <a:p>
+            <a:pPr indent="0" marL="0">
+              <a:buNone/>
+            </a:pPr>
+            <a:r>
+              <a:rPr lang="en-US" sz="900" dirty="0">
+                <a:solidFill>
+                  <a:srgbClr val="8A7A76"/>
+                </a:solidFill>
+                <a:latin typeface="Calibri" pitchFamily="34" charset="0"/>
+                <a:ea typeface="Calibri" pitchFamily="34" charset="-122"/>
+                <a:cs typeface="Calibri" pitchFamily="34" charset="-120"/>
+              </a:rPr>
+              <a:t>Je m'appelle Huong  •  GV. Đỗ Thùy Hương  •  EC1103</a:t>
+            </a:r>
+            <a:endParaRPr lang="en-US" sz="900" dirty="0"/>
+          </a:p>
+        </p:txBody>
+      </p:sp>
+      <p:sp>
+        <p:nvSpPr>
+          <p:cNvPr id="4" name="Text 1"/>
+          <p:cNvSpPr/>
+          <p:nvPr/>
+        </p:nvSpPr>
+        <p:spPr>
+          <a:xfrm>
+            <a:off x="8503920" y="6355080"/>
+            <a:ext cx="2743200" cy="310896"/>
+          </a:xfrm>
+          <a:prstGeom prst="rect">
+            <a:avLst/>
+          </a:prstGeom>
+          <a:noFill/>
+          <a:ln/>
+        </p:spPr>
+        <p:txBody>
+          <a:bodyPr wrap="square" lIns="0" tIns="0" rIns="0" bIns="0" rtlCol="0" anchor="ctr"/>
+          <a:lstStyle/>
+          <a:p>
+            <a:pPr algn="r" indent="0" marL="0">
+              <a:buNone/>
+            </a:pPr>
+            <a:r>
+              <a:rPr lang="en-US" sz="900" dirty="0">
+                <a:solidFill>
+                  <a:srgbClr val="8A7A76"/>
+                </a:solidFill>
+                <a:latin typeface="Calibri" pitchFamily="34" charset="0"/>
+                <a:ea typeface="Calibri" pitchFamily="34" charset="-122"/>
+                <a:cs typeface="Calibri" pitchFamily="34" charset="-120"/>
+              </a:rPr>
+              <a:t>Chương 2</a:t>
+            </a:r>
+            <a:endParaRPr lang="en-US" sz="900" dirty="0"/>
+          </a:p>
+        </p:txBody>
+      </p:sp>
+      <p:sp>
+        <p:nvSpPr>
+          <p:cNvPr id="5" name="Shape 2"/>
+          <p:cNvSpPr/>
+          <p:nvPr/>
+        </p:nvSpPr>
+        <p:spPr>
+          <a:xfrm>
+            <a:off x="11430000" y="6327648"/>
+            <a:ext cx="365760" cy="365760"/>
+          </a:xfrm>
+          <a:prstGeom prst="ellipse">
+            <a:avLst/>
+          </a:prstGeom>
+          <a:solidFill>
+            <a:srgbClr val="DC756A"/>
+          </a:solidFill>
+          <a:ln/>
+        </p:spPr>
+        <p:txBody>
+          <a:bodyPr/>
+          <a:p/>
+        </p:txBody>
+      </p:sp>
+      <p:sp>
+        <p:nvSpPr>
+          <p:cNvPr id="6" name="Text 3"/>
+          <p:cNvSpPr/>
+          <p:nvPr/>
+        </p:nvSpPr>
+        <p:spPr>
+          <a:xfrm>
+            <a:off x="11430000" y="6327648"/>
+            <a:ext cx="365760" cy="365760"/>
+          </a:xfrm>
+          <a:prstGeom prst="rect">
+            <a:avLst/>
+          </a:prstGeom>
+          <a:noFill/>
+          <a:ln/>
+        </p:spPr>
+        <p:txBody>
+          <a:bodyPr wrap="square" lIns="0" tIns="0" rIns="0" bIns="0" rtlCol="0" anchor="ctr"/>
+          <a:lstStyle/>
+          <a:p>
+            <a:pPr algn="ctr" indent="0" marL="0">
+              <a:buNone/>
+            </a:pPr>
+            <a:r>
+              <a:rPr lang="en-US" sz="1000" b="1" dirty="0">
+                <a:solidFill>
+                  <a:srgbClr val="FFFFFF"/>
+                </a:solidFill>
+                <a:latin typeface="Calibri" pitchFamily="34" charset="0"/>
+                <a:ea typeface="Calibri" pitchFamily="34" charset="-122"/>
+                <a:cs typeface="Calibri" pitchFamily="34" charset="-120"/>
+              </a:rPr>
+              <a:t>8</a:t>
+            </a:r>
+            <a:endParaRPr lang="en-US" sz="1000" dirty="0"/>
+          </a:p>
+        </p:txBody>
+      </p:sp>
+      <p:sp>
+        <p:nvSpPr>
+          <p:cNvPr id="7" name="Text 4"/>
+          <p:cNvSpPr/>
+          <p:nvPr/>
+        </p:nvSpPr>
+        <p:spPr>
+          <a:xfrm>
+            <a:off x="502920" y="310896"/>
+            <a:ext cx="11155680" cy="274320"/>
+          </a:xfrm>
+          <a:prstGeom prst="rect">
+            <a:avLst/>
+          </a:prstGeom>
+          <a:noFill/>
+          <a:ln/>
+        </p:spPr>
+        <p:txBody>
+          <a:bodyPr wrap="square" lIns="0" tIns="0" rIns="0" bIns="0" rtlCol="0" anchor="ctr"/>
+          <a:lstStyle/>
+          <a:p>
+            <a:pPr indent="0" marL="0">
+              <a:buNone/>
+            </a:pPr>
+            <a:r>
+              <a:rPr lang="en-US" sz="1100" b="1" spc="300" kern="0" dirty="0">
+                <a:solidFill>
+                  <a:srgbClr val="DC756A"/>
+                </a:solidFill>
+                <a:latin typeface="Calibri" pitchFamily="34" charset="0"/>
+                <a:ea typeface="Calibri" pitchFamily="34" charset="-122"/>
+                <a:cs typeface="Calibri" pitchFamily="34" charset="-120"/>
+              </a:rPr>
+              <a:t>2.2</a:t>
+            </a:r>
+            <a:endParaRPr lang="en-US" sz="1100" dirty="0"/>
+          </a:p>
+        </p:txBody>
+      </p:sp>
+      <p:sp>
+        <p:nvSpPr>
+          <p:cNvPr id="8" name="Text 5"/>
+          <p:cNvSpPr/>
+          <p:nvPr/>
+        </p:nvSpPr>
+        <p:spPr>
+          <a:xfrm>
+            <a:off x="502920" y="576072"/>
+            <a:ext cx="11155680" cy="713232"/>
+          </a:xfrm>
+          <a:prstGeom prst="rect">
+            <a:avLst/>
+          </a:prstGeom>
+          <a:noFill/>
+          <a:ln/>
+        </p:spPr>
+        <p:txBody>
+          <a:bodyPr wrap="square" lIns="0" tIns="0" rIns="0" bIns="0" rtlCol="0" anchor="ctr"/>
+          <a:lstStyle/>
+          <a:p>
+            <a:pPr indent="0" marL="0">
+              <a:buNone/>
+            </a:pPr>
+            <a:r>
+              <a:rPr lang="en-US" sz="2700" b="1" dirty="0">
+                <a:solidFill>
+                  <a:srgbClr val="AC4D33"/>
+                </a:solidFill>
+                <a:latin typeface="Cambria" pitchFamily="34" charset="0"/>
+                <a:ea typeface="Cambria" pitchFamily="34" charset="-122"/>
+                <a:cs typeface="Cambria" pitchFamily="34" charset="-120"/>
+              </a:rPr>
+              <a:t>Trình bày tự tin trước đám đông</a:t>
+            </a:r>
+            <a:endParaRPr lang="en-US" sz="2700" dirty="0"/>
+          </a:p>
+        </p:txBody>
+      </p:sp>
+      <p:sp>
+        <p:nvSpPr>
+          <p:cNvPr id="9" name="Shape 6"/>
+          <p:cNvSpPr/>
+          <p:nvPr/>
+        </p:nvSpPr>
+        <p:spPr>
+          <a:xfrm>
+            <a:off x="502920" y="1417320"/>
+            <a:ext cx="5509260" cy="2308860"/>
+          </a:xfrm>
+          <a:prstGeom prst="roundRect">
+            <a:avLst>
+              <a:gd name="adj" fmla="val 3564"/>
+            </a:avLst>
+          </a:prstGeom>
+          <a:solidFill>
+            <a:srgbClr val="FDF1EF"/>
+          </a:solidFill>
+          <a:ln w="15875">
+            <a:solidFill>
+              <a:srgbClr val="FBCEC9"/>
+            </a:solidFill>
+            <a:prstDash val="solid"/>
+          </a:ln>
+        </p:spPr>
+        <p:txBody>
+          <a:bodyPr/>
+          <a:p/>
+        </p:txBody>
+      </p:sp>
+      <p:sp>
+        <p:nvSpPr>
+          <p:cNvPr id="10" name="Text 7"/>
+          <p:cNvSpPr/>
+          <p:nvPr/>
+        </p:nvSpPr>
+        <p:spPr>
+          <a:xfrm>
+            <a:off x="722376" y="1490472"/>
+            <a:ext cx="5070348" cy="2162556"/>
+          </a:xfrm>
+          <a:prstGeom prst="rect">
+            <a:avLst/>
+          </a:prstGeom>
+          <a:noFill/>
+          <a:ln/>
+        </p:spPr>
+        <p:txBody>
+          <a:bodyPr wrap="square" lIns="0" tIns="0" rIns="0" bIns="0" rtlCol="0" anchor="ctr"/>
+          <a:lstStyle/>
+          <a:p>
+            <a:pPr indent="0" marL="0">
+              <a:buNone/>
+            </a:pPr>
+            <a:r>
+              <a:rPr lang="en-US" sz="1500" b="1" dirty="0">
+                <a:solidFill>
+                  <a:srgbClr val="AC4D33"/>
+                </a:solidFill>
+                <a:latin typeface="Calibri" pitchFamily="34" charset="0"/>
+                <a:ea typeface="Calibri" pitchFamily="34" charset="-122"/>
+                <a:cs typeface="Calibri" pitchFamily="34" charset="-120"/>
+              </a:rPr>
+              <a:t>Ngôn ngữ cơ thể</a:t>
+            </a:r>
+            <a:endParaRPr lang="en-US" sz="1500" dirty="0"/>
+          </a:p>
+          <a:p>
+            <a:pPr indent="0" marL="0">
+              <a:buNone/>
+            </a:pPr>
+            <a:r>
+              <a:rPr lang="en-US" sz="1250" dirty="0">
+                <a:solidFill>
+                  <a:srgbClr val="3A2B28"/>
+                </a:solidFill>
+                <a:latin typeface="Calibri" pitchFamily="34" charset="0"/>
+                <a:ea typeface="Calibri" pitchFamily="34" charset="-122"/>
+                <a:cs typeface="Calibri" pitchFamily="34" charset="-120"/>
+              </a:rPr>
+              <a:t>Đứng vững, mở vai, mắt luân phiên khắp phòng; tay minh họa tự nhiên</a:t>
+            </a:r>
+            <a:endParaRPr lang="en-US" sz="1500" dirty="0"/>
+          </a:p>
+        </p:txBody>
+      </p:sp>
+      <p:sp>
+        <p:nvSpPr>
+          <p:cNvPr id="11" name="Shape 8"/>
+          <p:cNvSpPr/>
+          <p:nvPr/>
+        </p:nvSpPr>
+        <p:spPr>
+          <a:xfrm>
+            <a:off x="6195060" y="1417320"/>
+            <a:ext cx="5509260" cy="2308860"/>
+          </a:xfrm>
+          <a:prstGeom prst="roundRect">
+            <a:avLst>
+              <a:gd name="adj" fmla="val 3564"/>
+            </a:avLst>
+          </a:prstGeom>
+          <a:solidFill>
+            <a:srgbClr val="FDF1EF"/>
+          </a:solidFill>
+          <a:ln w="15875">
+            <a:solidFill>
+              <a:srgbClr val="FBCEC9"/>
+            </a:solidFill>
+            <a:prstDash val="solid"/>
+          </a:ln>
+        </p:spPr>
+        <p:txBody>
+          <a:bodyPr/>
+          <a:p/>
+        </p:txBody>
+      </p:sp>
+      <p:sp>
+        <p:nvSpPr>
+          <p:cNvPr id="12" name="Text 9"/>
+          <p:cNvSpPr/>
+          <p:nvPr/>
+        </p:nvSpPr>
+        <p:spPr>
+          <a:xfrm>
+            <a:off x="6414516" y="1490472"/>
+            <a:ext cx="5070348" cy="2162556"/>
+          </a:xfrm>
+          <a:prstGeom prst="rect">
+            <a:avLst/>
+          </a:prstGeom>
+          <a:noFill/>
+          <a:ln/>
+        </p:spPr>
+        <p:txBody>
+          <a:bodyPr wrap="square" lIns="0" tIns="0" rIns="0" bIns="0" rtlCol="0" anchor="ctr"/>
+          <a:lstStyle/>
+          <a:p>
+            <a:pPr indent="0" marL="0">
+              <a:buNone/>
+            </a:pPr>
+            <a:r>
+              <a:rPr lang="en-US" sz="1500" b="1" dirty="0">
+                <a:solidFill>
+                  <a:srgbClr val="AC4D33"/>
+                </a:solidFill>
+                <a:latin typeface="Calibri" pitchFamily="34" charset="0"/>
+                <a:ea typeface="Calibri" pitchFamily="34" charset="-122"/>
+                <a:cs typeface="Calibri" pitchFamily="34" charset="-120"/>
+              </a:rPr>
+              <a:t>Giọng nói</a:t>
+            </a:r>
+            <a:endParaRPr lang="en-US" sz="1500" dirty="0"/>
+          </a:p>
+          <a:p>
+            <a:pPr indent="0" marL="0">
+              <a:buNone/>
+            </a:pPr>
+            <a:r>
+              <a:rPr lang="en-US" sz="1250" dirty="0">
+                <a:solidFill>
+                  <a:srgbClr val="3A2B28"/>
+                </a:solidFill>
+                <a:latin typeface="Calibri" pitchFamily="34" charset="0"/>
+                <a:ea typeface="Calibri" pitchFamily="34" charset="-122"/>
+                <a:cs typeface="Calibri" pitchFamily="34" charset="-120"/>
+              </a:rPr>
+              <a:t>To rõ, đổi tốc độ; dừng 1–2 giây trước ý quan trọng</a:t>
+            </a:r>
+            <a:endParaRPr lang="en-US" sz="1500" dirty="0"/>
+          </a:p>
+        </p:txBody>
+      </p:sp>
+      <p:sp>
+        <p:nvSpPr>
+          <p:cNvPr id="13" name="Shape 10"/>
+          <p:cNvSpPr/>
+          <p:nvPr/>
+        </p:nvSpPr>
+        <p:spPr>
+          <a:xfrm>
+            <a:off x="502920" y="3909060"/>
+            <a:ext cx="5509260" cy="2308860"/>
+          </a:xfrm>
+          <a:prstGeom prst="roundRect">
+            <a:avLst>
+              <a:gd name="adj" fmla="val 3564"/>
+            </a:avLst>
+          </a:prstGeom>
+          <a:solidFill>
+            <a:srgbClr val="FDF1EF"/>
+          </a:solidFill>
+          <a:ln w="15875">
+            <a:solidFill>
+              <a:srgbClr val="FBCEC9"/>
+            </a:solidFill>
+            <a:prstDash val="solid"/>
+          </a:ln>
+        </p:spPr>
+        <p:txBody>
+          <a:bodyPr/>
+          <a:p/>
+        </p:txBody>
+      </p:sp>
+      <p:sp>
+        <p:nvSpPr>
+          <p:cNvPr id="14" name="Text 11"/>
+          <p:cNvSpPr/>
+          <p:nvPr/>
+        </p:nvSpPr>
+        <p:spPr>
+          <a:xfrm>
+            <a:off x="722376" y="3982212"/>
+            <a:ext cx="5070348" cy="2162556"/>
+          </a:xfrm>
+          <a:prstGeom prst="rect">
+            <a:avLst/>
+          </a:prstGeom>
+          <a:noFill/>
+          <a:ln/>
+        </p:spPr>
+        <p:txBody>
+          <a:bodyPr wrap="square" lIns="0" tIns="0" rIns="0" bIns="0" rtlCol="0" anchor="ctr"/>
+          <a:lstStyle/>
+          <a:p>
+            <a:pPr indent="0" marL="0">
+              <a:buNone/>
+            </a:pPr>
+            <a:r>
+              <a:rPr lang="en-US" sz="1500" b="1" dirty="0">
+                <a:solidFill>
+                  <a:srgbClr val="AC4D33"/>
+                </a:solidFill>
+                <a:latin typeface="Calibri" pitchFamily="34" charset="0"/>
+                <a:ea typeface="Calibri" pitchFamily="34" charset="-122"/>
+                <a:cs typeface="Calibri" pitchFamily="34" charset="-120"/>
+              </a:rPr>
+              <a:t>Vượt qua run sợ</a:t>
+            </a:r>
+            <a:endParaRPr lang="en-US" sz="1500" dirty="0"/>
+          </a:p>
+          <a:p>
+            <a:pPr indent="0" marL="0">
+              <a:buNone/>
+            </a:pPr>
+            <a:r>
+              <a:rPr lang="en-US" sz="1250" dirty="0">
+                <a:solidFill>
+                  <a:srgbClr val="3A2B28"/>
+                </a:solidFill>
+                <a:latin typeface="Calibri" pitchFamily="34" charset="0"/>
+                <a:ea typeface="Calibri" pitchFamily="34" charset="-122"/>
+                <a:cs typeface="Calibri" pitchFamily="34" charset="-120"/>
+              </a:rPr>
+              <a:t>Chuẩn bị kỹ • đến sớm • hít thở sâu • nghĩ về thông điệp</a:t>
+            </a:r>
+            <a:endParaRPr lang="en-US" sz="1500" dirty="0"/>
+          </a:p>
+        </p:txBody>
+      </p:sp>
+      <p:sp>
+        <p:nvSpPr>
+          <p:cNvPr id="15" name="Shape 12"/>
+          <p:cNvSpPr/>
+          <p:nvPr/>
+        </p:nvSpPr>
+        <p:spPr>
+          <a:xfrm>
+            <a:off x="6195060" y="3909060"/>
+            <a:ext cx="5509260" cy="2308860"/>
+          </a:xfrm>
+          <a:prstGeom prst="roundRect">
+            <a:avLst>
+              <a:gd name="adj" fmla="val 3564"/>
+            </a:avLst>
+          </a:prstGeom>
+          <a:solidFill>
+            <a:srgbClr val="FDF1EF"/>
+          </a:solidFill>
+          <a:ln w="15875">
+            <a:solidFill>
+              <a:srgbClr val="FBCEC9"/>
+            </a:solidFill>
+            <a:prstDash val="solid"/>
+          </a:ln>
+        </p:spPr>
+        <p:txBody>
+          <a:bodyPr/>
+          <a:p/>
+        </p:txBody>
+      </p:sp>
+      <p:sp>
+        <p:nvSpPr>
+          <p:cNvPr id="16" name="Text 13"/>
+          <p:cNvSpPr/>
+          <p:nvPr/>
+        </p:nvSpPr>
+        <p:spPr>
+          <a:xfrm>
+            <a:off x="6414516" y="3982212"/>
+            <a:ext cx="5070348" cy="2162556"/>
+          </a:xfrm>
+          <a:prstGeom prst="rect">
+            <a:avLst/>
+          </a:prstGeom>
+          <a:noFill/>
+          <a:ln/>
+        </p:spPr>
+        <p:txBody>
+          <a:bodyPr wrap="square" lIns="0" tIns="0" rIns="0" bIns="0" rtlCol="0" anchor="ctr"/>
+          <a:lstStyle/>
+          <a:p>
+            <a:pPr indent="0" marL="0">
+              <a:buNone/>
+            </a:pPr>
+            <a:r>
+              <a:rPr lang="en-US" sz="1500" b="1" dirty="0">
+                <a:solidFill>
+                  <a:srgbClr val="AC4D33"/>
+                </a:solidFill>
+                <a:latin typeface="Calibri" pitchFamily="34" charset="0"/>
+                <a:ea typeface="Calibri" pitchFamily="34" charset="-122"/>
+                <a:cs typeface="Calibri" pitchFamily="34" charset="-120"/>
+              </a:rPr>
+              <a:t>Xử lý câu hỏi</a:t>
+            </a:r>
+            <a:endParaRPr lang="en-US" sz="1500" dirty="0"/>
+          </a:p>
+          <a:p>
+            <a:pPr indent="0" marL="0">
+              <a:buNone/>
+            </a:pPr>
+            <a:r>
+              <a:rPr lang="en-US" sz="1250" dirty="0">
+                <a:solidFill>
+                  <a:srgbClr val="3A2B28"/>
+                </a:solidFill>
+                <a:latin typeface="Calibri" pitchFamily="34" charset="0"/>
+                <a:ea typeface="Calibri" pitchFamily="34" charset="-122"/>
+                <a:cs typeface="Calibri" pitchFamily="34" charset="-120"/>
+              </a:rPr>
+              <a:t>Nghe hết, cảm ơn, trả lời ngắn; chưa chắc thì hẹn trả lời sau</a:t>
+            </a:r>
+            <a:endParaRPr lang="en-US" sz="1500" dirty="0"/>
+          </a:p>
+        </p:txBody>
+      </p:sp>
+    </p:spTree>
+  </p:cSld>
+  <p:clrMapOvr>
+    <a:masterClrMapping/>
+  </p:clrMapOvr>
+</p:sld>
+</file>
+
+<file path=ppt/slides/slide12.xml><?xml version="1.0" encoding="utf-8"?>
+<p:sld xmlns:a="http://schemas.openxmlformats.org/drawingml/2006/main" xmlns:p="http://schemas.openxmlformats.org/presentationml/2006/main" xmlns:r="http://schemas.openxmlformats.org/officeDocument/2006/relationships">
+  <p:cSld>
+    <p:spTree>
+      <p:nvGrpSpPr>
+        <p:cNvPr id="1" name=""/>
+        <p:cNvGrpSpPr/>
+        <p:nvPr/>
+      </p:nvGrpSpPr>
+      <p:grpSpPr/>
+      <p:sp>
+        <p:nvSpPr>
+          <p:cNvPr id="2" name="Rectangle 1"/>
+          <p:cNvSpPr/>
+          <p:nvPr/>
+        </p:nvSpPr>
+        <p:spPr>
+          <a:xfrm>
+            <a:off x="0" y="0"/>
+            <a:ext cx="12191695" cy="6858000"/>
+          </a:xfrm>
+          <a:prstGeom prst="rect">
+            <a:avLst/>
+          </a:prstGeom>
+          <a:solidFill>
+            <a:srgbClr val="FDFBF8"/>
+          </a:solidFill>
+          <a:ln>
+            <a:noFill/>
+          </a:ln>
+          <a:effectLst/>
+        </p:spPr>
+        <p:style>
+          <a:lnRef idx="1">
+            <a:schemeClr val="accent1"/>
+          </a:lnRef>
+          <a:fillRef idx="3">
+            <a:schemeClr val="accent1"/>
+          </a:fillRef>
+          <a:effectRef idx="2">
+            <a:schemeClr val="accent1"/>
+          </a:effectRef>
+          <a:fontRef idx="minor">
+            <a:schemeClr val="lt1"/>
+          </a:fontRef>
+        </p:style>
+        <p:txBody>
+          <a:bodyPr rtlCol="0" anchor="ctr"/>
+          <a:lstStyle/>
+          <a:p>
+            <a:pPr algn="ctr"/>
+          </a:p>
+        </p:txBody>
+      </p:sp>
+      <p:sp>
+        <p:nvSpPr>
+          <p:cNvPr id="3" name="Rectangle 2"/>
+          <p:cNvSpPr/>
+          <p:nvPr/>
+        </p:nvSpPr>
+        <p:spPr>
+          <a:xfrm>
+            <a:off x="0" y="2103120"/>
+            <a:ext cx="12191695" cy="2743200"/>
+          </a:xfrm>
+          <a:prstGeom prst="rect">
+            <a:avLst/>
+          </a:prstGeom>
+          <a:solidFill>
+            <a:srgbClr val="FDF1EF"/>
+          </a:solidFill>
+          <a:ln>
+            <a:noFill/>
+          </a:ln>
+          <a:effectLst/>
+        </p:spPr>
+        <p:style>
+          <a:lnRef idx="1">
+            <a:schemeClr val="accent1"/>
+          </a:lnRef>
+          <a:fillRef idx="3">
+            <a:schemeClr val="accent1"/>
+          </a:fillRef>
+          <a:effectRef idx="2">
+            <a:schemeClr val="accent1"/>
+          </a:effectRef>
+          <a:fontRef idx="minor">
+            <a:schemeClr val="lt1"/>
+          </a:fontRef>
+        </p:style>
+        <p:txBody>
+          <a:bodyPr rtlCol="0" anchor="ctr"/>
+          <a:lstStyle/>
+          <a:p>
+            <a:pPr algn="ctr"/>
+          </a:p>
+        </p:txBody>
+      </p:sp>
+      <p:sp>
+        <p:nvSpPr>
+          <p:cNvPr id="4" name="Rectangle 3"/>
+          <p:cNvSpPr/>
+          <p:nvPr/>
+        </p:nvSpPr>
+        <p:spPr>
+          <a:xfrm>
+            <a:off x="0" y="0"/>
+            <a:ext cx="274320" cy="6858000"/>
+          </a:xfrm>
+          <a:prstGeom prst="rect">
+            <a:avLst/>
+          </a:prstGeom>
+          <a:solidFill>
+            <a:srgbClr val="DC756A"/>
+          </a:solidFill>
+          <a:ln>
+            <a:noFill/>
+          </a:ln>
+          <a:effectLst/>
+        </p:spPr>
+        <p:style>
+          <a:lnRef idx="1">
+            <a:schemeClr val="accent1"/>
+          </a:lnRef>
+          <a:fillRef idx="3">
+            <a:schemeClr val="accent1"/>
+          </a:fillRef>
+          <a:effectRef idx="2">
+            <a:schemeClr val="accent1"/>
+          </a:effectRef>
+          <a:fontRef idx="minor">
+            <a:schemeClr val="lt1"/>
+          </a:fontRef>
+        </p:style>
+        <p:txBody>
+          <a:bodyPr rtlCol="0" anchor="ctr"/>
+          <a:lstStyle/>
+          <a:p>
+            <a:pPr algn="ctr"/>
+          </a:p>
+        </p:txBody>
+      </p:sp>
+      <p:sp>
+        <p:nvSpPr>
+          <p:cNvPr id="5" name="TextBox 4"/>
+          <p:cNvSpPr txBox="1"/>
+          <p:nvPr/>
+        </p:nvSpPr>
+        <p:spPr>
+          <a:xfrm>
+            <a:off x="1280160" y="2377440"/>
+            <a:ext cx="9692640" cy="411480"/>
+          </a:xfrm>
+          <a:prstGeom prst="rect">
+            <a:avLst/>
+          </a:prstGeom>
+          <a:noFill/>
+        </p:spPr>
+        <p:txBody>
+          <a:bodyPr wrap="none">
+            <a:spAutoFit/>
+          </a:bodyPr>
+          <a:lstStyle/>
+          <a:p>
+            <a:r>
+              <a:rPr sz="1500" b="1">
+                <a:solidFill>
+                  <a:srgbClr val="DC756A"/>
+                </a:solidFill>
+                <a:latin typeface="Calibri"/>
+              </a:rPr>
+              <a:t>MỤC 2.3 – 2.4</a:t>
+            </a:r>
+          </a:p>
+        </p:txBody>
+      </p:sp>
+      <p:sp>
+        <p:nvSpPr>
+          <p:cNvPr id="6" name="TextBox 5"/>
+          <p:cNvSpPr txBox="1"/>
+          <p:nvPr/>
+        </p:nvSpPr>
+        <p:spPr>
+          <a:xfrm>
+            <a:off x="1280160" y="2788920"/>
+            <a:ext cx="9601200" cy="1371600"/>
+          </a:xfrm>
+          <a:prstGeom prst="rect">
+            <a:avLst/>
+          </a:prstGeom>
+          <a:noFill/>
+        </p:spPr>
+        <p:txBody>
+          <a:bodyPr wrap="square">
+            <a:spAutoFit/>
+          </a:bodyPr>
+          <a:lstStyle/>
+          <a:p>
+            <a:r>
+              <a:rPr sz="2900" b="1">
+                <a:solidFill>
+                  <a:srgbClr val="AC4D33"/>
+                </a:solidFill>
+                <a:latin typeface="Cambria"/>
+              </a:rPr>
+              <a:t>Lắng nghe, đặt câu hỏi và giao tiếp qua điện thoại</a:t>
+            </a:r>
+          </a:p>
+        </p:txBody>
+      </p:sp>
+      <p:sp>
+        <p:nvSpPr>
+          <p:cNvPr id="7" name="TextBox 6"/>
+          <p:cNvSpPr txBox="1"/>
+          <p:nvPr/>
+        </p:nvSpPr>
+        <p:spPr>
+          <a:xfrm>
+            <a:off x="1280160" y="4224528"/>
+            <a:ext cx="9418320" cy="640080"/>
+          </a:xfrm>
+          <a:prstGeom prst="rect">
+            <a:avLst/>
+          </a:prstGeom>
+          <a:noFill/>
+        </p:spPr>
+        <p:txBody>
+          <a:bodyPr wrap="square">
+            <a:spAutoFit/>
+          </a:bodyPr>
+          <a:lstStyle/>
+          <a:p>
+            <a:r>
+              <a:rPr sz="1450" i="1">
+                <a:solidFill>
+                  <a:srgbClr val="8A7A76"/>
+                </a:solidFill>
+                <a:latin typeface="Calibri"/>
+              </a:rPr>
+              <a:t>Hai kỹ năng ít được dạy nhất nhưng quyết định nhất trong công việc hằng ngày.</a:t>
+            </a:r>
+          </a:p>
+        </p:txBody>
+      </p:sp>
+      <p:sp>
+        <p:nvSpPr>
+          <p:cNvPr id="8" name="TextBox 7"/>
+          <p:cNvSpPr txBox="1"/>
+          <p:nvPr/>
+        </p:nvSpPr>
+        <p:spPr>
+          <a:xfrm>
+            <a:off x="502920" y="6419088"/>
+            <a:ext cx="7772400" cy="292608"/>
+          </a:xfrm>
+          <a:prstGeom prst="rect">
+            <a:avLst/>
+          </a:prstGeom>
+          <a:noFill/>
+        </p:spPr>
+        <p:txBody>
+          <a:bodyPr wrap="none">
+            <a:spAutoFit/>
+          </a:bodyPr>
+          <a:lstStyle/>
+          <a:p>
+            <a:r>
+              <a:rPr sz="900">
+                <a:solidFill>
+                  <a:srgbClr val="8A7A76"/>
+                </a:solidFill>
+                <a:latin typeface="Calibri"/>
+              </a:rPr>
+              <a:t>Je m'appelle Huong  •  GV. Đỗ Thùy Hương  •  EC1103</a:t>
+            </a:r>
+          </a:p>
+        </p:txBody>
+      </p:sp>
+      <p:sp>
+        <p:nvSpPr>
+          <p:cNvPr id="9" name="TextBox 8"/>
+          <p:cNvSpPr txBox="1"/>
+          <p:nvPr/>
+        </p:nvSpPr>
+        <p:spPr>
+          <a:xfrm>
+            <a:off x="9326880" y="6419088"/>
+            <a:ext cx="1920240" cy="292608"/>
+          </a:xfrm>
+          <a:prstGeom prst="rect">
+            <a:avLst/>
+          </a:prstGeom>
+          <a:noFill/>
+        </p:spPr>
+        <p:txBody>
+          <a:bodyPr wrap="none">
+            <a:spAutoFit/>
+          </a:bodyPr>
+          <a:lstStyle/>
+          <a:p>
+            <a:pPr algn="r"/>
+            <a:r>
+              <a:rPr sz="900">
+                <a:solidFill>
+                  <a:srgbClr val="8A7A76"/>
+                </a:solidFill>
+                <a:latin typeface="Calibri"/>
+              </a:rPr>
+              <a:t>Chương 2</a:t>
+            </a:r>
+          </a:p>
+        </p:txBody>
+      </p:sp>
+    </p:spTree>
+  </p:cSld>
+  <p:clrMapOvr>
+    <a:masterClrMapping/>
+  </p:clrMapOvr>
+</p:sld>
+</file>
+
+<file path=ppt/slides/slide13.xml><?xml version="1.0" encoding="utf-8"?>
+<p:sld xmlns:a="http://schemas.openxmlformats.org/drawingml/2006/main" xmlns:r="http://schemas.openxmlformats.org/officeDocument/2006/relationships" xmlns:p="http://schemas.openxmlformats.org/presentationml/2006/main">
+  <p:cSld name="Slide 9">
+    <p:bg>
+      <p:bgPr>
+        <a:solidFill>
+          <a:srgbClr val="FDFBF8"/>
+        </a:solidFill>
+      </p:bgPr>
+    </p:bg>
+    <p:spTree>
+      <p:nvGrpSpPr>
+        <p:cNvPr id="1" name=""/>
+        <p:cNvGrpSpPr/>
+        <p:nvPr/>
+      </p:nvGrpSpPr>
+      <p:grpSpPr>
+        <a:xfrm>
+          <a:off x="0" y="0"/>
+          <a:ext cx="0" cy="0"/>
+          <a:chOff x="0" y="0"/>
+          <a:chExt cx="0" cy="0"/>
+        </a:xfrm>
+      </p:grpSpPr>
+      <p:pic>
+        <p:nvPicPr>
+          <p:cNvPr id="2" name="Image 0" descr="/home/user/comdraft/assets/img/dau-huong.png">    </p:cNvPr>
+          <p:cNvPicPr>
+            <a:picLocks noChangeAspect="1"/>
+          </p:cNvPicPr>
+          <p:nvPr/>
+        </p:nvPicPr>
+        <p:blipFill>
+          <a:blip r:embed="rId1"/>
+          <a:stretch>
+            <a:fillRect/>
+          </a:stretch>
+        </p:blipFill>
+        <p:spPr>
+          <a:xfrm>
+            <a:off x="411480" y="6327648"/>
+            <a:ext cx="384048" cy="384048"/>
+          </a:xfrm>
+          <a:prstGeom prst="rect">
+            <a:avLst/>
+          </a:prstGeom>
+        </p:spPr>
+      </p:pic>
+      <p:sp>
+        <p:nvSpPr>
+          <p:cNvPr id="3" name="Text 0"/>
+          <p:cNvSpPr/>
+          <p:nvPr/>
+        </p:nvSpPr>
+        <p:spPr>
+          <a:xfrm>
+            <a:off x="868680" y="6355080"/>
+            <a:ext cx="7498080" cy="310896"/>
+          </a:xfrm>
+          <a:prstGeom prst="rect">
+            <a:avLst/>
+          </a:prstGeom>
+          <a:noFill/>
+          <a:ln/>
+        </p:spPr>
+        <p:txBody>
+          <a:bodyPr wrap="square" lIns="0" tIns="0" rIns="0" bIns="0" rtlCol="0" anchor="ctr"/>
+          <a:lstStyle/>
+          <a:p>
+            <a:pPr indent="0" marL="0">
+              <a:buNone/>
+            </a:pPr>
+            <a:r>
+              <a:rPr lang="en-US" sz="900" dirty="0">
+                <a:solidFill>
+                  <a:srgbClr val="8A7A76"/>
+                </a:solidFill>
+                <a:latin typeface="Calibri" pitchFamily="34" charset="0"/>
+                <a:ea typeface="Calibri" pitchFamily="34" charset="-122"/>
+                <a:cs typeface="Calibri" pitchFamily="34" charset="-120"/>
+              </a:rPr>
+              <a:t>Je m'appelle Huong  •  GV. Đỗ Thùy Hương  •  EC1103</a:t>
+            </a:r>
+            <a:endParaRPr lang="en-US" sz="900" dirty="0"/>
+          </a:p>
+        </p:txBody>
+      </p:sp>
+      <p:sp>
+        <p:nvSpPr>
+          <p:cNvPr id="4" name="Text 1"/>
+          <p:cNvSpPr/>
+          <p:nvPr/>
+        </p:nvSpPr>
+        <p:spPr>
+          <a:xfrm>
+            <a:off x="8503920" y="6355080"/>
+            <a:ext cx="2743200" cy="310896"/>
+          </a:xfrm>
+          <a:prstGeom prst="rect">
+            <a:avLst/>
+          </a:prstGeom>
+          <a:noFill/>
+          <a:ln/>
+        </p:spPr>
+        <p:txBody>
+          <a:bodyPr wrap="square" lIns="0" tIns="0" rIns="0" bIns="0" rtlCol="0" anchor="ctr"/>
+          <a:lstStyle/>
+          <a:p>
+            <a:pPr algn="r" indent="0" marL="0">
+              <a:buNone/>
+            </a:pPr>
+            <a:r>
+              <a:rPr lang="en-US" sz="900" dirty="0">
+                <a:solidFill>
+                  <a:srgbClr val="8A7A76"/>
+                </a:solidFill>
+                <a:latin typeface="Calibri" pitchFamily="34" charset="0"/>
+                <a:ea typeface="Calibri" pitchFamily="34" charset="-122"/>
+                <a:cs typeface="Calibri" pitchFamily="34" charset="-120"/>
+              </a:rPr>
+              <a:t>Chương 2</a:t>
+            </a:r>
+            <a:endParaRPr lang="en-US" sz="900" dirty="0"/>
+          </a:p>
+        </p:txBody>
+      </p:sp>
+      <p:sp>
+        <p:nvSpPr>
+          <p:cNvPr id="5" name="Shape 2"/>
+          <p:cNvSpPr/>
+          <p:nvPr/>
+        </p:nvSpPr>
+        <p:spPr>
+          <a:xfrm>
+            <a:off x="11430000" y="6327648"/>
+            <a:ext cx="365760" cy="365760"/>
+          </a:xfrm>
+          <a:prstGeom prst="ellipse">
+            <a:avLst/>
+          </a:prstGeom>
+          <a:solidFill>
+            <a:srgbClr val="DC756A"/>
+          </a:solidFill>
+          <a:ln/>
+        </p:spPr>
+        <p:txBody>
+          <a:bodyPr/>
+          <a:p/>
+        </p:txBody>
+      </p:sp>
+      <p:sp>
+        <p:nvSpPr>
+          <p:cNvPr id="6" name="Text 3"/>
+          <p:cNvSpPr/>
+          <p:nvPr/>
+        </p:nvSpPr>
+        <p:spPr>
+          <a:xfrm>
+            <a:off x="11430000" y="6327648"/>
+            <a:ext cx="365760" cy="365760"/>
+          </a:xfrm>
+          <a:prstGeom prst="rect">
+            <a:avLst/>
+          </a:prstGeom>
+          <a:noFill/>
+          <a:ln/>
+        </p:spPr>
+        <p:txBody>
+          <a:bodyPr wrap="square" lIns="0" tIns="0" rIns="0" bIns="0" rtlCol="0" anchor="ctr"/>
+          <a:lstStyle/>
+          <a:p>
+            <a:pPr algn="ctr" indent="0" marL="0">
+              <a:buNone/>
+            </a:pPr>
+            <a:r>
+              <a:rPr lang="en-US" sz="1000" b="1" dirty="0">
+                <a:solidFill>
+                  <a:srgbClr val="FFFFFF"/>
+                </a:solidFill>
+                <a:latin typeface="Calibri" pitchFamily="34" charset="0"/>
+                <a:ea typeface="Calibri" pitchFamily="34" charset="-122"/>
+                <a:cs typeface="Calibri" pitchFamily="34" charset="-120"/>
+              </a:rPr>
+              <a:t>9</a:t>
+            </a:r>
+            <a:endParaRPr lang="en-US" sz="1000" dirty="0"/>
+          </a:p>
+        </p:txBody>
+      </p:sp>
+      <p:sp>
+        <p:nvSpPr>
+          <p:cNvPr id="7" name="Text 4"/>
+          <p:cNvSpPr/>
+          <p:nvPr/>
+        </p:nvSpPr>
+        <p:spPr>
+          <a:xfrm>
+            <a:off x="502920" y="310896"/>
+            <a:ext cx="11155680" cy="274320"/>
+          </a:xfrm>
+          <a:prstGeom prst="rect">
+            <a:avLst/>
+          </a:prstGeom>
+          <a:noFill/>
+          <a:ln/>
+        </p:spPr>
+        <p:txBody>
+          <a:bodyPr wrap="square" lIns="0" tIns="0" rIns="0" bIns="0" rtlCol="0" anchor="ctr"/>
+          <a:lstStyle/>
+          <a:p>
+            <a:pPr indent="0" marL="0">
+              <a:buNone/>
+            </a:pPr>
+            <a:r>
+              <a:rPr lang="en-US" sz="1100" b="1" spc="300" kern="0" dirty="0">
+                <a:solidFill>
+                  <a:srgbClr val="DC756A"/>
+                </a:solidFill>
+                <a:latin typeface="Calibri" pitchFamily="34" charset="0"/>
+                <a:ea typeface="Calibri" pitchFamily="34" charset="-122"/>
+                <a:cs typeface="Calibri" pitchFamily="34" charset="-120"/>
+              </a:rPr>
+              <a:t>2.3</a:t>
+            </a:r>
+            <a:endParaRPr lang="en-US" sz="1100" dirty="0"/>
+          </a:p>
+        </p:txBody>
+      </p:sp>
+      <p:sp>
+        <p:nvSpPr>
+          <p:cNvPr id="8" name="Text 5"/>
+          <p:cNvSpPr/>
+          <p:nvPr/>
+        </p:nvSpPr>
+        <p:spPr>
+          <a:xfrm>
+            <a:off x="502920" y="576072"/>
+            <a:ext cx="11155680" cy="713232"/>
+          </a:xfrm>
+          <a:prstGeom prst="rect">
+            <a:avLst/>
+          </a:prstGeom>
+          <a:noFill/>
+          <a:ln/>
+        </p:spPr>
+        <p:txBody>
+          <a:bodyPr wrap="square" lIns="0" tIns="0" rIns="0" bIns="0" rtlCol="0" anchor="ctr"/>
+          <a:lstStyle/>
+          <a:p>
+            <a:pPr indent="0" marL="0">
+              <a:buNone/>
+            </a:pPr>
+            <a:r>
+              <a:rPr lang="en-US" sz="2700" b="1" dirty="0">
+                <a:solidFill>
+                  <a:srgbClr val="AC4D33"/>
+                </a:solidFill>
+                <a:latin typeface="Cambria" pitchFamily="34" charset="0"/>
+                <a:ea typeface="Cambria" pitchFamily="34" charset="-122"/>
+                <a:cs typeface="Cambria" pitchFamily="34" charset="-120"/>
+              </a:rPr>
+              <a:t>Nghe khác lắng nghe: 5 mức độ</a:t>
+            </a:r>
+            <a:endParaRPr lang="en-US" sz="2700" dirty="0"/>
+          </a:p>
+        </p:txBody>
+      </p:sp>
+      <p:pic>
+        <p:nvPicPr>
+          <p:cNvPr id="9" name="Picture 8" descr="c2-5-muc-lang-nghe-nt.png"/>
+          <p:cNvPicPr>
+            <a:picLocks noChangeAspect="1"/>
+          </p:cNvPicPr>
+          <p:nvPr/>
+        </p:nvPicPr>
+        <p:blipFill>
+          <a:blip r:embed="rId4"/>
+          <a:stretch>
+            <a:fillRect/>
+          </a:stretch>
+        </p:blipFill>
+        <p:spPr>
+          <a:xfrm>
+            <a:off x="472287" y="1787325"/>
+            <a:ext cx="11247120" cy="4097165"/>
+          </a:xfrm>
+          <a:prstGeom prst="rect">
+            <a:avLst/>
+          </a:prstGeom>
+        </p:spPr>
+      </p:pic>
+    </p:spTree>
+  </p:cSld>
+  <p:clrMapOvr>
+    <a:masterClrMapping/>
+  </p:clrMapOvr>
+</p:sld>
+</file>
+
+<file path=ppt/slides/slide14.xml><?xml version="1.0" encoding="utf-8"?>
 <p:sld xmlns:a="http://schemas.openxmlformats.org/drawingml/2006/main" xmlns:r="http://schemas.openxmlformats.org/officeDocument/2006/relationships" xmlns:p="http://schemas.openxmlformats.org/presentationml/2006/main">
   <p:cSld name="Slide 10">
     <p:bg>
@@ -3071,7 +5054,7 @@
       </p:grpSpPr>
       <p:pic>
         <p:nvPicPr>
-          <p:cNvPr id="2" name="Image 0" descr="assets/logo_tron.png">    </p:cNvPr>
+          <p:cNvPr id="2" name="Image 0" descr="/home/user/comdraft/assets/img/dau-huong.png">    </p:cNvPr>
           <p:cNvPicPr>
             <a:picLocks noChangeAspect="1"/>
           </p:cNvPicPr>
@@ -3393,7 +5376,7 @@
                 <a:ea typeface="Calibri" pitchFamily="34" charset="-122"/>
                 <a:cs typeface="Calibri" pitchFamily="34" charset="-120"/>
               </a:rPr>
-              <a:t>Trả lời Có/Không hoặc một dữ kiện: “Anh đã nhận được báo giá chưa?” — dùng để xác nhận, chốt thông tin.</a:t>
+              <a:t>Có / Không hoặc một dữ kiện — dùng để xác nhận, chốt thông tin</a:t>
             </a:r>
             <a:endParaRPr lang="en-US" sz="1500" dirty="0"/>
           </a:p>
@@ -3480,7 +5463,7 @@
                 <a:ea typeface="Calibri" pitchFamily="34" charset="-122"/>
                 <a:cs typeface="Calibri" pitchFamily="34" charset="-120"/>
               </a:rPr>
-              <a:t>Bắt đầu bằng Vì sao / Như thế nào / Điều gì: khơi người đối diện chia sẻ — dùng để khám phá nhu cầu.</a:t>
+              <a:t>Vì sao • Như thế nào • Điều gì — dùng để khám phá nhu cầu</a:t>
             </a:r>
             <a:endParaRPr lang="en-US" sz="1500" dirty="0"/>
           </a:p>
@@ -3567,7 +5550,7 @@
                 <a:ea typeface="Calibri" pitchFamily="34" charset="-122"/>
                 <a:cs typeface="Calibri" pitchFamily="34" charset="-120"/>
               </a:rPr>
-              <a:t>“Cụ thể là…?”, “Anh có thể cho ví dụ?” — làm rõ chi tiết sau câu trả lời chung chung.</a:t>
+              <a:t>“Cụ thể là…?” — làm rõ sau một câu trả lời chung chung</a:t>
             </a:r>
             <a:endParaRPr lang="en-US" sz="1500" dirty="0"/>
           </a:p>
@@ -3654,7 +5637,7 @@
                 <a:ea typeface="Calibri" pitchFamily="34" charset="-122"/>
                 <a:cs typeface="Calibri" pitchFamily="34" charset="-120"/>
               </a:rPr>
-              <a:t>Mỗi lần một câu; tránh câu hỏi dồn ép, mớm cung; hỏi xong thì im lặng chờ — đừng tự trả lời thay.</a:t>
+              <a:t>Mỗi lần một câu; hỏi xong thì im lặng chờ</a:t>
             </a:r>
             <a:endParaRPr lang="en-US" sz="1500" dirty="0"/>
           </a:p>
@@ -3668,7 +5651,7 @@
 </p:sld>
 </file>
 
-<file path=ppt/slides/slide11.xml><?xml version="1.0" encoding="utf-8"?>
+<file path=ppt/slides/slide15.xml><?xml version="1.0" encoding="utf-8"?>
 <p:sld xmlns:a="http://schemas.openxmlformats.org/drawingml/2006/main" xmlns:r="http://schemas.openxmlformats.org/officeDocument/2006/relationships" xmlns:p="http://schemas.openxmlformats.org/presentationml/2006/main">
   <p:cSld name="Slide 11">
     <p:bg>
@@ -3694,7 +5677,7 @@
       </p:grpSpPr>
       <p:pic>
         <p:nvPicPr>
-          <p:cNvPr id="2" name="Image 0" descr="assets/logo_tron.png">    </p:cNvPr>
+          <p:cNvPr id="2" name="Image 0" descr="/home/user/comdraft/assets/img/dau-huong.png">    </p:cNvPr>
           <p:cNvPicPr>
             <a:picLocks noChangeAspect="1"/>
           </p:cNvPicPr>
@@ -4045,7 +6028,7 @@
                 <a:ea typeface="Calibri" pitchFamily="34" charset="-122"/>
                 <a:cs typeface="Calibri" pitchFamily="34" charset="-120"/>
               </a:rPr>
-              <a:t>mục đích, nội dung chính, giấy bút ghi chú; chọn thời điểm phù hợp (tránh sớm quá, muộn quá, giờ nghỉ trưa).</a:t>
+              <a:t>mục đích, nội dung, giấy bút; chọn giờ phù hợp</a:t>
             </a:r>
             <a:endParaRPr lang="en-US" sz="1400" dirty="0"/>
           </a:p>
@@ -4161,7 +6144,7 @@
                 <a:ea typeface="Calibri" pitchFamily="34" charset="-122"/>
                 <a:cs typeface="Calibri" pitchFamily="34" charset="-120"/>
               </a:rPr>
-              <a:t>chào, xưng danh và đơn vị, xin phép: “Em chào anh, em là… từ công ty… Anh có tiện nghe máy 5 phút không ạ?”</a:t>
+              <a:t>chào, xưng danh và đơn vị, xin phép năm phút</a:t>
             </a:r>
             <a:endParaRPr lang="en-US" sz="1400" dirty="0"/>
           </a:p>
@@ -4277,7 +6260,7 @@
                 <a:ea typeface="Calibri" pitchFamily="34" charset="-122"/>
                 <a:cs typeface="Calibri" pitchFamily="34" charset="-120"/>
               </a:rPr>
-              <a:t>đi thẳng vào việc, nói rõ ràng; tóm tắt lại thỏa thuận: thời gian, địa điểm, việc cần làm.</a:t>
+              <a:t>đi thẳng vào việc; tóm tắt lại thời gian – địa điểm – việc cần làm</a:t>
             </a:r>
             <a:endParaRPr lang="en-US" sz="1400" dirty="0"/>
           </a:p>
@@ -4393,7 +6376,7 @@
                 <a:ea typeface="Calibri" pitchFamily="34" charset="-122"/>
                 <a:cs typeface="Calibri" pitchFamily="34" charset="-120"/>
               </a:rPr>
-              <a:t>cảm ơn, chào; để người có vị thế cao hơn / khách hàng gác máy trước.</a:t>
+              <a:t>cảm ơn, chào; để khách gác máy trước</a:t>
             </a:r>
             <a:endParaRPr lang="en-US" sz="1400" dirty="0"/>
           </a:p>
@@ -4407,7 +6390,7 @@
 </p:sld>
 </file>
 
-<file path=ppt/slides/slide12.xml><?xml version="1.0" encoding="utf-8"?>
+<file path=ppt/slides/slide16.xml><?xml version="1.0" encoding="utf-8"?>
 <p:sld xmlns:a="http://schemas.openxmlformats.org/drawingml/2006/main" xmlns:r="http://schemas.openxmlformats.org/officeDocument/2006/relationships" xmlns:p="http://schemas.openxmlformats.org/presentationml/2006/main">
   <p:cSld name="Slide 12">
     <p:bg>
@@ -4433,7 +6416,7 @@
       </p:grpSpPr>
       <p:pic>
         <p:nvPicPr>
-          <p:cNvPr id="2" name="Image 0" descr="assets/logo_tron.png">    </p:cNvPr>
+          <p:cNvPr id="2" name="Image 0" descr="/home/user/comdraft/assets/img/dau-huong.png">    </p:cNvPr>
           <p:cNvPicPr>
             <a:picLocks noChangeAspect="1"/>
           </p:cNvPicPr>
@@ -4755,7 +6738,7 @@
                 <a:ea typeface="Calibri" pitchFamily="34" charset="-122"/>
                 <a:cs typeface="Calibri" pitchFamily="34" charset="-120"/>
               </a:rPr>
-              <a:t>Nhấc máy trong ~3 hồi chuông; chào và xưng danh đơn vị; giọng tươi — người gọi “nghe thấy” nụ cười của bạn; ghi chú và nhắc lại lời nhắn.</a:t>
+              <a:t>Nhấc trong ~3 hồi chuông; chào và xưng danh; ghi lại lời nhắn</a:t>
             </a:r>
             <a:endParaRPr lang="en-US" sz="1500" dirty="0"/>
           </a:p>
@@ -4842,7 +6825,7 @@
                 <a:ea typeface="Calibri" pitchFamily="34" charset="-122"/>
                 <a:cs typeface="Calibri" pitchFamily="34" charset="-120"/>
               </a:rPr>
-              <a:t>Đề nghị để lại lời nhắn: ai gọi – việc gì – số liên lạc – hẹn phản hồi; chuyển lời nhắn đầy đủ, đúng hạn.</a:t>
+              <a:t>Ghi: ai gọi – việc gì – số liên lạc – hẹn phản hồi</a:t>
             </a:r>
             <a:endParaRPr lang="en-US" sz="1500" dirty="0"/>
           </a:p>
@@ -4929,7 +6912,7 @@
                 <a:ea typeface="Calibri" pitchFamily="34" charset="-122"/>
                 <a:cs typeface="Calibri" pitchFamily="34" charset="-120"/>
               </a:rPr>
-              <a:t>Chế độ im lặng trong cuộc họp; không nghe điện riêng khi đang tiếp khách; nhắn tin/Zalo công việc cũng cần đúng chuẩn mực như email.</a:t>
+              <a:t>Im lặng trong họp; không nghe điện riêng khi đang tiếp khách</a:t>
             </a:r>
             <a:endParaRPr lang="en-US" sz="1500" dirty="0"/>
           </a:p>
@@ -4943,7 +6926,7 @@
 </p:sld>
 </file>
 
-<file path=ppt/slides/slide13.xml><?xml version="1.0" encoding="utf-8"?>
+<file path=ppt/slides/slide17.xml><?xml version="1.0" encoding="utf-8"?>
 <p:sld xmlns:a="http://schemas.openxmlformats.org/drawingml/2006/main" xmlns:r="http://schemas.openxmlformats.org/officeDocument/2006/relationships" xmlns:p="http://schemas.openxmlformats.org/presentationml/2006/main">
   <p:cSld name="Slide 13">
     <p:bg>
@@ -4969,7 +6952,7 @@
       </p:grpSpPr>
       <p:pic>
         <p:nvPicPr>
-          <p:cNvPr id="2" name="Image 0" descr="assets/logo_tron.png">    </p:cNvPr>
+          <p:cNvPr id="2" name="Image 0" descr="/home/user/comdraft/assets/img/dau-huong.png">    </p:cNvPr>
           <p:cNvPicPr>
             <a:picLocks noChangeAspect="1"/>
           </p:cNvPicPr>
@@ -5291,7 +7274,7 @@
                 <a:ea typeface="Calibri" pitchFamily="34" charset="-122"/>
                 <a:cs typeface="Calibri" pitchFamily="34" charset="-120"/>
               </a:rPr>
-              <a:t>Nhóm bốc thăm một tình huống: (a) gọi điện lần đầu cho khách hàng tiềm năng để hẹn gặp giới thiệu sản phẩm; hoặc (b) gọi điện xử lý việc giao hàng trễ cho khách đang khó chịu.</a:t>
+              <a:t>Bốc thăm: (a) gọi hẹn gặp khách hàng tiềm năng, hoặc (b) gọi xử lý giao hàng trễ.</a:t>
             </a:r>
             <a:endParaRPr lang="en-US" sz="1500" dirty="0"/>
           </a:p>
@@ -5432,7 +7415,7 @@
                 <a:ea typeface="Calibri" pitchFamily="34" charset="-122"/>
                 <a:cs typeface="Calibri" pitchFamily="34" charset="-120"/>
               </a:rPr>
-              <a:t>Đóng vai cuộc gọi 3 phút trước lớp: một bạn vai nhân viên, một bạn vai khách hàng; cả lớp chấm theo checklist mục 2.4.</a:t>
+              <a:t>Đóng vai cuộc gọi 3 phút; cả lớp chấm theo checklist mục 2.4.</a:t>
             </a:r>
             <a:endParaRPr lang="en-US" sz="1400" dirty="0"/>
           </a:p>
@@ -5534,7 +7517,7 @@
                 <a:ea typeface="Calibri" pitchFamily="34" charset="-122"/>
                 <a:cs typeface="Calibri" pitchFamily="34" charset="-120"/>
               </a:rPr>
-              <a:t>Nhóm còn lại thuyết trình 3 phút chủ đề đã chuẩn bị ở nhà; cả lớp nhận xét theo cấu trúc mở – thân – kết và ngôn ngữ cơ thể.</a:t>
+              <a:t>Nhóm còn lại thuyết trình 3 phút; lớp nhận xét theo mở – thân – kết.</a:t>
             </a:r>
             <a:endParaRPr lang="en-US" sz="1400" dirty="0"/>
           </a:p>
@@ -5674,7 +7657,7 @@
 </p:sld>
 </file>
 
-<file path=ppt/slides/slide14.xml><?xml version="1.0" encoding="utf-8"?>
+<file path=ppt/slides/slide18.xml><?xml version="1.0" encoding="utf-8"?>
 <p:sld xmlns:a="http://schemas.openxmlformats.org/drawingml/2006/main" xmlns:r="http://schemas.openxmlformats.org/officeDocument/2006/relationships" xmlns:p="http://schemas.openxmlformats.org/presentationml/2006/main">
   <p:cSld name="Slide 14">
     <p:bg>
@@ -5700,7 +7683,7 @@
       </p:grpSpPr>
       <p:pic>
         <p:nvPicPr>
-          <p:cNvPr id="2" name="Image 0" descr="assets/logo_tron.png">    </p:cNvPr>
+          <p:cNvPr id="2" name="Image 0" descr="/home/user/comdraft/assets/img/dau-huong.png">    </p:cNvPr>
           <p:cNvPicPr>
             <a:picLocks noChangeAspect="1"/>
           </p:cNvPicPr>
@@ -6210,7 +8193,7 @@
 </p:sld>
 </file>
 
-<file path=ppt/slides/slide15.xml><?xml version="1.0" encoding="utf-8"?>
+<file path=ppt/slides/slide19.xml><?xml version="1.0" encoding="utf-8"?>
 <p:sld xmlns:a="http://schemas.openxmlformats.org/drawingml/2006/main" xmlns:r="http://schemas.openxmlformats.org/officeDocument/2006/relationships" xmlns:p="http://schemas.openxmlformats.org/presentationml/2006/main">
   <p:cSld name="Slide 15">
     <p:bg>
@@ -6236,7 +8219,7 @@
       </p:grpSpPr>
       <p:pic>
         <p:nvPicPr>
-          <p:cNvPr id="2" name="Image 0" descr="assets/logo_tron.png">    </p:cNvPr>
+          <p:cNvPr id="2" name="Image 0" descr="/home/user/comdraft/assets/img/dau-huong.png">    </p:cNvPr>
           <p:cNvPicPr>
             <a:picLocks noChangeAspect="1"/>
           </p:cNvPicPr>
@@ -6966,1780 +8949,6 @@
               <a:t>Chương 3 – Giao tiếp trong các tình huống đặc thù. Mỗi nhóm sưu tầm một tình huống giao tiếp khó xử có thật tại nơi làm việc (giữ ẩn danh) để thảo luận.</a:t>
             </a:r>
             <a:endParaRPr lang="en-US" sz="1300" dirty="0"/>
-          </a:p>
-        </p:txBody>
-      </p:sp>
-    </p:spTree>
-  </p:cSld>
-  <p:clrMapOvr>
-    <a:masterClrMapping/>
-  </p:clrMapOvr>
-</p:sld>
-</file>
-
-<file path=ppt/slides/slide16.xml><?xml version="1.0" encoding="utf-8"?>
-<p:sld xmlns:a="http://schemas.openxmlformats.org/drawingml/2006/main" xmlns:r="http://schemas.openxmlformats.org/officeDocument/2006/relationships" xmlns:p="http://schemas.openxmlformats.org/presentationml/2006/main">
-  <p:cSld name="Slide 16">
-    <p:bg>
-      <p:bgPr>
-        <a:solidFill>
-          <a:srgbClr val="FDFBF8"/>
-        </a:solidFill>
-      </p:bgPr>
-    </p:bg>
-    <p:spTree>
-      <p:nvGrpSpPr>
-        <p:cNvPr id="1" name=""/>
-        <p:cNvGrpSpPr/>
-        <p:nvPr/>
-      </p:nvGrpSpPr>
-      <p:grpSpPr>
-        <a:xfrm>
-          <a:off x="0" y="0"/>
-          <a:ext cx="0" cy="0"/>
-          <a:chOff x="0" y="0"/>
-          <a:chExt cx="0" cy="0"/>
-        </a:xfrm>
-      </p:grpSpPr>
-      <p:pic>
-        <p:nvPicPr>
-          <p:cNvPr id="2" name="Image 0" descr="assets/logo_tron.png">    </p:cNvPr>
-          <p:cNvPicPr>
-            <a:picLocks noChangeAspect="1"/>
-          </p:cNvPicPr>
-          <p:nvPr/>
-        </p:nvPicPr>
-        <p:blipFill>
-          <a:blip r:embed="rId1"/>
-          <a:stretch>
-            <a:fillRect/>
-          </a:stretch>
-        </p:blipFill>
-        <p:spPr>
-          <a:xfrm>
-            <a:off x="411480" y="6327648"/>
-            <a:ext cx="384048" cy="384048"/>
-          </a:xfrm>
-          <a:prstGeom prst="rect">
-            <a:avLst/>
-          </a:prstGeom>
-        </p:spPr>
-      </p:pic>
-      <p:sp>
-        <p:nvSpPr>
-          <p:cNvPr id="3" name="Text 0"/>
-          <p:cNvSpPr/>
-          <p:nvPr/>
-        </p:nvSpPr>
-        <p:spPr>
-          <a:xfrm>
-            <a:off x="868680" y="6355080"/>
-            <a:ext cx="7498080" cy="310896"/>
-          </a:xfrm>
-          <a:prstGeom prst="rect">
-            <a:avLst/>
-          </a:prstGeom>
-          <a:noFill/>
-          <a:ln/>
-        </p:spPr>
-        <p:txBody>
-          <a:bodyPr wrap="square" lIns="0" tIns="0" rIns="0" bIns="0" rtlCol="0" anchor="ctr"/>
-          <a:lstStyle/>
-          <a:p>
-            <a:pPr indent="0" marL="0">
-              <a:buNone/>
-            </a:pPr>
-            <a:r>
-              <a:rPr lang="en-US" sz="900" dirty="0">
-                <a:solidFill>
-                  <a:srgbClr val="8A7A76"/>
-                </a:solidFill>
-                <a:latin typeface="Calibri" pitchFamily="34" charset="0"/>
-                <a:ea typeface="Calibri" pitchFamily="34" charset="-122"/>
-                <a:cs typeface="Calibri" pitchFamily="34" charset="-120"/>
-              </a:rPr>
-              <a:t>Je m'appelle Huong  •  GV. Đỗ Thùy Hương  •  EC1103</a:t>
-            </a:r>
-            <a:endParaRPr lang="en-US" sz="900" dirty="0"/>
-          </a:p>
-        </p:txBody>
-      </p:sp>
-      <p:sp>
-        <p:nvSpPr>
-          <p:cNvPr id="4" name="Text 1"/>
-          <p:cNvSpPr/>
-          <p:nvPr/>
-        </p:nvSpPr>
-        <p:spPr>
-          <a:xfrm>
-            <a:off x="8503920" y="6355080"/>
-            <a:ext cx="2743200" cy="310896"/>
-          </a:xfrm>
-          <a:prstGeom prst="rect">
-            <a:avLst/>
-          </a:prstGeom>
-          <a:noFill/>
-          <a:ln/>
-        </p:spPr>
-        <p:txBody>
-          <a:bodyPr wrap="square" lIns="0" tIns="0" rIns="0" bIns="0" rtlCol="0" anchor="ctr"/>
-          <a:lstStyle/>
-          <a:p>
-            <a:pPr algn="r" indent="0" marL="0">
-              <a:buNone/>
-            </a:pPr>
-            <a:r>
-              <a:rPr lang="en-US" sz="900" dirty="0">
-                <a:solidFill>
-                  <a:srgbClr val="8A7A76"/>
-                </a:solidFill>
-                <a:latin typeface="Calibri" pitchFamily="34" charset="0"/>
-                <a:ea typeface="Calibri" pitchFamily="34" charset="-122"/>
-                <a:cs typeface="Calibri" pitchFamily="34" charset="-120"/>
-              </a:rPr>
-              <a:t>Chương 2</a:t>
-            </a:r>
-            <a:endParaRPr lang="en-US" sz="900" dirty="0"/>
-          </a:p>
-        </p:txBody>
-      </p:sp>
-      <p:sp>
-        <p:nvSpPr>
-          <p:cNvPr id="5" name="Shape 2"/>
-          <p:cNvSpPr/>
-          <p:nvPr/>
-        </p:nvSpPr>
-        <p:spPr>
-          <a:xfrm>
-            <a:off x="11430000" y="6327648"/>
-            <a:ext cx="365760" cy="365760"/>
-          </a:xfrm>
-          <a:prstGeom prst="ellipse">
-            <a:avLst/>
-          </a:prstGeom>
-          <a:solidFill>
-            <a:srgbClr val="DC756A"/>
-          </a:solidFill>
-          <a:ln/>
-        </p:spPr>
-        <p:txBody>
-          <a:bodyPr/>
-          <a:p/>
-        </p:txBody>
-      </p:sp>
-      <p:sp>
-        <p:nvSpPr>
-          <p:cNvPr id="6" name="Text 3"/>
-          <p:cNvSpPr/>
-          <p:nvPr/>
-        </p:nvSpPr>
-        <p:spPr>
-          <a:xfrm>
-            <a:off x="11430000" y="6327648"/>
-            <a:ext cx="365760" cy="365760"/>
-          </a:xfrm>
-          <a:prstGeom prst="rect">
-            <a:avLst/>
-          </a:prstGeom>
-          <a:noFill/>
-          <a:ln/>
-        </p:spPr>
-        <p:txBody>
-          <a:bodyPr wrap="square" lIns="0" tIns="0" rIns="0" bIns="0" rtlCol="0" anchor="ctr"/>
-          <a:lstStyle/>
-          <a:p>
-            <a:pPr algn="ctr" indent="0" marL="0">
-              <a:buNone/>
-            </a:pPr>
-            <a:r>
-              <a:rPr lang="en-US" sz="1000" b="1" dirty="0">
-                <a:solidFill>
-                  <a:srgbClr val="FFFFFF"/>
-                </a:solidFill>
-                <a:latin typeface="Calibri" pitchFamily="34" charset="0"/>
-                <a:ea typeface="Calibri" pitchFamily="34" charset="-122"/>
-                <a:cs typeface="Calibri" pitchFamily="34" charset="-120"/>
-              </a:rPr>
-              <a:t>16</a:t>
-            </a:r>
-            <a:endParaRPr lang="en-US" sz="1000" dirty="0"/>
-          </a:p>
-        </p:txBody>
-      </p:sp>
-      <p:sp>
-        <p:nvSpPr>
-          <p:cNvPr id="7" name="Text 4"/>
-          <p:cNvSpPr/>
-          <p:nvPr/>
-        </p:nvSpPr>
-        <p:spPr>
-          <a:xfrm>
-            <a:off x="502920" y="310896"/>
-            <a:ext cx="11155680" cy="274320"/>
-          </a:xfrm>
-          <a:prstGeom prst="rect">
-            <a:avLst/>
-          </a:prstGeom>
-          <a:noFill/>
-          <a:ln/>
-        </p:spPr>
-        <p:txBody>
-          <a:bodyPr wrap="square" lIns="0" tIns="0" rIns="0" bIns="0" rtlCol="0" anchor="ctr"/>
-          <a:lstStyle/>
-          <a:p>
-            <a:pPr indent="0" marL="0">
-              <a:buNone/>
-            </a:pPr>
-            <a:r>
-              <a:rPr lang="en-US" sz="1100" b="1" spc="300" kern="0" dirty="0">
-                <a:solidFill>
-                  <a:srgbClr val="DC756A"/>
-                </a:solidFill>
-                <a:latin typeface="Calibri" pitchFamily="34" charset="0"/>
-                <a:ea typeface="Calibri" pitchFamily="34" charset="-122"/>
-                <a:cs typeface="Calibri" pitchFamily="34" charset="-120"/>
-              </a:rPr>
-              <a:t>TÀI LIỆU</a:t>
-            </a:r>
-            <a:endParaRPr lang="en-US" sz="1100" dirty="0"/>
-          </a:p>
-        </p:txBody>
-      </p:sp>
-      <p:sp>
-        <p:nvSpPr>
-          <p:cNvPr id="8" name="Text 5"/>
-          <p:cNvSpPr/>
-          <p:nvPr/>
-        </p:nvSpPr>
-        <p:spPr>
-          <a:xfrm>
-            <a:off x="502920" y="576072"/>
-            <a:ext cx="11155680" cy="713232"/>
-          </a:xfrm>
-          <a:prstGeom prst="rect">
-            <a:avLst/>
-          </a:prstGeom>
-          <a:noFill/>
-          <a:ln/>
-        </p:spPr>
-        <p:txBody>
-          <a:bodyPr wrap="square" lIns="0" tIns="0" rIns="0" bIns="0" rtlCol="0" anchor="ctr"/>
-          <a:lstStyle/>
-          <a:p>
-            <a:pPr indent="0" marL="0">
-              <a:buNone/>
-            </a:pPr>
-            <a:r>
-              <a:rPr lang="en-US" sz="2700" b="1" dirty="0">
-                <a:solidFill>
-                  <a:srgbClr val="AC4D33"/>
-                </a:solidFill>
-                <a:latin typeface="Cambria" pitchFamily="34" charset="0"/>
-                <a:ea typeface="Cambria" pitchFamily="34" charset="-122"/>
-                <a:cs typeface="Cambria" pitchFamily="34" charset="-120"/>
-              </a:rPr>
-              <a:t>Tài liệu học tập</a:t>
-            </a:r>
-            <a:endParaRPr lang="en-US" sz="2700" dirty="0"/>
-          </a:p>
-        </p:txBody>
-      </p:sp>
-      <p:sp>
-        <p:nvSpPr>
-          <p:cNvPr id="9" name="Shape 6"/>
-          <p:cNvSpPr/>
-          <p:nvPr/>
-        </p:nvSpPr>
-        <p:spPr>
-          <a:xfrm>
-            <a:off x="502920" y="1463040"/>
-            <a:ext cx="11201400" cy="1322832"/>
-          </a:xfrm>
-          <a:prstGeom prst="roundRect">
-            <a:avLst>
-              <a:gd name="adj" fmla="val 6221"/>
-            </a:avLst>
-          </a:prstGeom>
-          <a:solidFill>
-            <a:srgbClr val="FDF1EF"/>
-          </a:solidFill>
-          <a:ln w="15875">
-            <a:solidFill>
-              <a:srgbClr val="FBCEC9"/>
-            </a:solidFill>
-            <a:prstDash val="solid"/>
-          </a:ln>
-        </p:spPr>
-        <p:txBody>
-          <a:bodyPr/>
-          <a:p/>
-        </p:txBody>
-      </p:sp>
-      <p:sp>
-        <p:nvSpPr>
-          <p:cNvPr id="10" name="Text 7"/>
-          <p:cNvSpPr/>
-          <p:nvPr/>
-        </p:nvSpPr>
-        <p:spPr>
-          <a:xfrm>
-            <a:off x="722376" y="1517904"/>
-            <a:ext cx="10762488" cy="1213104"/>
-          </a:xfrm>
-          <a:prstGeom prst="rect">
-            <a:avLst/>
-          </a:prstGeom>
-          <a:noFill/>
-          <a:ln/>
-        </p:spPr>
-        <p:txBody>
-          <a:bodyPr wrap="square" lIns="0" tIns="0" rIns="0" bIns="0" rtlCol="0" anchor="ctr"/>
-          <a:lstStyle/>
-          <a:p>
-            <a:pPr indent="0" marL="0">
-              <a:buNone/>
-            </a:pPr>
-            <a:r>
-              <a:rPr lang="en-US" sz="1500" b="1" dirty="0">
-                <a:solidFill>
-                  <a:srgbClr val="AC4D33"/>
-                </a:solidFill>
-                <a:latin typeface="Calibri" pitchFamily="34" charset="0"/>
-                <a:ea typeface="Calibri" pitchFamily="34" charset="-122"/>
-                <a:cs typeface="Calibri" pitchFamily="34" charset="-120"/>
-              </a:rPr>
-              <a:t>Giáo trình chính</a:t>
-            </a:r>
-            <a:endParaRPr lang="en-US" sz="1500" dirty="0"/>
-          </a:p>
-          <a:p>
-            <a:pPr indent="0" marL="0">
-              <a:buNone/>
-            </a:pPr>
-            <a:r>
-              <a:rPr lang="en-US" sz="1300" dirty="0">
-                <a:solidFill>
-                  <a:srgbClr val="3A2B28"/>
-                </a:solidFill>
-                <a:latin typeface="Calibri" pitchFamily="34" charset="0"/>
-                <a:ea typeface="Calibri" pitchFamily="34" charset="-122"/>
-                <a:cs typeface="Calibri" pitchFamily="34" charset="-120"/>
-              </a:rPr>
-              <a:t>Hà Nam Khánh Giao (2023), Giáo trình Giao tiếp kinh doanh, NXB Tài chính.</a:t>
-            </a:r>
-            <a:endParaRPr lang="en-US" sz="1500" dirty="0"/>
-          </a:p>
-        </p:txBody>
-      </p:sp>
-      <p:sp>
-        <p:nvSpPr>
-          <p:cNvPr id="11" name="Shape 8"/>
-          <p:cNvSpPr/>
-          <p:nvPr/>
-        </p:nvSpPr>
-        <p:spPr>
-          <a:xfrm>
-            <a:off x="502920" y="2950464"/>
-            <a:ext cx="11201400" cy="1322832"/>
-          </a:xfrm>
-          <a:prstGeom prst="roundRect">
-            <a:avLst>
-              <a:gd name="adj" fmla="val 6221"/>
-            </a:avLst>
-          </a:prstGeom>
-          <a:solidFill>
-            <a:srgbClr val="FDF1EF"/>
-          </a:solidFill>
-          <a:ln w="15875">
-            <a:solidFill>
-              <a:srgbClr val="FBCEC9"/>
-            </a:solidFill>
-            <a:prstDash val="solid"/>
-          </a:ln>
-        </p:spPr>
-        <p:txBody>
-          <a:bodyPr/>
-          <a:p/>
-        </p:txBody>
-      </p:sp>
-      <p:sp>
-        <p:nvSpPr>
-          <p:cNvPr id="12" name="Text 9"/>
-          <p:cNvSpPr/>
-          <p:nvPr/>
-        </p:nvSpPr>
-        <p:spPr>
-          <a:xfrm>
-            <a:off x="722376" y="3005328"/>
-            <a:ext cx="10762488" cy="1213104"/>
-          </a:xfrm>
-          <a:prstGeom prst="rect">
-            <a:avLst/>
-          </a:prstGeom>
-          <a:noFill/>
-          <a:ln/>
-        </p:spPr>
-        <p:txBody>
-          <a:bodyPr wrap="square" lIns="0" tIns="0" rIns="0" bIns="0" rtlCol="0" anchor="ctr"/>
-          <a:lstStyle/>
-          <a:p>
-            <a:pPr indent="0" marL="0">
-              <a:buNone/>
-            </a:pPr>
-            <a:r>
-              <a:rPr lang="en-US" sz="1500" b="1" dirty="0">
-                <a:solidFill>
-                  <a:srgbClr val="AC4D33"/>
-                </a:solidFill>
-                <a:latin typeface="Calibri" pitchFamily="34" charset="0"/>
-                <a:ea typeface="Calibri" pitchFamily="34" charset="-122"/>
-                <a:cs typeface="Calibri" pitchFamily="34" charset="-120"/>
-              </a:rPr>
-              <a:t>Tài liệu tham khảo</a:t>
-            </a:r>
-            <a:endParaRPr lang="en-US" sz="1500" dirty="0"/>
-          </a:p>
-          <a:p>
-            <a:pPr indent="0" marL="0">
-              <a:buNone/>
-            </a:pPr>
-            <a:r>
-              <a:rPr lang="en-US" sz="1300" dirty="0">
-                <a:solidFill>
-                  <a:srgbClr val="3A2B28"/>
-                </a:solidFill>
-                <a:latin typeface="Calibri" pitchFamily="34" charset="0"/>
-                <a:ea typeface="Calibri" pitchFamily="34" charset="-122"/>
-                <a:cs typeface="Calibri" pitchFamily="34" charset="-120"/>
-              </a:rPr>
-              <a:t>Thái Trí Dũng (2012), Kỹ năng giao tiếp và thương lượng trong kinh doanh, NXB Lao động – Xã hội.  •  Nghị định 30/2020/NĐ-CP về công tác văn thư (dùng cho Chương 5 và phần thực hành).</a:t>
-            </a:r>
-            <a:endParaRPr lang="en-US" sz="1500" dirty="0"/>
-          </a:p>
-        </p:txBody>
-      </p:sp>
-      <p:sp>
-        <p:nvSpPr>
-          <p:cNvPr id="13" name="Shape 10"/>
-          <p:cNvSpPr/>
-          <p:nvPr/>
-        </p:nvSpPr>
-        <p:spPr>
-          <a:xfrm>
-            <a:off x="502920" y="4437888"/>
-            <a:ext cx="11201400" cy="1322832"/>
-          </a:xfrm>
-          <a:prstGeom prst="roundRect">
-            <a:avLst>
-              <a:gd name="adj" fmla="val 6221"/>
-            </a:avLst>
-          </a:prstGeom>
-          <a:solidFill>
-            <a:srgbClr val="FDF1EF"/>
-          </a:solidFill>
-          <a:ln w="15875">
-            <a:solidFill>
-              <a:srgbClr val="FBCEC9"/>
-            </a:solidFill>
-            <a:prstDash val="solid"/>
-          </a:ln>
-        </p:spPr>
-        <p:txBody>
-          <a:bodyPr/>
-          <a:p/>
-        </p:txBody>
-      </p:sp>
-      <p:sp>
-        <p:nvSpPr>
-          <p:cNvPr id="14" name="Text 11"/>
-          <p:cNvSpPr/>
-          <p:nvPr/>
-        </p:nvSpPr>
-        <p:spPr>
-          <a:xfrm>
-            <a:off x="722376" y="4492752"/>
-            <a:ext cx="10762488" cy="1213104"/>
-          </a:xfrm>
-          <a:prstGeom prst="rect">
-            <a:avLst/>
-          </a:prstGeom>
-          <a:noFill/>
-          <a:ln/>
-        </p:spPr>
-        <p:txBody>
-          <a:bodyPr wrap="square" lIns="0" tIns="0" rIns="0" bIns="0" rtlCol="0" anchor="ctr"/>
-          <a:lstStyle/>
-          <a:p>
-            <a:pPr indent="0" marL="0">
-              <a:buNone/>
-            </a:pPr>
-            <a:r>
-              <a:rPr lang="en-US" sz="1500" b="1" dirty="0">
-                <a:solidFill>
-                  <a:srgbClr val="AC4D33"/>
-                </a:solidFill>
-                <a:latin typeface="Calibri" pitchFamily="34" charset="0"/>
-                <a:ea typeface="Calibri" pitchFamily="34" charset="-122"/>
-                <a:cs typeface="Calibri" pitchFamily="34" charset="-120"/>
-              </a:rPr>
-              <a:t>Học liệu của giảng viên</a:t>
-            </a:r>
-            <a:endParaRPr lang="en-US" sz="1500" dirty="0"/>
-          </a:p>
-          <a:p>
-            <a:pPr indent="0" marL="0">
-              <a:buNone/>
-            </a:pPr>
-            <a:r>
-              <a:rPr lang="en-US" sz="1300" dirty="0">
-                <a:solidFill>
-                  <a:srgbClr val="3A2B28"/>
-                </a:solidFill>
-                <a:latin typeface="Calibri" pitchFamily="34" charset="0"/>
-                <a:ea typeface="Calibri" pitchFamily="34" charset="-122"/>
-                <a:cs typeface="Calibri" pitchFamily="34" charset="-120"/>
-              </a:rPr>
-              <a:t>Slide bài giảng, tình huống và bài tập do GV. Đỗ Thùy Hương biên soạn; cung cấp sau mỗi buổi học trên nhóm lớp.</a:t>
-            </a:r>
-            <a:endParaRPr lang="en-US" sz="1500" dirty="0"/>
-          </a:p>
-        </p:txBody>
-      </p:sp>
-    </p:spTree>
-  </p:cSld>
-  <p:clrMapOvr>
-    <a:masterClrMapping/>
-  </p:clrMapOvr>
-</p:sld>
-</file>
-
-<file path=ppt/slides/slide17.xml><?xml version="1.0" encoding="utf-8"?>
-<p:sld xmlns:a="http://schemas.openxmlformats.org/drawingml/2006/main" xmlns:p="http://schemas.openxmlformats.org/presentationml/2006/main" xmlns:r="http://schemas.openxmlformats.org/officeDocument/2006/relationships">
-  <p:cSld>
-    <p:spTree>
-      <p:nvGrpSpPr>
-        <p:cNvPr id="1" name=""/>
-        <p:cNvGrpSpPr/>
-        <p:nvPr/>
-      </p:nvGrpSpPr>
-      <p:grpSpPr/>
-      <p:sp>
-        <p:nvSpPr>
-          <p:cNvPr id="2" name="Rectangle 1"/>
-          <p:cNvSpPr/>
-          <p:nvPr/>
-        </p:nvSpPr>
-        <p:spPr>
-          <a:xfrm>
-            <a:off x="0" y="0"/>
-            <a:ext cx="12191695" cy="6858000"/>
-          </a:xfrm>
-          <a:prstGeom prst="rect">
-            <a:avLst/>
-          </a:prstGeom>
-          <a:solidFill>
-            <a:srgbClr val="FDFBF8"/>
-          </a:solidFill>
-          <a:ln>
-            <a:noFill/>
-          </a:ln>
-          <a:effectLst/>
-        </p:spPr>
-        <p:style>
-          <a:lnRef idx="1">
-            <a:schemeClr val="accent1"/>
-          </a:lnRef>
-          <a:fillRef idx="3">
-            <a:schemeClr val="accent1"/>
-          </a:fillRef>
-          <a:effectRef idx="2">
-            <a:schemeClr val="accent1"/>
-          </a:effectRef>
-          <a:fontRef idx="minor">
-            <a:schemeClr val="lt1"/>
-          </a:fontRef>
-        </p:style>
-        <p:txBody>
-          <a:bodyPr rtlCol="0" anchor="ctr"/>
-          <a:lstStyle/>
-          <a:p>
-            <a:pPr algn="ctr"/>
-          </a:p>
-        </p:txBody>
-      </p:sp>
-      <p:sp>
-        <p:nvSpPr>
-          <p:cNvPr id="3" name="TextBox 2"/>
-          <p:cNvSpPr txBox="1"/>
-          <p:nvPr/>
-        </p:nvSpPr>
-        <p:spPr>
-          <a:xfrm>
-            <a:off x="502920" y="292608"/>
-            <a:ext cx="11155680" cy="292608"/>
-          </a:xfrm>
-          <a:prstGeom prst="rect">
-            <a:avLst/>
-          </a:prstGeom>
-          <a:noFill/>
-        </p:spPr>
-        <p:txBody>
-          <a:bodyPr wrap="none">
-            <a:spAutoFit/>
-          </a:bodyPr>
-          <a:lstStyle/>
-          <a:p>
-            <a:r>
-              <a:rPr sz="1100" b="1">
-                <a:solidFill>
-                  <a:srgbClr val="DC756A"/>
-                </a:solidFill>
-                <a:latin typeface="Calibri"/>
-              </a:rPr>
-              <a:t>CON SỐ PHẢI NHỚ</a:t>
-            </a:r>
-          </a:p>
-        </p:txBody>
-      </p:sp>
-      <p:sp>
-        <p:nvSpPr>
-          <p:cNvPr id="4" name="TextBox 3"/>
-          <p:cNvSpPr txBox="1"/>
-          <p:nvPr/>
-        </p:nvSpPr>
-        <p:spPr>
-          <a:xfrm>
-            <a:off x="502920" y="603504"/>
-            <a:ext cx="11155680" cy="731520"/>
-          </a:xfrm>
-          <a:prstGeom prst="rect">
-            <a:avLst/>
-          </a:prstGeom>
-          <a:noFill/>
-        </p:spPr>
-        <p:txBody>
-          <a:bodyPr wrap="square">
-            <a:spAutoFit/>
-          </a:bodyPr>
-          <a:lstStyle/>
-          <a:p>
-            <a:r>
-              <a:rPr sz="2700" b="1">
-                <a:solidFill>
-                  <a:srgbClr val="3A2B28"/>
-                </a:solidFill>
-                <a:latin typeface="Cambria"/>
-              </a:rPr>
-              <a:t>Quy tắc 4 × 20 — bốn cửa ải của ấn tượng ban đầu</a:t>
-            </a:r>
-          </a:p>
-        </p:txBody>
-      </p:sp>
-      <p:sp>
-        <p:nvSpPr>
-          <p:cNvPr id="5" name="Rounded Rectangle 4"/>
-          <p:cNvSpPr/>
-          <p:nvPr/>
-        </p:nvSpPr>
-        <p:spPr>
-          <a:xfrm>
-            <a:off x="502920" y="1783080"/>
-            <a:ext cx="2622042" cy="3429000"/>
-          </a:xfrm>
-          <a:prstGeom prst="roundRect">
-            <a:avLst>
-              <a:gd name="adj" fmla="val 7000"/>
-            </a:avLst>
-          </a:prstGeom>
-          <a:solidFill>
-            <a:srgbClr val="FFFFFF"/>
-          </a:solidFill>
-          <a:ln w="15875">
-            <a:solidFill>
-              <a:srgbClr val="FBCEC9"/>
-            </a:solidFill>
-          </a:ln>
-          <a:effectLst/>
-        </p:spPr>
-        <p:style>
-          <a:lnRef idx="1">
-            <a:schemeClr val="accent1"/>
-          </a:lnRef>
-          <a:fillRef idx="3">
-            <a:schemeClr val="accent1"/>
-          </a:fillRef>
-          <a:effectRef idx="2">
-            <a:schemeClr val="accent1"/>
-          </a:effectRef>
-          <a:fontRef idx="minor">
-            <a:schemeClr val="lt1"/>
-          </a:fontRef>
-        </p:style>
-        <p:txBody>
-          <a:bodyPr rtlCol="0" anchor="ctr" wrap="square" lIns="182880" rIns="182880" tIns="274320" bIns="182880"/>
-          <a:lstStyle/>
-          <a:p>
-            <a:pPr algn="ctr"/>
-            <a:r>
-              <a:rPr sz="5800" b="1">
-                <a:solidFill>
-                  <a:srgbClr val="DC756A"/>
-                </a:solidFill>
-                <a:latin typeface="Cambria"/>
-              </a:rPr>
-              <a:t>20</a:t>
-            </a:r>
-          </a:p>
-          <a:p>
-            <a:pPr algn="ctr"/>
-            <a:r>
-              <a:rPr sz="1400" b="1">
-                <a:solidFill>
-                  <a:srgbClr val="AC4D33"/>
-                </a:solidFill>
-                <a:latin typeface="Calibri"/>
-              </a:rPr>
-              <a:t>GIÂY</a:t>
-            </a:r>
-          </a:p>
-          <a:p>
-            <a:pPr algn="ctr">
-              <a:spcBef>
-                <a:spcPts val="1200"/>
-              </a:spcBef>
-            </a:pPr>
-            <a:r>
-              <a:rPr sz="1250">
-                <a:solidFill>
-                  <a:srgbClr val="3A2B28"/>
-                </a:solidFill>
-                <a:latin typeface="Calibri"/>
-              </a:rPr>
-              <a:t>Đối phương hình thành đánh giá tổng thể</a:t>
-            </a:r>
-          </a:p>
-        </p:txBody>
-      </p:sp>
-      <p:sp>
-        <p:nvSpPr>
-          <p:cNvPr id="6" name="Rounded Rectangle 5"/>
-          <p:cNvSpPr/>
-          <p:nvPr/>
-        </p:nvSpPr>
-        <p:spPr>
-          <a:xfrm>
-            <a:off x="3362706" y="1783080"/>
-            <a:ext cx="2622042" cy="3429000"/>
-          </a:xfrm>
-          <a:prstGeom prst="roundRect">
-            <a:avLst>
-              <a:gd name="adj" fmla="val 7000"/>
-            </a:avLst>
-          </a:prstGeom>
-          <a:solidFill>
-            <a:srgbClr val="FFFFFF"/>
-          </a:solidFill>
-          <a:ln w="15875">
-            <a:solidFill>
-              <a:srgbClr val="FBCEC9"/>
-            </a:solidFill>
-          </a:ln>
-          <a:effectLst/>
-        </p:spPr>
-        <p:style>
-          <a:lnRef idx="1">
-            <a:schemeClr val="accent1"/>
-          </a:lnRef>
-          <a:fillRef idx="3">
-            <a:schemeClr val="accent1"/>
-          </a:fillRef>
-          <a:effectRef idx="2">
-            <a:schemeClr val="accent1"/>
-          </a:effectRef>
-          <a:fontRef idx="minor">
-            <a:schemeClr val="lt1"/>
-          </a:fontRef>
-        </p:style>
-        <p:txBody>
-          <a:bodyPr rtlCol="0" anchor="ctr" wrap="square" lIns="182880" rIns="182880" tIns="274320" bIns="182880"/>
-          <a:lstStyle/>
-          <a:p>
-            <a:pPr algn="ctr"/>
-            <a:r>
-              <a:rPr sz="5800" b="1">
-                <a:solidFill>
-                  <a:srgbClr val="DC756A"/>
-                </a:solidFill>
-                <a:latin typeface="Cambria"/>
-              </a:rPr>
-              <a:t>20</a:t>
-            </a:r>
-          </a:p>
-          <a:p>
-            <a:pPr algn="ctr"/>
-            <a:r>
-              <a:rPr sz="1400" b="1">
-                <a:solidFill>
-                  <a:srgbClr val="AC4D33"/>
-                </a:solidFill>
-                <a:latin typeface="Calibri"/>
-              </a:rPr>
-              <a:t>BƯỚC CHÂN</a:t>
-            </a:r>
-          </a:p>
-          <a:p>
-            <a:pPr algn="ctr">
-              <a:spcBef>
-                <a:spcPts val="1200"/>
-              </a:spcBef>
-            </a:pPr>
-            <a:r>
-              <a:rPr sz="1250">
-                <a:solidFill>
-                  <a:srgbClr val="3A2B28"/>
-                </a:solidFill>
-                <a:latin typeface="Calibri"/>
-              </a:rPr>
-              <a:t>Dáng đi, tư thế được đọc từ xa</a:t>
-            </a:r>
-          </a:p>
-        </p:txBody>
-      </p:sp>
-      <p:sp>
-        <p:nvSpPr>
-          <p:cNvPr id="7" name="Rounded Rectangle 6"/>
-          <p:cNvSpPr/>
-          <p:nvPr/>
-        </p:nvSpPr>
-        <p:spPr>
-          <a:xfrm>
-            <a:off x="6222492" y="1783080"/>
-            <a:ext cx="2622042" cy="3429000"/>
-          </a:xfrm>
-          <a:prstGeom prst="roundRect">
-            <a:avLst>
-              <a:gd name="adj" fmla="val 7000"/>
-            </a:avLst>
-          </a:prstGeom>
-          <a:solidFill>
-            <a:srgbClr val="FFFFFF"/>
-          </a:solidFill>
-          <a:ln w="15875">
-            <a:solidFill>
-              <a:srgbClr val="FBCEC9"/>
-            </a:solidFill>
-          </a:ln>
-          <a:effectLst/>
-        </p:spPr>
-        <p:style>
-          <a:lnRef idx="1">
-            <a:schemeClr val="accent1"/>
-          </a:lnRef>
-          <a:fillRef idx="3">
-            <a:schemeClr val="accent1"/>
-          </a:fillRef>
-          <a:effectRef idx="2">
-            <a:schemeClr val="accent1"/>
-          </a:effectRef>
-          <a:fontRef idx="minor">
-            <a:schemeClr val="lt1"/>
-          </a:fontRef>
-        </p:style>
-        <p:txBody>
-          <a:bodyPr rtlCol="0" anchor="ctr" wrap="square" lIns="182880" rIns="182880" tIns="274320" bIns="182880"/>
-          <a:lstStyle/>
-          <a:p>
-            <a:pPr algn="ctr"/>
-            <a:r>
-              <a:rPr sz="5800" b="1">
-                <a:solidFill>
-                  <a:srgbClr val="DC756A"/>
-                </a:solidFill>
-                <a:latin typeface="Cambria"/>
-              </a:rPr>
-              <a:t>20</a:t>
-            </a:r>
-          </a:p>
-          <a:p>
-            <a:pPr algn="ctr"/>
-            <a:r>
-              <a:rPr sz="1400" b="1">
-                <a:solidFill>
-                  <a:srgbClr val="AC4D33"/>
-                </a:solidFill>
-                <a:latin typeface="Calibri"/>
-              </a:rPr>
-              <a:t>CENTIMET</a:t>
-            </a:r>
-          </a:p>
-          <a:p>
-            <a:pPr algn="ctr">
-              <a:spcBef>
-                <a:spcPts val="1200"/>
-              </a:spcBef>
-            </a:pPr>
-            <a:r>
-              <a:rPr sz="1250">
-                <a:solidFill>
-                  <a:srgbClr val="3A2B28"/>
-                </a:solidFill>
-                <a:latin typeface="Calibri"/>
-              </a:rPr>
-              <a:t>Ánh mắt và nụ cười trên gương mặt</a:t>
-            </a:r>
-          </a:p>
-        </p:txBody>
-      </p:sp>
-      <p:sp>
-        <p:nvSpPr>
-          <p:cNvPr id="8" name="Rounded Rectangle 7"/>
-          <p:cNvSpPr/>
-          <p:nvPr/>
-        </p:nvSpPr>
-        <p:spPr>
-          <a:xfrm>
-            <a:off x="9082278" y="1783080"/>
-            <a:ext cx="2622042" cy="3429000"/>
-          </a:xfrm>
-          <a:prstGeom prst="roundRect">
-            <a:avLst>
-              <a:gd name="adj" fmla="val 7000"/>
-            </a:avLst>
-          </a:prstGeom>
-          <a:solidFill>
-            <a:srgbClr val="FFFFFF"/>
-          </a:solidFill>
-          <a:ln w="15875">
-            <a:solidFill>
-              <a:srgbClr val="FBCEC9"/>
-            </a:solidFill>
-          </a:ln>
-          <a:effectLst/>
-        </p:spPr>
-        <p:style>
-          <a:lnRef idx="1">
-            <a:schemeClr val="accent1"/>
-          </a:lnRef>
-          <a:fillRef idx="3">
-            <a:schemeClr val="accent1"/>
-          </a:fillRef>
-          <a:effectRef idx="2">
-            <a:schemeClr val="accent1"/>
-          </a:effectRef>
-          <a:fontRef idx="minor">
-            <a:schemeClr val="lt1"/>
-          </a:fontRef>
-        </p:style>
-        <p:txBody>
-          <a:bodyPr rtlCol="0" anchor="ctr" wrap="square" lIns="182880" rIns="182880" tIns="274320" bIns="182880"/>
-          <a:lstStyle/>
-          <a:p>
-            <a:pPr algn="ctr"/>
-            <a:r>
-              <a:rPr sz="5800" b="1">
-                <a:solidFill>
-                  <a:srgbClr val="DC756A"/>
-                </a:solidFill>
-                <a:latin typeface="Cambria"/>
-              </a:rPr>
-              <a:t>20</a:t>
-            </a:r>
-          </a:p>
-          <a:p>
-            <a:pPr algn="ctr"/>
-            <a:r>
-              <a:rPr sz="1400" b="1">
-                <a:solidFill>
-                  <a:srgbClr val="AC4D33"/>
-                </a:solidFill>
-                <a:latin typeface="Calibri"/>
-              </a:rPr>
-              <a:t>TỪ</a:t>
-            </a:r>
-          </a:p>
-          <a:p>
-            <a:pPr algn="ctr">
-              <a:spcBef>
-                <a:spcPts val="1200"/>
-              </a:spcBef>
-            </a:pPr>
-            <a:r>
-              <a:rPr sz="1250">
-                <a:solidFill>
-                  <a:srgbClr val="3A2B28"/>
-                </a:solidFill>
-                <a:latin typeface="Calibri"/>
-              </a:rPr>
-              <a:t>Lời chào và giới thiệu đầu tiên</a:t>
-            </a:r>
-          </a:p>
-        </p:txBody>
-      </p:sp>
-      <p:sp>
-        <p:nvSpPr>
-          <p:cNvPr id="9" name="Rounded Rectangle 8"/>
-          <p:cNvSpPr/>
-          <p:nvPr/>
-        </p:nvSpPr>
-        <p:spPr>
-          <a:xfrm>
-            <a:off x="502920" y="5440680"/>
-            <a:ext cx="11201400" cy="685800"/>
-          </a:xfrm>
-          <a:prstGeom prst="roundRect">
-            <a:avLst>
-              <a:gd name="adj" fmla="val 12000"/>
-            </a:avLst>
-          </a:prstGeom>
-          <a:solidFill>
-            <a:srgbClr val="FDF1EF"/>
-          </a:solidFill>
-          <a:ln w="12700">
-            <a:solidFill>
-              <a:srgbClr val="FBCEC9"/>
-            </a:solidFill>
-          </a:ln>
-          <a:effectLst/>
-        </p:spPr>
-        <p:style>
-          <a:lnRef idx="1">
-            <a:schemeClr val="accent1"/>
-          </a:lnRef>
-          <a:fillRef idx="3">
-            <a:schemeClr val="accent1"/>
-          </a:fillRef>
-          <a:effectRef idx="2">
-            <a:schemeClr val="accent1"/>
-          </a:effectRef>
-          <a:fontRef idx="minor">
-            <a:schemeClr val="lt1"/>
-          </a:fontRef>
-        </p:style>
-        <p:txBody>
-          <a:bodyPr rtlCol="0" anchor="ctr" wrap="square" lIns="201168" rIns="201168"/>
-          <a:lstStyle/>
-          <a:p>
-            <a:pPr algn="ctr"/>
-            <a:r>
-              <a:rPr sz="1300">
-                <a:solidFill>
-                  <a:srgbClr val="3A2B28"/>
-                </a:solidFill>
-                <a:latin typeface="Calibri"/>
-              </a:rPr>
-              <a:t>Ấn tượng ban đầu hình thành gần như tức thì và rất khó đảo ngược — nó phải được CHUẨN BỊ, không phó mặc cho may mắn.</a:t>
-            </a:r>
-          </a:p>
-        </p:txBody>
-      </p:sp>
-      <p:sp>
-        <p:nvSpPr>
-          <p:cNvPr id="10" name="TextBox 9"/>
-          <p:cNvSpPr txBox="1"/>
-          <p:nvPr/>
-        </p:nvSpPr>
-        <p:spPr>
-          <a:xfrm>
-            <a:off x="502920" y="6419088"/>
-            <a:ext cx="7772400" cy="292608"/>
-          </a:xfrm>
-          <a:prstGeom prst="rect">
-            <a:avLst/>
-          </a:prstGeom>
-          <a:noFill/>
-        </p:spPr>
-        <p:txBody>
-          <a:bodyPr wrap="none">
-            <a:spAutoFit/>
-          </a:bodyPr>
-          <a:lstStyle/>
-          <a:p>
-            <a:r>
-              <a:rPr sz="900">
-                <a:solidFill>
-                  <a:srgbClr val="8A7A76"/>
-                </a:solidFill>
-                <a:latin typeface="Calibri"/>
-              </a:rPr>
-              <a:t>Je m'appelle Huong  •  GV. Đỗ Thùy Hương  •  EC1103</a:t>
-            </a:r>
-          </a:p>
-        </p:txBody>
-      </p:sp>
-      <p:sp>
-        <p:nvSpPr>
-          <p:cNvPr id="11" name="TextBox 10"/>
-          <p:cNvSpPr txBox="1"/>
-          <p:nvPr/>
-        </p:nvSpPr>
-        <p:spPr>
-          <a:xfrm>
-            <a:off x="9326880" y="6419088"/>
-            <a:ext cx="1920240" cy="292608"/>
-          </a:xfrm>
-          <a:prstGeom prst="rect">
-            <a:avLst/>
-          </a:prstGeom>
-          <a:noFill/>
-        </p:spPr>
-        <p:txBody>
-          <a:bodyPr wrap="none">
-            <a:spAutoFit/>
-          </a:bodyPr>
-          <a:lstStyle/>
-          <a:p>
-            <a:pPr algn="r"/>
-            <a:r>
-              <a:rPr sz="900">
-                <a:solidFill>
-                  <a:srgbClr val="8A7A76"/>
-                </a:solidFill>
-                <a:latin typeface="Calibri"/>
-              </a:rPr>
-              <a:t>Chương 2</a:t>
-            </a:r>
-          </a:p>
-        </p:txBody>
-      </p:sp>
-    </p:spTree>
-  </p:cSld>
-  <p:clrMapOvr>
-    <a:masterClrMapping/>
-  </p:clrMapOvr>
-</p:sld>
-</file>
-
-<file path=ppt/slides/slide18.xml><?xml version="1.0" encoding="utf-8"?>
-<p:sld xmlns:a="http://schemas.openxmlformats.org/drawingml/2006/main" xmlns:p="http://schemas.openxmlformats.org/presentationml/2006/main" xmlns:r="http://schemas.openxmlformats.org/officeDocument/2006/relationships">
-  <p:cSld>
-    <p:spTree>
-      <p:nvGrpSpPr>
-        <p:cNvPr id="1" name=""/>
-        <p:cNvGrpSpPr/>
-        <p:nvPr/>
-      </p:nvGrpSpPr>
-      <p:grpSpPr/>
-      <p:sp>
-        <p:nvSpPr>
-          <p:cNvPr id="2" name="Rectangle 1"/>
-          <p:cNvSpPr/>
-          <p:nvPr/>
-        </p:nvSpPr>
-        <p:spPr>
-          <a:xfrm>
-            <a:off x="0" y="0"/>
-            <a:ext cx="12191695" cy="6858000"/>
-          </a:xfrm>
-          <a:prstGeom prst="rect">
-            <a:avLst/>
-          </a:prstGeom>
-          <a:solidFill>
-            <a:srgbClr val="FDFBF8"/>
-          </a:solidFill>
-          <a:ln>
-            <a:noFill/>
-          </a:ln>
-          <a:effectLst/>
-        </p:spPr>
-        <p:style>
-          <a:lnRef idx="1">
-            <a:schemeClr val="accent1"/>
-          </a:lnRef>
-          <a:fillRef idx="3">
-            <a:schemeClr val="accent1"/>
-          </a:fillRef>
-          <a:effectRef idx="2">
-            <a:schemeClr val="accent1"/>
-          </a:effectRef>
-          <a:fontRef idx="minor">
-            <a:schemeClr val="lt1"/>
-          </a:fontRef>
-        </p:style>
-        <p:txBody>
-          <a:bodyPr rtlCol="0" anchor="ctr"/>
-          <a:lstStyle/>
-          <a:p>
-            <a:pPr algn="ctr"/>
-          </a:p>
-        </p:txBody>
-      </p:sp>
-      <p:sp>
-        <p:nvSpPr>
-          <p:cNvPr id="3" name="Rectangle 2"/>
-          <p:cNvSpPr/>
-          <p:nvPr/>
-        </p:nvSpPr>
-        <p:spPr>
-          <a:xfrm>
-            <a:off x="0" y="2103120"/>
-            <a:ext cx="12191695" cy="2743200"/>
-          </a:xfrm>
-          <a:prstGeom prst="rect">
-            <a:avLst/>
-          </a:prstGeom>
-          <a:solidFill>
-            <a:srgbClr val="FDF1EF"/>
-          </a:solidFill>
-          <a:ln>
-            <a:noFill/>
-          </a:ln>
-          <a:effectLst/>
-        </p:spPr>
-        <p:style>
-          <a:lnRef idx="1">
-            <a:schemeClr val="accent1"/>
-          </a:lnRef>
-          <a:fillRef idx="3">
-            <a:schemeClr val="accent1"/>
-          </a:fillRef>
-          <a:effectRef idx="2">
-            <a:schemeClr val="accent1"/>
-          </a:effectRef>
-          <a:fontRef idx="minor">
-            <a:schemeClr val="lt1"/>
-          </a:fontRef>
-        </p:style>
-        <p:txBody>
-          <a:bodyPr rtlCol="0" anchor="ctr"/>
-          <a:lstStyle/>
-          <a:p>
-            <a:pPr algn="ctr"/>
-          </a:p>
-        </p:txBody>
-      </p:sp>
-      <p:sp>
-        <p:nvSpPr>
-          <p:cNvPr id="4" name="Rectangle 3"/>
-          <p:cNvSpPr/>
-          <p:nvPr/>
-        </p:nvSpPr>
-        <p:spPr>
-          <a:xfrm>
-            <a:off x="0" y="0"/>
-            <a:ext cx="274320" cy="6858000"/>
-          </a:xfrm>
-          <a:prstGeom prst="rect">
-            <a:avLst/>
-          </a:prstGeom>
-          <a:solidFill>
-            <a:srgbClr val="DC756A"/>
-          </a:solidFill>
-          <a:ln>
-            <a:noFill/>
-          </a:ln>
-          <a:effectLst/>
-        </p:spPr>
-        <p:style>
-          <a:lnRef idx="1">
-            <a:schemeClr val="accent1"/>
-          </a:lnRef>
-          <a:fillRef idx="3">
-            <a:schemeClr val="accent1"/>
-          </a:fillRef>
-          <a:effectRef idx="2">
-            <a:schemeClr val="accent1"/>
-          </a:effectRef>
-          <a:fontRef idx="minor">
-            <a:schemeClr val="lt1"/>
-          </a:fontRef>
-        </p:style>
-        <p:txBody>
-          <a:bodyPr rtlCol="0" anchor="ctr"/>
-          <a:lstStyle/>
-          <a:p>
-            <a:pPr algn="ctr"/>
-          </a:p>
-        </p:txBody>
-      </p:sp>
-      <p:sp>
-        <p:nvSpPr>
-          <p:cNvPr id="5" name="TextBox 4"/>
-          <p:cNvSpPr txBox="1"/>
-          <p:nvPr/>
-        </p:nvSpPr>
-        <p:spPr>
-          <a:xfrm>
-            <a:off x="1280160" y="2377440"/>
-            <a:ext cx="9692640" cy="411480"/>
-          </a:xfrm>
-          <a:prstGeom prst="rect">
-            <a:avLst/>
-          </a:prstGeom>
-          <a:noFill/>
-        </p:spPr>
-        <p:txBody>
-          <a:bodyPr wrap="none">
-            <a:spAutoFit/>
-          </a:bodyPr>
-          <a:lstStyle/>
-          <a:p>
-            <a:r>
-              <a:rPr sz="1500" b="1">
-                <a:solidFill>
-                  <a:srgbClr val="DC756A"/>
-                </a:solidFill>
-                <a:latin typeface="Calibri"/>
-              </a:rPr>
-              <a:t>MỤC 2.1</a:t>
-            </a:r>
-          </a:p>
-        </p:txBody>
-      </p:sp>
-      <p:sp>
-        <p:nvSpPr>
-          <p:cNvPr id="6" name="TextBox 5"/>
-          <p:cNvSpPr txBox="1"/>
-          <p:nvPr/>
-        </p:nvSpPr>
-        <p:spPr>
-          <a:xfrm>
-            <a:off x="1280160" y="2788920"/>
-            <a:ext cx="9601200" cy="1371600"/>
-          </a:xfrm>
-          <a:prstGeom prst="rect">
-            <a:avLst/>
-          </a:prstGeom>
-          <a:noFill/>
-        </p:spPr>
-        <p:txBody>
-          <a:bodyPr wrap="square">
-            <a:spAutoFit/>
-          </a:bodyPr>
-          <a:lstStyle/>
-          <a:p>
-            <a:r>
-              <a:rPr sz="3300" b="1">
-                <a:solidFill>
-                  <a:srgbClr val="AC4D33"/>
-                </a:solidFill>
-                <a:latin typeface="Cambria"/>
-              </a:rPr>
-              <a:t>Ấn tượng ban đầu và nghi thức xã giao</a:t>
-            </a:r>
-          </a:p>
-        </p:txBody>
-      </p:sp>
-      <p:sp>
-        <p:nvSpPr>
-          <p:cNvPr id="7" name="TextBox 6"/>
-          <p:cNvSpPr txBox="1"/>
-          <p:nvPr/>
-        </p:nvSpPr>
-        <p:spPr>
-          <a:xfrm>
-            <a:off x="1280160" y="4224528"/>
-            <a:ext cx="9418320" cy="640080"/>
-          </a:xfrm>
-          <a:prstGeom prst="rect">
-            <a:avLst/>
-          </a:prstGeom>
-          <a:noFill/>
-        </p:spPr>
-        <p:txBody>
-          <a:bodyPr wrap="square">
-            <a:spAutoFit/>
-          </a:bodyPr>
-          <a:lstStyle/>
-          <a:p>
-            <a:r>
-              <a:rPr sz="1450" i="1">
-                <a:solidFill>
-                  <a:srgbClr val="8A7A76"/>
-                </a:solidFill>
-                <a:latin typeface="Calibri"/>
-              </a:rPr>
-              <a:t>Hai mươi giây đầu tiên quyết định phần lớn cách người khác nhìn nhận bạn.</a:t>
-            </a:r>
-          </a:p>
-        </p:txBody>
-      </p:sp>
-      <p:sp>
-        <p:nvSpPr>
-          <p:cNvPr id="8" name="TextBox 7"/>
-          <p:cNvSpPr txBox="1"/>
-          <p:nvPr/>
-        </p:nvSpPr>
-        <p:spPr>
-          <a:xfrm>
-            <a:off x="502920" y="6419088"/>
-            <a:ext cx="7772400" cy="292608"/>
-          </a:xfrm>
-          <a:prstGeom prst="rect">
-            <a:avLst/>
-          </a:prstGeom>
-          <a:noFill/>
-        </p:spPr>
-        <p:txBody>
-          <a:bodyPr wrap="none">
-            <a:spAutoFit/>
-          </a:bodyPr>
-          <a:lstStyle/>
-          <a:p>
-            <a:r>
-              <a:rPr sz="900">
-                <a:solidFill>
-                  <a:srgbClr val="8A7A76"/>
-                </a:solidFill>
-                <a:latin typeface="Calibri"/>
-              </a:rPr>
-              <a:t>Je m'appelle Huong  •  GV. Đỗ Thùy Hương  •  EC1103</a:t>
-            </a:r>
-          </a:p>
-        </p:txBody>
-      </p:sp>
-      <p:sp>
-        <p:nvSpPr>
-          <p:cNvPr id="9" name="TextBox 8"/>
-          <p:cNvSpPr txBox="1"/>
-          <p:nvPr/>
-        </p:nvSpPr>
-        <p:spPr>
-          <a:xfrm>
-            <a:off x="9326880" y="6419088"/>
-            <a:ext cx="1920240" cy="292608"/>
-          </a:xfrm>
-          <a:prstGeom prst="rect">
-            <a:avLst/>
-          </a:prstGeom>
-          <a:noFill/>
-        </p:spPr>
-        <p:txBody>
-          <a:bodyPr wrap="none">
-            <a:spAutoFit/>
-          </a:bodyPr>
-          <a:lstStyle/>
-          <a:p>
-            <a:pPr algn="r"/>
-            <a:r>
-              <a:rPr sz="900">
-                <a:solidFill>
-                  <a:srgbClr val="8A7A76"/>
-                </a:solidFill>
-                <a:latin typeface="Calibri"/>
-              </a:rPr>
-              <a:t>Chương 2</a:t>
-            </a:r>
-          </a:p>
-        </p:txBody>
-      </p:sp>
-    </p:spTree>
-  </p:cSld>
-  <p:clrMapOvr>
-    <a:masterClrMapping/>
-  </p:clrMapOvr>
-</p:sld>
-</file>
-
-<file path=ppt/slides/slide19.xml><?xml version="1.0" encoding="utf-8"?>
-<p:sld xmlns:a="http://schemas.openxmlformats.org/drawingml/2006/main" xmlns:p="http://schemas.openxmlformats.org/presentationml/2006/main" xmlns:r="http://schemas.openxmlformats.org/officeDocument/2006/relationships">
-  <p:cSld>
-    <p:spTree>
-      <p:nvGrpSpPr>
-        <p:cNvPr id="1" name=""/>
-        <p:cNvGrpSpPr/>
-        <p:nvPr/>
-      </p:nvGrpSpPr>
-      <p:grpSpPr/>
-      <p:sp>
-        <p:nvSpPr>
-          <p:cNvPr id="2" name="Rectangle 1"/>
-          <p:cNvSpPr/>
-          <p:nvPr/>
-        </p:nvSpPr>
-        <p:spPr>
-          <a:xfrm>
-            <a:off x="0" y="0"/>
-            <a:ext cx="12191695" cy="6858000"/>
-          </a:xfrm>
-          <a:prstGeom prst="rect">
-            <a:avLst/>
-          </a:prstGeom>
-          <a:solidFill>
-            <a:srgbClr val="FDFBF8"/>
-          </a:solidFill>
-          <a:ln>
-            <a:noFill/>
-          </a:ln>
-          <a:effectLst/>
-        </p:spPr>
-        <p:style>
-          <a:lnRef idx="1">
-            <a:schemeClr val="accent1"/>
-          </a:lnRef>
-          <a:fillRef idx="3">
-            <a:schemeClr val="accent1"/>
-          </a:fillRef>
-          <a:effectRef idx="2">
-            <a:schemeClr val="accent1"/>
-          </a:effectRef>
-          <a:fontRef idx="minor">
-            <a:schemeClr val="lt1"/>
-          </a:fontRef>
-        </p:style>
-        <p:txBody>
-          <a:bodyPr rtlCol="0" anchor="ctr"/>
-          <a:lstStyle/>
-          <a:p>
-            <a:pPr algn="ctr"/>
-          </a:p>
-        </p:txBody>
-      </p:sp>
-      <p:sp>
-        <p:nvSpPr>
-          <p:cNvPr id="3" name="Rectangle 2"/>
-          <p:cNvSpPr/>
-          <p:nvPr/>
-        </p:nvSpPr>
-        <p:spPr>
-          <a:xfrm>
-            <a:off x="0" y="2103120"/>
-            <a:ext cx="12191695" cy="2743200"/>
-          </a:xfrm>
-          <a:prstGeom prst="rect">
-            <a:avLst/>
-          </a:prstGeom>
-          <a:solidFill>
-            <a:srgbClr val="FDF1EF"/>
-          </a:solidFill>
-          <a:ln>
-            <a:noFill/>
-          </a:ln>
-          <a:effectLst/>
-        </p:spPr>
-        <p:style>
-          <a:lnRef idx="1">
-            <a:schemeClr val="accent1"/>
-          </a:lnRef>
-          <a:fillRef idx="3">
-            <a:schemeClr val="accent1"/>
-          </a:fillRef>
-          <a:effectRef idx="2">
-            <a:schemeClr val="accent1"/>
-          </a:effectRef>
-          <a:fontRef idx="minor">
-            <a:schemeClr val="lt1"/>
-          </a:fontRef>
-        </p:style>
-        <p:txBody>
-          <a:bodyPr rtlCol="0" anchor="ctr"/>
-          <a:lstStyle/>
-          <a:p>
-            <a:pPr algn="ctr"/>
-          </a:p>
-        </p:txBody>
-      </p:sp>
-      <p:sp>
-        <p:nvSpPr>
-          <p:cNvPr id="4" name="Rectangle 3"/>
-          <p:cNvSpPr/>
-          <p:nvPr/>
-        </p:nvSpPr>
-        <p:spPr>
-          <a:xfrm>
-            <a:off x="0" y="0"/>
-            <a:ext cx="274320" cy="6858000"/>
-          </a:xfrm>
-          <a:prstGeom prst="rect">
-            <a:avLst/>
-          </a:prstGeom>
-          <a:solidFill>
-            <a:srgbClr val="DC756A"/>
-          </a:solidFill>
-          <a:ln>
-            <a:noFill/>
-          </a:ln>
-          <a:effectLst/>
-        </p:spPr>
-        <p:style>
-          <a:lnRef idx="1">
-            <a:schemeClr val="accent1"/>
-          </a:lnRef>
-          <a:fillRef idx="3">
-            <a:schemeClr val="accent1"/>
-          </a:fillRef>
-          <a:effectRef idx="2">
-            <a:schemeClr val="accent1"/>
-          </a:effectRef>
-          <a:fontRef idx="minor">
-            <a:schemeClr val="lt1"/>
-          </a:fontRef>
-        </p:style>
-        <p:txBody>
-          <a:bodyPr rtlCol="0" anchor="ctr"/>
-          <a:lstStyle/>
-          <a:p>
-            <a:pPr algn="ctr"/>
-          </a:p>
-        </p:txBody>
-      </p:sp>
-      <p:sp>
-        <p:nvSpPr>
-          <p:cNvPr id="5" name="TextBox 4"/>
-          <p:cNvSpPr txBox="1"/>
-          <p:nvPr/>
-        </p:nvSpPr>
-        <p:spPr>
-          <a:xfrm>
-            <a:off x="1280160" y="2377440"/>
-            <a:ext cx="9692640" cy="411480"/>
-          </a:xfrm>
-          <a:prstGeom prst="rect">
-            <a:avLst/>
-          </a:prstGeom>
-          <a:noFill/>
-        </p:spPr>
-        <p:txBody>
-          <a:bodyPr wrap="none">
-            <a:spAutoFit/>
-          </a:bodyPr>
-          <a:lstStyle/>
-          <a:p>
-            <a:r>
-              <a:rPr sz="1500" b="1">
-                <a:solidFill>
-                  <a:srgbClr val="DC756A"/>
-                </a:solidFill>
-                <a:latin typeface="Calibri"/>
-              </a:rPr>
-              <a:t>MỤC 2.2</a:t>
-            </a:r>
-          </a:p>
-        </p:txBody>
-      </p:sp>
-      <p:sp>
-        <p:nvSpPr>
-          <p:cNvPr id="6" name="TextBox 5"/>
-          <p:cNvSpPr txBox="1"/>
-          <p:nvPr/>
-        </p:nvSpPr>
-        <p:spPr>
-          <a:xfrm>
-            <a:off x="1280160" y="2788920"/>
-            <a:ext cx="9601200" cy="1371600"/>
-          </a:xfrm>
-          <a:prstGeom prst="rect">
-            <a:avLst/>
-          </a:prstGeom>
-          <a:noFill/>
-        </p:spPr>
-        <p:txBody>
-          <a:bodyPr wrap="square">
-            <a:spAutoFit/>
-          </a:bodyPr>
-          <a:lstStyle/>
-          <a:p>
-            <a:r>
-              <a:rPr sz="3800" b="1">
-                <a:solidFill>
-                  <a:srgbClr val="AC4D33"/>
-                </a:solidFill>
-                <a:latin typeface="Cambria"/>
-              </a:rPr>
-              <a:t>Kỹ năng thuyết trình</a:t>
-            </a:r>
-          </a:p>
-        </p:txBody>
-      </p:sp>
-      <p:sp>
-        <p:nvSpPr>
-          <p:cNvPr id="7" name="TextBox 6"/>
-          <p:cNvSpPr txBox="1"/>
-          <p:nvPr/>
-        </p:nvSpPr>
-        <p:spPr>
-          <a:xfrm>
-            <a:off x="1280160" y="4224528"/>
-            <a:ext cx="9418320" cy="640080"/>
-          </a:xfrm>
-          <a:prstGeom prst="rect">
-            <a:avLst/>
-          </a:prstGeom>
-          <a:noFill/>
-        </p:spPr>
-        <p:txBody>
-          <a:bodyPr wrap="square">
-            <a:spAutoFit/>
-          </a:bodyPr>
-          <a:lstStyle/>
-          <a:p>
-            <a:r>
-              <a:rPr sz="1450" i="1">
-                <a:solidFill>
-                  <a:srgbClr val="8A7A76"/>
-                </a:solidFill>
-                <a:latin typeface="Calibri"/>
-              </a:rPr>
-              <a:t>Từ chuẩn bị đến trình bày: làm sao để người nghe nhớ được điều bạn muốn nói.</a:t>
-            </a:r>
-          </a:p>
-        </p:txBody>
-      </p:sp>
-      <p:sp>
-        <p:nvSpPr>
-          <p:cNvPr id="8" name="TextBox 7"/>
-          <p:cNvSpPr txBox="1"/>
-          <p:nvPr/>
-        </p:nvSpPr>
-        <p:spPr>
-          <a:xfrm>
-            <a:off x="502920" y="6419088"/>
-            <a:ext cx="7772400" cy="292608"/>
-          </a:xfrm>
-          <a:prstGeom prst="rect">
-            <a:avLst/>
-          </a:prstGeom>
-          <a:noFill/>
-        </p:spPr>
-        <p:txBody>
-          <a:bodyPr wrap="none">
-            <a:spAutoFit/>
-          </a:bodyPr>
-          <a:lstStyle/>
-          <a:p>
-            <a:r>
-              <a:rPr sz="900">
-                <a:solidFill>
-                  <a:srgbClr val="8A7A76"/>
-                </a:solidFill>
-                <a:latin typeface="Calibri"/>
-              </a:rPr>
-              <a:t>Je m'appelle Huong  •  GV. Đỗ Thùy Hương  •  EC1103</a:t>
-            </a:r>
-          </a:p>
-        </p:txBody>
-      </p:sp>
-      <p:sp>
-        <p:nvSpPr>
-          <p:cNvPr id="9" name="TextBox 8"/>
-          <p:cNvSpPr txBox="1"/>
-          <p:nvPr/>
-        </p:nvSpPr>
-        <p:spPr>
-          <a:xfrm>
-            <a:off x="9326880" y="6419088"/>
-            <a:ext cx="1920240" cy="292608"/>
-          </a:xfrm>
-          <a:prstGeom prst="rect">
-            <a:avLst/>
-          </a:prstGeom>
-          <a:noFill/>
-        </p:spPr>
-        <p:txBody>
-          <a:bodyPr wrap="none">
-            <a:spAutoFit/>
-          </a:bodyPr>
-          <a:lstStyle/>
-          <a:p>
-            <a:pPr algn="r"/>
-            <a:r>
-              <a:rPr sz="900">
-                <a:solidFill>
-                  <a:srgbClr val="8A7A76"/>
-                </a:solidFill>
-                <a:latin typeface="Calibri"/>
-              </a:rPr>
-              <a:t>Chương 2</a:t>
-            </a:r>
           </a:p>
         </p:txBody>
       </p:sp>
@@ -8777,7 +8986,7 @@
       </p:grpSpPr>
       <p:pic>
         <p:nvPicPr>
-          <p:cNvPr id="2" name="Image 0" descr="assets/logo_tron.png">    </p:cNvPr>
+          <p:cNvPr id="2" name="Image 0" descr="/home/user/comdraft/assets/img/dau-huong.png">    </p:cNvPr>
           <p:cNvPicPr>
             <a:picLocks noChangeAspect="1"/>
           </p:cNvPicPr>
@@ -9491,315 +9700,530 @@
 </file>
 
 <file path=ppt/slides/slide20.xml><?xml version="1.0" encoding="utf-8"?>
-<p:sld xmlns:a="http://schemas.openxmlformats.org/drawingml/2006/main" xmlns:p="http://schemas.openxmlformats.org/presentationml/2006/main" xmlns:r="http://schemas.openxmlformats.org/officeDocument/2006/relationships">
-  <p:cSld>
+<p:sld xmlns:a="http://schemas.openxmlformats.org/drawingml/2006/main" xmlns:r="http://schemas.openxmlformats.org/officeDocument/2006/relationships" xmlns:p="http://schemas.openxmlformats.org/presentationml/2006/main">
+  <p:cSld name="Slide 16">
+    <p:bg>
+      <p:bgPr>
+        <a:solidFill>
+          <a:srgbClr val="FDFBF8"/>
+        </a:solidFill>
+      </p:bgPr>
+    </p:bg>
     <p:spTree>
       <p:nvGrpSpPr>
         <p:cNvPr id="1" name=""/>
         <p:cNvGrpSpPr/>
         <p:nvPr/>
       </p:nvGrpSpPr>
-      <p:grpSpPr/>
-      <p:sp>
-        <p:nvSpPr>
-          <p:cNvPr id="2" name="Rectangle 1"/>
-          <p:cNvSpPr/>
-          <p:nvPr/>
-        </p:nvSpPr>
-        <p:spPr>
-          <a:xfrm>
-            <a:off x="0" y="0"/>
-            <a:ext cx="12191695" cy="6858000"/>
-          </a:xfrm>
-          <a:prstGeom prst="rect">
+      <p:grpSpPr>
+        <a:xfrm>
+          <a:off x="0" y="0"/>
+          <a:ext cx="0" cy="0"/>
+          <a:chOff x="0" y="0"/>
+          <a:chExt cx="0" cy="0"/>
+        </a:xfrm>
+      </p:grpSpPr>
+      <p:pic>
+        <p:nvPicPr>
+          <p:cNvPr id="2" name="Image 0" descr="/home/user/comdraft/assets/img/dau-huong.png">    </p:cNvPr>
+          <p:cNvPicPr>
+            <a:picLocks noChangeAspect="1"/>
+          </p:cNvPicPr>
+          <p:nvPr/>
+        </p:nvPicPr>
+        <p:blipFill>
+          <a:blip r:embed="rId1"/>
+          <a:stretch>
+            <a:fillRect/>
+          </a:stretch>
+        </p:blipFill>
+        <p:spPr>
+          <a:xfrm>
+            <a:off x="411480" y="6327648"/>
+            <a:ext cx="384048" cy="384048"/>
+          </a:xfrm>
+          <a:prstGeom prst="rect">
+            <a:avLst/>
+          </a:prstGeom>
+        </p:spPr>
+      </p:pic>
+      <p:sp>
+        <p:nvSpPr>
+          <p:cNvPr id="3" name="Text 0"/>
+          <p:cNvSpPr/>
+          <p:nvPr/>
+        </p:nvSpPr>
+        <p:spPr>
+          <a:xfrm>
+            <a:off x="868680" y="6355080"/>
+            <a:ext cx="7498080" cy="310896"/>
+          </a:xfrm>
+          <a:prstGeom prst="rect">
+            <a:avLst/>
+          </a:prstGeom>
+          <a:noFill/>
+          <a:ln/>
+        </p:spPr>
+        <p:txBody>
+          <a:bodyPr wrap="square" lIns="0" tIns="0" rIns="0" bIns="0" rtlCol="0" anchor="ctr"/>
+          <a:lstStyle/>
+          <a:p>
+            <a:pPr indent="0" marL="0">
+              <a:buNone/>
+            </a:pPr>
+            <a:r>
+              <a:rPr lang="en-US" sz="900" dirty="0">
+                <a:solidFill>
+                  <a:srgbClr val="8A7A76"/>
+                </a:solidFill>
+                <a:latin typeface="Calibri" pitchFamily="34" charset="0"/>
+                <a:ea typeface="Calibri" pitchFamily="34" charset="-122"/>
+                <a:cs typeface="Calibri" pitchFamily="34" charset="-120"/>
+              </a:rPr>
+              <a:t>Je m'appelle Huong  •  GV. Đỗ Thùy Hương  •  EC1103</a:t>
+            </a:r>
+            <a:endParaRPr lang="en-US" sz="900" dirty="0"/>
+          </a:p>
+        </p:txBody>
+      </p:sp>
+      <p:sp>
+        <p:nvSpPr>
+          <p:cNvPr id="4" name="Text 1"/>
+          <p:cNvSpPr/>
+          <p:nvPr/>
+        </p:nvSpPr>
+        <p:spPr>
+          <a:xfrm>
+            <a:off x="8503920" y="6355080"/>
+            <a:ext cx="2743200" cy="310896"/>
+          </a:xfrm>
+          <a:prstGeom prst="rect">
+            <a:avLst/>
+          </a:prstGeom>
+          <a:noFill/>
+          <a:ln/>
+        </p:spPr>
+        <p:txBody>
+          <a:bodyPr wrap="square" lIns="0" tIns="0" rIns="0" bIns="0" rtlCol="0" anchor="ctr"/>
+          <a:lstStyle/>
+          <a:p>
+            <a:pPr algn="r" indent="0" marL="0">
+              <a:buNone/>
+            </a:pPr>
+            <a:r>
+              <a:rPr lang="en-US" sz="900" dirty="0">
+                <a:solidFill>
+                  <a:srgbClr val="8A7A76"/>
+                </a:solidFill>
+                <a:latin typeface="Calibri" pitchFamily="34" charset="0"/>
+                <a:ea typeface="Calibri" pitchFamily="34" charset="-122"/>
+                <a:cs typeface="Calibri" pitchFamily="34" charset="-120"/>
+              </a:rPr>
+              <a:t>Chương 2</a:t>
+            </a:r>
+            <a:endParaRPr lang="en-US" sz="900" dirty="0"/>
+          </a:p>
+        </p:txBody>
+      </p:sp>
+      <p:sp>
+        <p:nvSpPr>
+          <p:cNvPr id="5" name="Shape 2"/>
+          <p:cNvSpPr/>
+          <p:nvPr/>
+        </p:nvSpPr>
+        <p:spPr>
+          <a:xfrm>
+            <a:off x="11430000" y="6327648"/>
+            <a:ext cx="365760" cy="365760"/>
+          </a:xfrm>
+          <a:prstGeom prst="ellipse">
             <a:avLst/>
           </a:prstGeom>
           <a:solidFill>
-            <a:srgbClr val="FDFBF8"/>
+            <a:srgbClr val="DC756A"/>
           </a:solidFill>
-          <a:ln>
-            <a:noFill/>
-          </a:ln>
-          <a:effectLst/>
-        </p:spPr>
-        <p:style>
-          <a:lnRef idx="1">
-            <a:schemeClr val="accent1"/>
-          </a:lnRef>
-          <a:fillRef idx="3">
-            <a:schemeClr val="accent1"/>
-          </a:fillRef>
-          <a:effectRef idx="2">
-            <a:schemeClr val="accent1"/>
-          </a:effectRef>
-          <a:fontRef idx="minor">
-            <a:schemeClr val="lt1"/>
-          </a:fontRef>
-        </p:style>
-        <p:txBody>
-          <a:bodyPr rtlCol="0" anchor="ctr"/>
-          <a:lstStyle/>
-          <a:p>
-            <a:pPr algn="ctr"/>
-          </a:p>
-        </p:txBody>
-      </p:sp>
-      <p:sp>
-        <p:nvSpPr>
-          <p:cNvPr id="3" name="Rectangle 2"/>
-          <p:cNvSpPr/>
-          <p:nvPr/>
-        </p:nvSpPr>
-        <p:spPr>
-          <a:xfrm>
-            <a:off x="0" y="2103120"/>
-            <a:ext cx="12191695" cy="2743200"/>
-          </a:xfrm>
-          <a:prstGeom prst="rect">
-            <a:avLst/>
+          <a:ln/>
+        </p:spPr>
+        <p:txBody>
+          <a:bodyPr/>
+          <a:p/>
+        </p:txBody>
+      </p:sp>
+      <p:sp>
+        <p:nvSpPr>
+          <p:cNvPr id="6" name="Text 3"/>
+          <p:cNvSpPr/>
+          <p:nvPr/>
+        </p:nvSpPr>
+        <p:spPr>
+          <a:xfrm>
+            <a:off x="11430000" y="6327648"/>
+            <a:ext cx="365760" cy="365760"/>
+          </a:xfrm>
+          <a:prstGeom prst="rect">
+            <a:avLst/>
+          </a:prstGeom>
+          <a:noFill/>
+          <a:ln/>
+        </p:spPr>
+        <p:txBody>
+          <a:bodyPr wrap="square" lIns="0" tIns="0" rIns="0" bIns="0" rtlCol="0" anchor="ctr"/>
+          <a:lstStyle/>
+          <a:p>
+            <a:pPr algn="ctr" indent="0" marL="0">
+              <a:buNone/>
+            </a:pPr>
+            <a:r>
+              <a:rPr lang="en-US" sz="1000" b="1" dirty="0">
+                <a:solidFill>
+                  <a:srgbClr val="FFFFFF"/>
+                </a:solidFill>
+                <a:latin typeface="Calibri" pitchFamily="34" charset="0"/>
+                <a:ea typeface="Calibri" pitchFamily="34" charset="-122"/>
+                <a:cs typeface="Calibri" pitchFamily="34" charset="-120"/>
+              </a:rPr>
+              <a:t>16</a:t>
+            </a:r>
+            <a:endParaRPr lang="en-US" sz="1000" dirty="0"/>
+          </a:p>
+        </p:txBody>
+      </p:sp>
+      <p:sp>
+        <p:nvSpPr>
+          <p:cNvPr id="7" name="Text 4"/>
+          <p:cNvSpPr/>
+          <p:nvPr/>
+        </p:nvSpPr>
+        <p:spPr>
+          <a:xfrm>
+            <a:off x="502920" y="310896"/>
+            <a:ext cx="11155680" cy="274320"/>
+          </a:xfrm>
+          <a:prstGeom prst="rect">
+            <a:avLst/>
+          </a:prstGeom>
+          <a:noFill/>
+          <a:ln/>
+        </p:spPr>
+        <p:txBody>
+          <a:bodyPr wrap="square" lIns="0" tIns="0" rIns="0" bIns="0" rtlCol="0" anchor="ctr"/>
+          <a:lstStyle/>
+          <a:p>
+            <a:pPr indent="0" marL="0">
+              <a:buNone/>
+            </a:pPr>
+            <a:r>
+              <a:rPr lang="en-US" sz="1100" b="1" spc="300" kern="0" dirty="0">
+                <a:solidFill>
+                  <a:srgbClr val="DC756A"/>
+                </a:solidFill>
+                <a:latin typeface="Calibri" pitchFamily="34" charset="0"/>
+                <a:ea typeface="Calibri" pitchFamily="34" charset="-122"/>
+                <a:cs typeface="Calibri" pitchFamily="34" charset="-120"/>
+              </a:rPr>
+              <a:t>TÀI LIỆU</a:t>
+            </a:r>
+            <a:endParaRPr lang="en-US" sz="1100" dirty="0"/>
+          </a:p>
+        </p:txBody>
+      </p:sp>
+      <p:sp>
+        <p:nvSpPr>
+          <p:cNvPr id="8" name="Text 5"/>
+          <p:cNvSpPr/>
+          <p:nvPr/>
+        </p:nvSpPr>
+        <p:spPr>
+          <a:xfrm>
+            <a:off x="502920" y="576072"/>
+            <a:ext cx="11155680" cy="713232"/>
+          </a:xfrm>
+          <a:prstGeom prst="rect">
+            <a:avLst/>
+          </a:prstGeom>
+          <a:noFill/>
+          <a:ln/>
+        </p:spPr>
+        <p:txBody>
+          <a:bodyPr wrap="square" lIns="0" tIns="0" rIns="0" bIns="0" rtlCol="0" anchor="ctr"/>
+          <a:lstStyle/>
+          <a:p>
+            <a:pPr indent="0" marL="0">
+              <a:buNone/>
+            </a:pPr>
+            <a:r>
+              <a:rPr lang="en-US" sz="2700" b="1" dirty="0">
+                <a:solidFill>
+                  <a:srgbClr val="AC4D33"/>
+                </a:solidFill>
+                <a:latin typeface="Cambria" pitchFamily="34" charset="0"/>
+                <a:ea typeface="Cambria" pitchFamily="34" charset="-122"/>
+                <a:cs typeface="Cambria" pitchFamily="34" charset="-120"/>
+              </a:rPr>
+              <a:t>Tài liệu học tập</a:t>
+            </a:r>
+            <a:endParaRPr lang="en-US" sz="2700" dirty="0"/>
+          </a:p>
+        </p:txBody>
+      </p:sp>
+      <p:sp>
+        <p:nvSpPr>
+          <p:cNvPr id="9" name="Shape 6"/>
+          <p:cNvSpPr/>
+          <p:nvPr/>
+        </p:nvSpPr>
+        <p:spPr>
+          <a:xfrm>
+            <a:off x="502920" y="1463040"/>
+            <a:ext cx="11201400" cy="1322832"/>
+          </a:xfrm>
+          <a:prstGeom prst="roundRect">
+            <a:avLst>
+              <a:gd name="adj" fmla="val 6221"/>
+            </a:avLst>
           </a:prstGeom>
           <a:solidFill>
             <a:srgbClr val="FDF1EF"/>
           </a:solidFill>
-          <a:ln>
-            <a:noFill/>
+          <a:ln w="15875">
+            <a:solidFill>
+              <a:srgbClr val="FBCEC9"/>
+            </a:solidFill>
+            <a:prstDash val="solid"/>
           </a:ln>
-          <a:effectLst/>
-        </p:spPr>
-        <p:style>
-          <a:lnRef idx="1">
-            <a:schemeClr val="accent1"/>
-          </a:lnRef>
-          <a:fillRef idx="3">
-            <a:schemeClr val="accent1"/>
-          </a:fillRef>
-          <a:effectRef idx="2">
-            <a:schemeClr val="accent1"/>
-          </a:effectRef>
-          <a:fontRef idx="minor">
-            <a:schemeClr val="lt1"/>
-          </a:fontRef>
-        </p:style>
-        <p:txBody>
-          <a:bodyPr rtlCol="0" anchor="ctr"/>
-          <a:lstStyle/>
-          <a:p>
-            <a:pPr algn="ctr"/>
-          </a:p>
-        </p:txBody>
-      </p:sp>
-      <p:sp>
-        <p:nvSpPr>
-          <p:cNvPr id="4" name="Rectangle 3"/>
-          <p:cNvSpPr/>
-          <p:nvPr/>
-        </p:nvSpPr>
-        <p:spPr>
-          <a:xfrm>
-            <a:off x="0" y="0"/>
-            <a:ext cx="274320" cy="6858000"/>
-          </a:xfrm>
-          <a:prstGeom prst="rect">
-            <a:avLst/>
+        </p:spPr>
+        <p:txBody>
+          <a:bodyPr/>
+          <a:p/>
+        </p:txBody>
+      </p:sp>
+      <p:sp>
+        <p:nvSpPr>
+          <p:cNvPr id="10" name="Text 7"/>
+          <p:cNvSpPr/>
+          <p:nvPr/>
+        </p:nvSpPr>
+        <p:spPr>
+          <a:xfrm>
+            <a:off x="722376" y="1517904"/>
+            <a:ext cx="10762488" cy="1213104"/>
+          </a:xfrm>
+          <a:prstGeom prst="rect">
+            <a:avLst/>
+          </a:prstGeom>
+          <a:noFill/>
+          <a:ln/>
+        </p:spPr>
+        <p:txBody>
+          <a:bodyPr wrap="square" lIns="0" tIns="0" rIns="0" bIns="0" rtlCol="0" anchor="ctr"/>
+          <a:lstStyle/>
+          <a:p>
+            <a:pPr indent="0" marL="0">
+              <a:buNone/>
+            </a:pPr>
+            <a:r>
+              <a:rPr lang="en-US" sz="1500" b="1" dirty="0">
+                <a:solidFill>
+                  <a:srgbClr val="AC4D33"/>
+                </a:solidFill>
+                <a:latin typeface="Calibri" pitchFamily="34" charset="0"/>
+                <a:ea typeface="Calibri" pitchFamily="34" charset="-122"/>
+                <a:cs typeface="Calibri" pitchFamily="34" charset="-120"/>
+              </a:rPr>
+              <a:t>Giáo trình chính</a:t>
+            </a:r>
+            <a:endParaRPr lang="en-US" sz="1500" dirty="0"/>
+          </a:p>
+          <a:p>
+            <a:pPr indent="0" marL="0">
+              <a:buNone/>
+            </a:pPr>
+            <a:r>
+              <a:rPr lang="en-US" sz="1300" dirty="0">
+                <a:solidFill>
+                  <a:srgbClr val="3A2B28"/>
+                </a:solidFill>
+                <a:latin typeface="Calibri" pitchFamily="34" charset="0"/>
+                <a:ea typeface="Calibri" pitchFamily="34" charset="-122"/>
+                <a:cs typeface="Calibri" pitchFamily="34" charset="-120"/>
+              </a:rPr>
+              <a:t>Hà Nam Khánh Giao (2023), Giáo trình Giao tiếp kinh doanh, NXB Tài chính.</a:t>
+            </a:r>
+            <a:endParaRPr lang="en-US" sz="1500" dirty="0"/>
+          </a:p>
+        </p:txBody>
+      </p:sp>
+      <p:sp>
+        <p:nvSpPr>
+          <p:cNvPr id="11" name="Shape 8"/>
+          <p:cNvSpPr/>
+          <p:nvPr/>
+        </p:nvSpPr>
+        <p:spPr>
+          <a:xfrm>
+            <a:off x="502920" y="2950464"/>
+            <a:ext cx="11201400" cy="1322832"/>
+          </a:xfrm>
+          <a:prstGeom prst="roundRect">
+            <a:avLst>
+              <a:gd name="adj" fmla="val 6221"/>
+            </a:avLst>
           </a:prstGeom>
           <a:solidFill>
-            <a:srgbClr val="DC756A"/>
+            <a:srgbClr val="FDF1EF"/>
           </a:solidFill>
-          <a:ln>
-            <a:noFill/>
+          <a:ln w="15875">
+            <a:solidFill>
+              <a:srgbClr val="FBCEC9"/>
+            </a:solidFill>
+            <a:prstDash val="solid"/>
           </a:ln>
-          <a:effectLst/>
-        </p:spPr>
-        <p:style>
-          <a:lnRef idx="1">
-            <a:schemeClr val="accent1"/>
-          </a:lnRef>
-          <a:fillRef idx="3">
-            <a:schemeClr val="accent1"/>
-          </a:fillRef>
-          <a:effectRef idx="2">
-            <a:schemeClr val="accent1"/>
-          </a:effectRef>
-          <a:fontRef idx="minor">
-            <a:schemeClr val="lt1"/>
-          </a:fontRef>
-        </p:style>
-        <p:txBody>
-          <a:bodyPr rtlCol="0" anchor="ctr"/>
-          <a:lstStyle/>
-          <a:p>
-            <a:pPr algn="ctr"/>
-          </a:p>
-        </p:txBody>
-      </p:sp>
-      <p:sp>
-        <p:nvSpPr>
-          <p:cNvPr id="5" name="TextBox 4"/>
-          <p:cNvSpPr txBox="1"/>
-          <p:nvPr/>
-        </p:nvSpPr>
-        <p:spPr>
-          <a:xfrm>
-            <a:off x="1280160" y="2377440"/>
-            <a:ext cx="9692640" cy="411480"/>
-          </a:xfrm>
-          <a:prstGeom prst="rect">
-            <a:avLst/>
-          </a:prstGeom>
-          <a:noFill/>
-        </p:spPr>
-        <p:txBody>
-          <a:bodyPr wrap="none">
-            <a:spAutoFit/>
-          </a:bodyPr>
-          <a:lstStyle/>
-          <a:p>
-            <a:r>
-              <a:rPr sz="1500" b="1">
-                <a:solidFill>
-                  <a:srgbClr val="DC756A"/>
-                </a:solidFill>
-                <a:latin typeface="Calibri"/>
-              </a:rPr>
-              <a:t>MỤC 2.3 – 2.4</a:t>
-            </a:r>
-          </a:p>
-        </p:txBody>
-      </p:sp>
-      <p:sp>
-        <p:nvSpPr>
-          <p:cNvPr id="6" name="TextBox 5"/>
-          <p:cNvSpPr txBox="1"/>
-          <p:nvPr/>
-        </p:nvSpPr>
-        <p:spPr>
-          <a:xfrm>
-            <a:off x="1280160" y="2788920"/>
-            <a:ext cx="9601200" cy="1371600"/>
-          </a:xfrm>
-          <a:prstGeom prst="rect">
-            <a:avLst/>
-          </a:prstGeom>
-          <a:noFill/>
-        </p:spPr>
-        <p:txBody>
-          <a:bodyPr wrap="square">
-            <a:spAutoFit/>
-          </a:bodyPr>
-          <a:lstStyle/>
-          <a:p>
-            <a:r>
-              <a:rPr sz="2900" b="1">
+        </p:spPr>
+        <p:txBody>
+          <a:bodyPr/>
+          <a:p/>
+        </p:txBody>
+      </p:sp>
+      <p:sp>
+        <p:nvSpPr>
+          <p:cNvPr id="12" name="Text 9"/>
+          <p:cNvSpPr/>
+          <p:nvPr/>
+        </p:nvSpPr>
+        <p:spPr>
+          <a:xfrm>
+            <a:off x="722376" y="3005328"/>
+            <a:ext cx="10762488" cy="1213104"/>
+          </a:xfrm>
+          <a:prstGeom prst="rect">
+            <a:avLst/>
+          </a:prstGeom>
+          <a:noFill/>
+          <a:ln/>
+        </p:spPr>
+        <p:txBody>
+          <a:bodyPr wrap="square" lIns="0" tIns="0" rIns="0" bIns="0" rtlCol="0" anchor="ctr"/>
+          <a:lstStyle/>
+          <a:p>
+            <a:pPr indent="0" marL="0">
+              <a:buNone/>
+            </a:pPr>
+            <a:r>
+              <a:rPr lang="en-US" sz="1500" b="1" dirty="0">
                 <a:solidFill>
                   <a:srgbClr val="AC4D33"/>
                 </a:solidFill>
-                <a:latin typeface="Cambria"/>
-              </a:rPr>
-              <a:t>Lắng nghe, đặt câu hỏi và giao tiếp qua điện thoại</a:t>
-            </a:r>
-          </a:p>
-        </p:txBody>
-      </p:sp>
-      <p:sp>
-        <p:nvSpPr>
-          <p:cNvPr id="7" name="TextBox 6"/>
-          <p:cNvSpPr txBox="1"/>
-          <p:nvPr/>
-        </p:nvSpPr>
-        <p:spPr>
-          <a:xfrm>
-            <a:off x="1280160" y="4224528"/>
-            <a:ext cx="9418320" cy="640080"/>
-          </a:xfrm>
-          <a:prstGeom prst="rect">
-            <a:avLst/>
-          </a:prstGeom>
-          <a:noFill/>
-        </p:spPr>
-        <p:txBody>
-          <a:bodyPr wrap="square">
-            <a:spAutoFit/>
-          </a:bodyPr>
-          <a:lstStyle/>
-          <a:p>
-            <a:r>
-              <a:rPr sz="1450" i="1">
-                <a:solidFill>
-                  <a:srgbClr val="8A7A76"/>
-                </a:solidFill>
-                <a:latin typeface="Calibri"/>
-              </a:rPr>
-              <a:t>Hai kỹ năng ít được dạy nhất nhưng quyết định nhất trong công việc hằng ngày.</a:t>
-            </a:r>
-          </a:p>
-        </p:txBody>
-      </p:sp>
-      <p:sp>
-        <p:nvSpPr>
-          <p:cNvPr id="8" name="TextBox 7"/>
-          <p:cNvSpPr txBox="1"/>
-          <p:nvPr/>
-        </p:nvSpPr>
-        <p:spPr>
-          <a:xfrm>
-            <a:off x="502920" y="6419088"/>
-            <a:ext cx="7772400" cy="292608"/>
-          </a:xfrm>
-          <a:prstGeom prst="rect">
-            <a:avLst/>
-          </a:prstGeom>
-          <a:noFill/>
-        </p:spPr>
-        <p:txBody>
-          <a:bodyPr wrap="none">
-            <a:spAutoFit/>
-          </a:bodyPr>
-          <a:lstStyle/>
-          <a:p>
-            <a:r>
-              <a:rPr sz="900">
-                <a:solidFill>
-                  <a:srgbClr val="8A7A76"/>
-                </a:solidFill>
-                <a:latin typeface="Calibri"/>
-              </a:rPr>
-              <a:t>Je m'appelle Huong  •  GV. Đỗ Thùy Hương  •  EC1103</a:t>
-            </a:r>
-          </a:p>
-        </p:txBody>
-      </p:sp>
-      <p:sp>
-        <p:nvSpPr>
-          <p:cNvPr id="9" name="TextBox 8"/>
-          <p:cNvSpPr txBox="1"/>
-          <p:nvPr/>
-        </p:nvSpPr>
-        <p:spPr>
-          <a:xfrm>
-            <a:off x="9326880" y="6419088"/>
-            <a:ext cx="1920240" cy="292608"/>
-          </a:xfrm>
-          <a:prstGeom prst="rect">
-            <a:avLst/>
-          </a:prstGeom>
-          <a:noFill/>
-        </p:spPr>
-        <p:txBody>
-          <a:bodyPr wrap="none">
-            <a:spAutoFit/>
-          </a:bodyPr>
-          <a:lstStyle/>
-          <a:p>
-            <a:pPr algn="r"/>
-            <a:r>
-              <a:rPr sz="900">
-                <a:solidFill>
-                  <a:srgbClr val="8A7A76"/>
-                </a:solidFill>
-                <a:latin typeface="Calibri"/>
-              </a:rPr>
-              <a:t>Chương 2</a:t>
-            </a:r>
+                <a:latin typeface="Calibri" pitchFamily="34" charset="0"/>
+                <a:ea typeface="Calibri" pitchFamily="34" charset="-122"/>
+                <a:cs typeface="Calibri" pitchFamily="34" charset="-120"/>
+              </a:rPr>
+              <a:t>Tài liệu tham khảo</a:t>
+            </a:r>
+            <a:endParaRPr lang="en-US" sz="1500" dirty="0"/>
+          </a:p>
+          <a:p>
+            <a:pPr indent="0" marL="0">
+              <a:buNone/>
+            </a:pPr>
+            <a:r>
+              <a:rPr lang="en-US" sz="1300" dirty="0">
+                <a:solidFill>
+                  <a:srgbClr val="3A2B28"/>
+                </a:solidFill>
+                <a:latin typeface="Calibri" pitchFamily="34" charset="0"/>
+                <a:ea typeface="Calibri" pitchFamily="34" charset="-122"/>
+                <a:cs typeface="Calibri" pitchFamily="34" charset="-120"/>
+              </a:rPr>
+              <a:t>Thái Trí Dũng (2012), Kỹ năng giao tiếp và thương lượng trong kinh doanh, NXB Lao động – Xã hội.  •  Nghị định 30/2020/NĐ-CP về công tác văn thư (dùng cho Chương 5 và phần thực hành).</a:t>
+            </a:r>
+            <a:endParaRPr lang="en-US" sz="1500" dirty="0"/>
+          </a:p>
+        </p:txBody>
+      </p:sp>
+      <p:sp>
+        <p:nvSpPr>
+          <p:cNvPr id="13" name="Shape 10"/>
+          <p:cNvSpPr/>
+          <p:nvPr/>
+        </p:nvSpPr>
+        <p:spPr>
+          <a:xfrm>
+            <a:off x="502920" y="4437888"/>
+            <a:ext cx="11201400" cy="1322832"/>
+          </a:xfrm>
+          <a:prstGeom prst="roundRect">
+            <a:avLst>
+              <a:gd name="adj" fmla="val 6221"/>
+            </a:avLst>
+          </a:prstGeom>
+          <a:solidFill>
+            <a:srgbClr val="FDF1EF"/>
+          </a:solidFill>
+          <a:ln w="15875">
+            <a:solidFill>
+              <a:srgbClr val="FBCEC9"/>
+            </a:solidFill>
+            <a:prstDash val="solid"/>
+          </a:ln>
+        </p:spPr>
+        <p:txBody>
+          <a:bodyPr/>
+          <a:p/>
+        </p:txBody>
+      </p:sp>
+      <p:sp>
+        <p:nvSpPr>
+          <p:cNvPr id="14" name="Text 11"/>
+          <p:cNvSpPr/>
+          <p:nvPr/>
+        </p:nvSpPr>
+        <p:spPr>
+          <a:xfrm>
+            <a:off x="722376" y="4492752"/>
+            <a:ext cx="10762488" cy="1213104"/>
+          </a:xfrm>
+          <a:prstGeom prst="rect">
+            <a:avLst/>
+          </a:prstGeom>
+          <a:noFill/>
+          <a:ln/>
+        </p:spPr>
+        <p:txBody>
+          <a:bodyPr wrap="square" lIns="0" tIns="0" rIns="0" bIns="0" rtlCol="0" anchor="ctr"/>
+          <a:lstStyle/>
+          <a:p>
+            <a:pPr indent="0" marL="0">
+              <a:buNone/>
+            </a:pPr>
+            <a:r>
+              <a:rPr lang="en-US" sz="1500" b="1" dirty="0">
+                <a:solidFill>
+                  <a:srgbClr val="AC4D33"/>
+                </a:solidFill>
+                <a:latin typeface="Calibri" pitchFamily="34" charset="0"/>
+                <a:ea typeface="Calibri" pitchFamily="34" charset="-122"/>
+                <a:cs typeface="Calibri" pitchFamily="34" charset="-120"/>
+              </a:rPr>
+              <a:t>Học liệu của giảng viên</a:t>
+            </a:r>
+            <a:endParaRPr lang="en-US" sz="1500" dirty="0"/>
+          </a:p>
+          <a:p>
+            <a:pPr indent="0" marL="0">
+              <a:buNone/>
+            </a:pPr>
+            <a:r>
+              <a:rPr lang="en-US" sz="1300" dirty="0">
+                <a:solidFill>
+                  <a:srgbClr val="3A2B28"/>
+                </a:solidFill>
+                <a:latin typeface="Calibri" pitchFamily="34" charset="0"/>
+                <a:ea typeface="Calibri" pitchFamily="34" charset="-122"/>
+                <a:cs typeface="Calibri" pitchFamily="34" charset="-120"/>
+              </a:rPr>
+              <a:t>Slide bài giảng, tình huống và bài tập do GV. Đỗ Thùy Hương biên soạn; cung cấp sau mỗi buổi học trên nhóm lớp.</a:t>
+            </a:r>
+            <a:endParaRPr lang="en-US" sz="1500" dirty="0"/>
           </a:p>
         </p:txBody>
       </p:sp>
@@ -9837,7 +10261,7 @@
       </p:grpSpPr>
       <p:pic>
         <p:nvPicPr>
-          <p:cNvPr id="2" name="Image 0" descr="assets/logo_tron.png">    </p:cNvPr>
+          <p:cNvPr id="2" name="Image 0" descr="/home/user/comdraft/assets/img/dau-huong.png">    </p:cNvPr>
           <p:cNvPicPr>
             <a:picLocks noChangeAspect="1"/>
           </p:cNvPicPr>
@@ -10551,6 +10975,327 @@
 </file>
 
 <file path=ppt/slides/slide4.xml><?xml version="1.0" encoding="utf-8"?>
+<p:sld xmlns:a="http://schemas.openxmlformats.org/drawingml/2006/main" xmlns:p="http://schemas.openxmlformats.org/presentationml/2006/main" xmlns:r="http://schemas.openxmlformats.org/officeDocument/2006/relationships">
+  <p:cSld>
+    <p:spTree>
+      <p:nvGrpSpPr>
+        <p:cNvPr id="1" name=""/>
+        <p:cNvGrpSpPr/>
+        <p:nvPr/>
+      </p:nvGrpSpPr>
+      <p:grpSpPr/>
+      <p:sp>
+        <p:nvSpPr>
+          <p:cNvPr id="2" name="Rectangle 1"/>
+          <p:cNvSpPr/>
+          <p:nvPr/>
+        </p:nvSpPr>
+        <p:spPr>
+          <a:xfrm>
+            <a:off x="0" y="0"/>
+            <a:ext cx="12191695" cy="6858000"/>
+          </a:xfrm>
+          <a:prstGeom prst="rect">
+            <a:avLst/>
+          </a:prstGeom>
+          <a:solidFill>
+            <a:srgbClr val="FDFBF8"/>
+          </a:solidFill>
+          <a:ln>
+            <a:noFill/>
+          </a:ln>
+          <a:effectLst/>
+        </p:spPr>
+        <p:style>
+          <a:lnRef idx="1">
+            <a:schemeClr val="accent1"/>
+          </a:lnRef>
+          <a:fillRef idx="3">
+            <a:schemeClr val="accent1"/>
+          </a:fillRef>
+          <a:effectRef idx="2">
+            <a:schemeClr val="accent1"/>
+          </a:effectRef>
+          <a:fontRef idx="minor">
+            <a:schemeClr val="lt1"/>
+          </a:fontRef>
+        </p:style>
+        <p:txBody>
+          <a:bodyPr rtlCol="0" anchor="ctr"/>
+          <a:lstStyle/>
+          <a:p>
+            <a:pPr algn="ctr"/>
+          </a:p>
+        </p:txBody>
+      </p:sp>
+      <p:sp>
+        <p:nvSpPr>
+          <p:cNvPr id="3" name="Rectangle 2"/>
+          <p:cNvSpPr/>
+          <p:nvPr/>
+        </p:nvSpPr>
+        <p:spPr>
+          <a:xfrm>
+            <a:off x="0" y="2103120"/>
+            <a:ext cx="12191695" cy="2743200"/>
+          </a:xfrm>
+          <a:prstGeom prst="rect">
+            <a:avLst/>
+          </a:prstGeom>
+          <a:solidFill>
+            <a:srgbClr val="FDF1EF"/>
+          </a:solidFill>
+          <a:ln>
+            <a:noFill/>
+          </a:ln>
+          <a:effectLst/>
+        </p:spPr>
+        <p:style>
+          <a:lnRef idx="1">
+            <a:schemeClr val="accent1"/>
+          </a:lnRef>
+          <a:fillRef idx="3">
+            <a:schemeClr val="accent1"/>
+          </a:fillRef>
+          <a:effectRef idx="2">
+            <a:schemeClr val="accent1"/>
+          </a:effectRef>
+          <a:fontRef idx="minor">
+            <a:schemeClr val="lt1"/>
+          </a:fontRef>
+        </p:style>
+        <p:txBody>
+          <a:bodyPr rtlCol="0" anchor="ctr"/>
+          <a:lstStyle/>
+          <a:p>
+            <a:pPr algn="ctr"/>
+          </a:p>
+        </p:txBody>
+      </p:sp>
+      <p:sp>
+        <p:nvSpPr>
+          <p:cNvPr id="4" name="Rectangle 3"/>
+          <p:cNvSpPr/>
+          <p:nvPr/>
+        </p:nvSpPr>
+        <p:spPr>
+          <a:xfrm>
+            <a:off x="0" y="0"/>
+            <a:ext cx="274320" cy="6858000"/>
+          </a:xfrm>
+          <a:prstGeom prst="rect">
+            <a:avLst/>
+          </a:prstGeom>
+          <a:solidFill>
+            <a:srgbClr val="DC756A"/>
+          </a:solidFill>
+          <a:ln>
+            <a:noFill/>
+          </a:ln>
+          <a:effectLst/>
+        </p:spPr>
+        <p:style>
+          <a:lnRef idx="1">
+            <a:schemeClr val="accent1"/>
+          </a:lnRef>
+          <a:fillRef idx="3">
+            <a:schemeClr val="accent1"/>
+          </a:fillRef>
+          <a:effectRef idx="2">
+            <a:schemeClr val="accent1"/>
+          </a:effectRef>
+          <a:fontRef idx="minor">
+            <a:schemeClr val="lt1"/>
+          </a:fontRef>
+        </p:style>
+        <p:txBody>
+          <a:bodyPr rtlCol="0" anchor="ctr"/>
+          <a:lstStyle/>
+          <a:p>
+            <a:pPr algn="ctr"/>
+          </a:p>
+        </p:txBody>
+      </p:sp>
+      <p:sp>
+        <p:nvSpPr>
+          <p:cNvPr id="5" name="TextBox 4"/>
+          <p:cNvSpPr txBox="1"/>
+          <p:nvPr/>
+        </p:nvSpPr>
+        <p:spPr>
+          <a:xfrm>
+            <a:off x="1280160" y="2377440"/>
+            <a:ext cx="9692640" cy="411480"/>
+          </a:xfrm>
+          <a:prstGeom prst="rect">
+            <a:avLst/>
+          </a:prstGeom>
+          <a:noFill/>
+        </p:spPr>
+        <p:txBody>
+          <a:bodyPr wrap="none">
+            <a:spAutoFit/>
+          </a:bodyPr>
+          <a:lstStyle/>
+          <a:p>
+            <a:r>
+              <a:rPr sz="1500" b="1">
+                <a:solidFill>
+                  <a:srgbClr val="DC756A"/>
+                </a:solidFill>
+                <a:latin typeface="Calibri"/>
+              </a:rPr>
+              <a:t>MỤC 2.1</a:t>
+            </a:r>
+          </a:p>
+        </p:txBody>
+      </p:sp>
+      <p:sp>
+        <p:nvSpPr>
+          <p:cNvPr id="6" name="TextBox 5"/>
+          <p:cNvSpPr txBox="1"/>
+          <p:nvPr/>
+        </p:nvSpPr>
+        <p:spPr>
+          <a:xfrm>
+            <a:off x="1280160" y="2788920"/>
+            <a:ext cx="9601200" cy="1371600"/>
+          </a:xfrm>
+          <a:prstGeom prst="rect">
+            <a:avLst/>
+          </a:prstGeom>
+          <a:noFill/>
+        </p:spPr>
+        <p:txBody>
+          <a:bodyPr wrap="square">
+            <a:spAutoFit/>
+          </a:bodyPr>
+          <a:lstStyle/>
+          <a:p>
+            <a:r>
+              <a:rPr sz="3300" b="1">
+                <a:solidFill>
+                  <a:srgbClr val="AC4D33"/>
+                </a:solidFill>
+                <a:latin typeface="Cambria"/>
+              </a:rPr>
+              <a:t>Ấn tượng ban đầu và nghi thức xã giao</a:t>
+            </a:r>
+          </a:p>
+        </p:txBody>
+      </p:sp>
+      <p:sp>
+        <p:nvSpPr>
+          <p:cNvPr id="7" name="TextBox 6"/>
+          <p:cNvSpPr txBox="1"/>
+          <p:nvPr/>
+        </p:nvSpPr>
+        <p:spPr>
+          <a:xfrm>
+            <a:off x="1280160" y="4224528"/>
+            <a:ext cx="9418320" cy="640080"/>
+          </a:xfrm>
+          <a:prstGeom prst="rect">
+            <a:avLst/>
+          </a:prstGeom>
+          <a:noFill/>
+        </p:spPr>
+        <p:txBody>
+          <a:bodyPr wrap="square">
+            <a:spAutoFit/>
+          </a:bodyPr>
+          <a:lstStyle/>
+          <a:p>
+            <a:r>
+              <a:rPr sz="1450" i="1">
+                <a:solidFill>
+                  <a:srgbClr val="8A7A76"/>
+                </a:solidFill>
+                <a:latin typeface="Calibri"/>
+              </a:rPr>
+              <a:t>Hai mươi giây đầu tiên quyết định phần lớn cách người khác nhìn nhận bạn.</a:t>
+            </a:r>
+          </a:p>
+        </p:txBody>
+      </p:sp>
+      <p:sp>
+        <p:nvSpPr>
+          <p:cNvPr id="8" name="TextBox 7"/>
+          <p:cNvSpPr txBox="1"/>
+          <p:nvPr/>
+        </p:nvSpPr>
+        <p:spPr>
+          <a:xfrm>
+            <a:off x="502920" y="6419088"/>
+            <a:ext cx="7772400" cy="292608"/>
+          </a:xfrm>
+          <a:prstGeom prst="rect">
+            <a:avLst/>
+          </a:prstGeom>
+          <a:noFill/>
+        </p:spPr>
+        <p:txBody>
+          <a:bodyPr wrap="none">
+            <a:spAutoFit/>
+          </a:bodyPr>
+          <a:lstStyle/>
+          <a:p>
+            <a:r>
+              <a:rPr sz="900">
+                <a:solidFill>
+                  <a:srgbClr val="8A7A76"/>
+                </a:solidFill>
+                <a:latin typeface="Calibri"/>
+              </a:rPr>
+              <a:t>Je m'appelle Huong  •  GV. Đỗ Thùy Hương  •  EC1103</a:t>
+            </a:r>
+          </a:p>
+        </p:txBody>
+      </p:sp>
+      <p:sp>
+        <p:nvSpPr>
+          <p:cNvPr id="9" name="TextBox 8"/>
+          <p:cNvSpPr txBox="1"/>
+          <p:nvPr/>
+        </p:nvSpPr>
+        <p:spPr>
+          <a:xfrm>
+            <a:off x="9326880" y="6419088"/>
+            <a:ext cx="1920240" cy="292608"/>
+          </a:xfrm>
+          <a:prstGeom prst="rect">
+            <a:avLst/>
+          </a:prstGeom>
+          <a:noFill/>
+        </p:spPr>
+        <p:txBody>
+          <a:bodyPr wrap="none">
+            <a:spAutoFit/>
+          </a:bodyPr>
+          <a:lstStyle/>
+          <a:p>
+            <a:pPr algn="r"/>
+            <a:r>
+              <a:rPr sz="900">
+                <a:solidFill>
+                  <a:srgbClr val="8A7A76"/>
+                </a:solidFill>
+                <a:latin typeface="Calibri"/>
+              </a:rPr>
+              <a:t>Chương 2</a:t>
+            </a:r>
+          </a:p>
+        </p:txBody>
+      </p:sp>
+    </p:spTree>
+  </p:cSld>
+  <p:clrMapOvr>
+    <a:masterClrMapping/>
+  </p:clrMapOvr>
+</p:sld>
+</file>
+
+<file path=ppt/slides/slide5.xml><?xml version="1.0" encoding="utf-8"?>
 <p:sld xmlns:a="http://schemas.openxmlformats.org/drawingml/2006/main" xmlns:r="http://schemas.openxmlformats.org/officeDocument/2006/relationships" xmlns:p="http://schemas.openxmlformats.org/presentationml/2006/main">
   <p:cSld name="Slide 4">
     <p:bg>
@@ -10576,7 +11321,7 @@
       </p:grpSpPr>
       <p:pic>
         <p:nvPicPr>
-          <p:cNvPr id="2" name="Image 0" descr="assets/logo_tron.png">    </p:cNvPr>
+          <p:cNvPr id="2" name="Image 0" descr="/home/user/comdraft/assets/img/dau-huong.png">    </p:cNvPr>
           <p:cNvPicPr>
             <a:picLocks noChangeAspect="1"/>
           </p:cNvPicPr>
@@ -10833,7 +11578,7 @@
         </p:blipFill>
         <p:spPr>
           <a:xfrm>
-            <a:off x="472287" y="1481328"/>
+            <a:off x="472287" y="2034462"/>
             <a:ext cx="11247120" cy="3602890"/>
           </a:xfrm>
           <a:prstGeom prst="rect">
@@ -10849,7 +11594,603 @@
 </p:sld>
 </file>
 
-<file path=ppt/slides/slide5.xml><?xml version="1.0" encoding="utf-8"?>
+<file path=ppt/slides/slide6.xml><?xml version="1.0" encoding="utf-8"?>
+<p:sld xmlns:a="http://schemas.openxmlformats.org/drawingml/2006/main" xmlns:p="http://schemas.openxmlformats.org/presentationml/2006/main" xmlns:r="http://schemas.openxmlformats.org/officeDocument/2006/relationships">
+  <p:cSld>
+    <p:spTree>
+      <p:nvGrpSpPr>
+        <p:cNvPr id="1" name=""/>
+        <p:cNvGrpSpPr/>
+        <p:nvPr/>
+      </p:nvGrpSpPr>
+      <p:grpSpPr/>
+      <p:sp>
+        <p:nvSpPr>
+          <p:cNvPr id="2" name="Rectangle 1"/>
+          <p:cNvSpPr/>
+          <p:nvPr/>
+        </p:nvSpPr>
+        <p:spPr>
+          <a:xfrm>
+            <a:off x="0" y="0"/>
+            <a:ext cx="12191695" cy="6858000"/>
+          </a:xfrm>
+          <a:prstGeom prst="rect">
+            <a:avLst/>
+          </a:prstGeom>
+          <a:solidFill>
+            <a:srgbClr val="FDFBF8"/>
+          </a:solidFill>
+          <a:ln>
+            <a:noFill/>
+          </a:ln>
+          <a:effectLst/>
+        </p:spPr>
+        <p:style>
+          <a:lnRef idx="1">
+            <a:schemeClr val="accent1"/>
+          </a:lnRef>
+          <a:fillRef idx="3">
+            <a:schemeClr val="accent1"/>
+          </a:fillRef>
+          <a:effectRef idx="2">
+            <a:schemeClr val="accent1"/>
+          </a:effectRef>
+          <a:fontRef idx="minor">
+            <a:schemeClr val="lt1"/>
+          </a:fontRef>
+        </p:style>
+        <p:txBody>
+          <a:bodyPr rtlCol="0" anchor="ctr"/>
+          <a:lstStyle/>
+          <a:p>
+            <a:pPr algn="ctr"/>
+          </a:p>
+        </p:txBody>
+      </p:sp>
+      <p:sp>
+        <p:nvSpPr>
+          <p:cNvPr id="3" name="TextBox 2"/>
+          <p:cNvSpPr txBox="1"/>
+          <p:nvPr/>
+        </p:nvSpPr>
+        <p:spPr>
+          <a:xfrm>
+            <a:off x="502920" y="292608"/>
+            <a:ext cx="11155680" cy="292608"/>
+          </a:xfrm>
+          <a:prstGeom prst="rect">
+            <a:avLst/>
+          </a:prstGeom>
+          <a:noFill/>
+        </p:spPr>
+        <p:txBody>
+          <a:bodyPr wrap="none">
+            <a:spAutoFit/>
+          </a:bodyPr>
+          <a:lstStyle/>
+          <a:p>
+            <a:r>
+              <a:rPr sz="1100" b="1">
+                <a:solidFill>
+                  <a:srgbClr val="DC756A"/>
+                </a:solidFill>
+                <a:latin typeface="Calibri"/>
+              </a:rPr>
+              <a:t>CON SỐ PHẢI NHỚ</a:t>
+            </a:r>
+          </a:p>
+        </p:txBody>
+      </p:sp>
+      <p:sp>
+        <p:nvSpPr>
+          <p:cNvPr id="4" name="TextBox 3"/>
+          <p:cNvSpPr txBox="1"/>
+          <p:nvPr/>
+        </p:nvSpPr>
+        <p:spPr>
+          <a:xfrm>
+            <a:off x="502920" y="603504"/>
+            <a:ext cx="11155680" cy="731520"/>
+          </a:xfrm>
+          <a:prstGeom prst="rect">
+            <a:avLst/>
+          </a:prstGeom>
+          <a:noFill/>
+        </p:spPr>
+        <p:txBody>
+          <a:bodyPr wrap="square">
+            <a:spAutoFit/>
+          </a:bodyPr>
+          <a:lstStyle/>
+          <a:p>
+            <a:r>
+              <a:rPr sz="2700" b="1">
+                <a:solidFill>
+                  <a:srgbClr val="3A2B28"/>
+                </a:solidFill>
+                <a:latin typeface="Cambria"/>
+              </a:rPr>
+              <a:t>Quy tắc 4 × 20 — bốn cửa ải của ấn tượng ban đầu</a:t>
+            </a:r>
+          </a:p>
+        </p:txBody>
+      </p:sp>
+      <p:sp>
+        <p:nvSpPr>
+          <p:cNvPr id="5" name="Rounded Rectangle 4"/>
+          <p:cNvSpPr/>
+          <p:nvPr/>
+        </p:nvSpPr>
+        <p:spPr>
+          <a:xfrm>
+            <a:off x="502920" y="1783080"/>
+            <a:ext cx="2622042" cy="3429000"/>
+          </a:xfrm>
+          <a:prstGeom prst="roundRect">
+            <a:avLst>
+              <a:gd name="adj" fmla="val 7000"/>
+            </a:avLst>
+          </a:prstGeom>
+          <a:solidFill>
+            <a:srgbClr val="FFFFFF"/>
+          </a:solidFill>
+          <a:ln w="15875">
+            <a:solidFill>
+              <a:srgbClr val="FBCEC9"/>
+            </a:solidFill>
+          </a:ln>
+          <a:effectLst/>
+        </p:spPr>
+        <p:style>
+          <a:lnRef idx="1">
+            <a:schemeClr val="accent1"/>
+          </a:lnRef>
+          <a:fillRef idx="3">
+            <a:schemeClr val="accent1"/>
+          </a:fillRef>
+          <a:effectRef idx="2">
+            <a:schemeClr val="accent1"/>
+          </a:effectRef>
+          <a:fontRef idx="minor">
+            <a:schemeClr val="lt1"/>
+          </a:fontRef>
+        </p:style>
+        <p:txBody>
+          <a:bodyPr rtlCol="0" anchor="ctr" wrap="square" lIns="182880" rIns="182880" tIns="274320" bIns="182880"/>
+          <a:lstStyle/>
+          <a:p>
+            <a:pPr algn="ctr"/>
+            <a:r>
+              <a:rPr sz="5800" b="1">
+                <a:solidFill>
+                  <a:srgbClr val="DC756A"/>
+                </a:solidFill>
+                <a:latin typeface="Cambria"/>
+              </a:rPr>
+              <a:t>20</a:t>
+            </a:r>
+          </a:p>
+          <a:p>
+            <a:pPr algn="ctr"/>
+            <a:r>
+              <a:rPr sz="1400" b="1">
+                <a:solidFill>
+                  <a:srgbClr val="AC4D33"/>
+                </a:solidFill>
+                <a:latin typeface="Calibri"/>
+              </a:rPr>
+              <a:t>GIÂY</a:t>
+            </a:r>
+          </a:p>
+          <a:p>
+            <a:pPr algn="ctr">
+              <a:spcBef>
+                <a:spcPts val="1200"/>
+              </a:spcBef>
+            </a:pPr>
+            <a:r>
+              <a:rPr sz="1250">
+                <a:solidFill>
+                  <a:srgbClr val="3A2B28"/>
+                </a:solidFill>
+                <a:latin typeface="Calibri"/>
+              </a:rPr>
+              <a:t>Đối phương hình thành đánh giá tổng thể</a:t>
+            </a:r>
+          </a:p>
+        </p:txBody>
+      </p:sp>
+      <p:sp>
+        <p:nvSpPr>
+          <p:cNvPr id="6" name="Rounded Rectangle 5"/>
+          <p:cNvSpPr/>
+          <p:nvPr/>
+        </p:nvSpPr>
+        <p:spPr>
+          <a:xfrm>
+            <a:off x="3362706" y="1783080"/>
+            <a:ext cx="2622042" cy="3429000"/>
+          </a:xfrm>
+          <a:prstGeom prst="roundRect">
+            <a:avLst>
+              <a:gd name="adj" fmla="val 7000"/>
+            </a:avLst>
+          </a:prstGeom>
+          <a:solidFill>
+            <a:srgbClr val="FFFFFF"/>
+          </a:solidFill>
+          <a:ln w="15875">
+            <a:solidFill>
+              <a:srgbClr val="FBCEC9"/>
+            </a:solidFill>
+          </a:ln>
+          <a:effectLst/>
+        </p:spPr>
+        <p:style>
+          <a:lnRef idx="1">
+            <a:schemeClr val="accent1"/>
+          </a:lnRef>
+          <a:fillRef idx="3">
+            <a:schemeClr val="accent1"/>
+          </a:fillRef>
+          <a:effectRef idx="2">
+            <a:schemeClr val="accent1"/>
+          </a:effectRef>
+          <a:fontRef idx="minor">
+            <a:schemeClr val="lt1"/>
+          </a:fontRef>
+        </p:style>
+        <p:txBody>
+          <a:bodyPr rtlCol="0" anchor="ctr" wrap="square" lIns="182880" rIns="182880" tIns="274320" bIns="182880"/>
+          <a:lstStyle/>
+          <a:p>
+            <a:pPr algn="ctr"/>
+            <a:r>
+              <a:rPr sz="5800" b="1">
+                <a:solidFill>
+                  <a:srgbClr val="DC756A"/>
+                </a:solidFill>
+                <a:latin typeface="Cambria"/>
+              </a:rPr>
+              <a:t>20</a:t>
+            </a:r>
+          </a:p>
+          <a:p>
+            <a:pPr algn="ctr"/>
+            <a:r>
+              <a:rPr sz="1400" b="1">
+                <a:solidFill>
+                  <a:srgbClr val="AC4D33"/>
+                </a:solidFill>
+                <a:latin typeface="Calibri"/>
+              </a:rPr>
+              <a:t>BƯỚC CHÂN</a:t>
+            </a:r>
+          </a:p>
+          <a:p>
+            <a:pPr algn="ctr">
+              <a:spcBef>
+                <a:spcPts val="1200"/>
+              </a:spcBef>
+            </a:pPr>
+            <a:r>
+              <a:rPr sz="1250">
+                <a:solidFill>
+                  <a:srgbClr val="3A2B28"/>
+                </a:solidFill>
+                <a:latin typeface="Calibri"/>
+              </a:rPr>
+              <a:t>Dáng đi, tư thế được đọc từ xa</a:t>
+            </a:r>
+          </a:p>
+        </p:txBody>
+      </p:sp>
+      <p:sp>
+        <p:nvSpPr>
+          <p:cNvPr id="7" name="Rounded Rectangle 6"/>
+          <p:cNvSpPr/>
+          <p:nvPr/>
+        </p:nvSpPr>
+        <p:spPr>
+          <a:xfrm>
+            <a:off x="6222492" y="1783080"/>
+            <a:ext cx="2622042" cy="3429000"/>
+          </a:xfrm>
+          <a:prstGeom prst="roundRect">
+            <a:avLst>
+              <a:gd name="adj" fmla="val 7000"/>
+            </a:avLst>
+          </a:prstGeom>
+          <a:solidFill>
+            <a:srgbClr val="FFFFFF"/>
+          </a:solidFill>
+          <a:ln w="15875">
+            <a:solidFill>
+              <a:srgbClr val="FBCEC9"/>
+            </a:solidFill>
+          </a:ln>
+          <a:effectLst/>
+        </p:spPr>
+        <p:style>
+          <a:lnRef idx="1">
+            <a:schemeClr val="accent1"/>
+          </a:lnRef>
+          <a:fillRef idx="3">
+            <a:schemeClr val="accent1"/>
+          </a:fillRef>
+          <a:effectRef idx="2">
+            <a:schemeClr val="accent1"/>
+          </a:effectRef>
+          <a:fontRef idx="minor">
+            <a:schemeClr val="lt1"/>
+          </a:fontRef>
+        </p:style>
+        <p:txBody>
+          <a:bodyPr rtlCol="0" anchor="ctr" wrap="square" lIns="182880" rIns="182880" tIns="274320" bIns="182880"/>
+          <a:lstStyle/>
+          <a:p>
+            <a:pPr algn="ctr"/>
+            <a:r>
+              <a:rPr sz="5800" b="1">
+                <a:solidFill>
+                  <a:srgbClr val="DC756A"/>
+                </a:solidFill>
+                <a:latin typeface="Cambria"/>
+              </a:rPr>
+              <a:t>20</a:t>
+            </a:r>
+          </a:p>
+          <a:p>
+            <a:pPr algn="ctr"/>
+            <a:r>
+              <a:rPr sz="1400" b="1">
+                <a:solidFill>
+                  <a:srgbClr val="AC4D33"/>
+                </a:solidFill>
+                <a:latin typeface="Calibri"/>
+              </a:rPr>
+              <a:t>CENTIMET</a:t>
+            </a:r>
+          </a:p>
+          <a:p>
+            <a:pPr algn="ctr">
+              <a:spcBef>
+                <a:spcPts val="1200"/>
+              </a:spcBef>
+            </a:pPr>
+            <a:r>
+              <a:rPr sz="1250">
+                <a:solidFill>
+                  <a:srgbClr val="3A2B28"/>
+                </a:solidFill>
+                <a:latin typeface="Calibri"/>
+              </a:rPr>
+              <a:t>Ánh mắt và nụ cười trên gương mặt</a:t>
+            </a:r>
+          </a:p>
+        </p:txBody>
+      </p:sp>
+      <p:sp>
+        <p:nvSpPr>
+          <p:cNvPr id="8" name="Rounded Rectangle 7"/>
+          <p:cNvSpPr/>
+          <p:nvPr/>
+        </p:nvSpPr>
+        <p:spPr>
+          <a:xfrm>
+            <a:off x="9082278" y="1783080"/>
+            <a:ext cx="2622042" cy="3429000"/>
+          </a:xfrm>
+          <a:prstGeom prst="roundRect">
+            <a:avLst>
+              <a:gd name="adj" fmla="val 7000"/>
+            </a:avLst>
+          </a:prstGeom>
+          <a:solidFill>
+            <a:srgbClr val="FFFFFF"/>
+          </a:solidFill>
+          <a:ln w="15875">
+            <a:solidFill>
+              <a:srgbClr val="FBCEC9"/>
+            </a:solidFill>
+          </a:ln>
+          <a:effectLst/>
+        </p:spPr>
+        <p:style>
+          <a:lnRef idx="1">
+            <a:schemeClr val="accent1"/>
+          </a:lnRef>
+          <a:fillRef idx="3">
+            <a:schemeClr val="accent1"/>
+          </a:fillRef>
+          <a:effectRef idx="2">
+            <a:schemeClr val="accent1"/>
+          </a:effectRef>
+          <a:fontRef idx="minor">
+            <a:schemeClr val="lt1"/>
+          </a:fontRef>
+        </p:style>
+        <p:txBody>
+          <a:bodyPr rtlCol="0" anchor="ctr" wrap="square" lIns="182880" rIns="182880" tIns="274320" bIns="182880"/>
+          <a:lstStyle/>
+          <a:p>
+            <a:pPr algn="ctr"/>
+            <a:r>
+              <a:rPr sz="5800" b="1">
+                <a:solidFill>
+                  <a:srgbClr val="DC756A"/>
+                </a:solidFill>
+                <a:latin typeface="Cambria"/>
+              </a:rPr>
+              <a:t>20</a:t>
+            </a:r>
+          </a:p>
+          <a:p>
+            <a:pPr algn="ctr"/>
+            <a:r>
+              <a:rPr sz="1400" b="1">
+                <a:solidFill>
+                  <a:srgbClr val="AC4D33"/>
+                </a:solidFill>
+                <a:latin typeface="Calibri"/>
+              </a:rPr>
+              <a:t>TỪ</a:t>
+            </a:r>
+          </a:p>
+          <a:p>
+            <a:pPr algn="ctr">
+              <a:spcBef>
+                <a:spcPts val="1200"/>
+              </a:spcBef>
+            </a:pPr>
+            <a:r>
+              <a:rPr sz="1250">
+                <a:solidFill>
+                  <a:srgbClr val="3A2B28"/>
+                </a:solidFill>
+                <a:latin typeface="Calibri"/>
+              </a:rPr>
+              <a:t>Lời chào và giới thiệu đầu tiên</a:t>
+            </a:r>
+          </a:p>
+        </p:txBody>
+      </p:sp>
+      <p:sp>
+        <p:nvSpPr>
+          <p:cNvPr id="9" name="Rounded Rectangle 8"/>
+          <p:cNvSpPr/>
+          <p:nvPr/>
+        </p:nvSpPr>
+        <p:spPr>
+          <a:xfrm>
+            <a:off x="502920" y="5440680"/>
+            <a:ext cx="11201400" cy="685800"/>
+          </a:xfrm>
+          <a:prstGeom prst="roundRect">
+            <a:avLst>
+              <a:gd name="adj" fmla="val 12000"/>
+            </a:avLst>
+          </a:prstGeom>
+          <a:solidFill>
+            <a:srgbClr val="FDF1EF"/>
+          </a:solidFill>
+          <a:ln w="12700">
+            <a:solidFill>
+              <a:srgbClr val="FBCEC9"/>
+            </a:solidFill>
+          </a:ln>
+          <a:effectLst/>
+        </p:spPr>
+        <p:style>
+          <a:lnRef idx="1">
+            <a:schemeClr val="accent1"/>
+          </a:lnRef>
+          <a:fillRef idx="3">
+            <a:schemeClr val="accent1"/>
+          </a:fillRef>
+          <a:effectRef idx="2">
+            <a:schemeClr val="accent1"/>
+          </a:effectRef>
+          <a:fontRef idx="minor">
+            <a:schemeClr val="lt1"/>
+          </a:fontRef>
+        </p:style>
+        <p:txBody>
+          <a:bodyPr rtlCol="0" anchor="ctr" wrap="square" lIns="201168" rIns="201168"/>
+          <a:lstStyle/>
+          <a:p>
+            <a:pPr algn="ctr"/>
+            <a:r>
+              <a:rPr sz="1300">
+                <a:solidFill>
+                  <a:srgbClr val="3A2B28"/>
+                </a:solidFill>
+                <a:latin typeface="Calibri"/>
+              </a:rPr>
+              <a:t>Ấn tượng ban đầu hình thành gần như tức thì và rất khó đảo ngược — nó phải được CHUẨN BỊ, không phó mặc cho may mắn.</a:t>
+            </a:r>
+          </a:p>
+        </p:txBody>
+      </p:sp>
+      <p:sp>
+        <p:nvSpPr>
+          <p:cNvPr id="10" name="TextBox 9"/>
+          <p:cNvSpPr txBox="1"/>
+          <p:nvPr/>
+        </p:nvSpPr>
+        <p:spPr>
+          <a:xfrm>
+            <a:off x="502920" y="6419088"/>
+            <a:ext cx="7772400" cy="292608"/>
+          </a:xfrm>
+          <a:prstGeom prst="rect">
+            <a:avLst/>
+          </a:prstGeom>
+          <a:noFill/>
+        </p:spPr>
+        <p:txBody>
+          <a:bodyPr wrap="none">
+            <a:spAutoFit/>
+          </a:bodyPr>
+          <a:lstStyle/>
+          <a:p>
+            <a:r>
+              <a:rPr sz="900">
+                <a:solidFill>
+                  <a:srgbClr val="8A7A76"/>
+                </a:solidFill>
+                <a:latin typeface="Calibri"/>
+              </a:rPr>
+              <a:t>Je m'appelle Huong  •  GV. Đỗ Thùy Hương  •  EC1103</a:t>
+            </a:r>
+          </a:p>
+        </p:txBody>
+      </p:sp>
+      <p:sp>
+        <p:nvSpPr>
+          <p:cNvPr id="11" name="TextBox 10"/>
+          <p:cNvSpPr txBox="1"/>
+          <p:nvPr/>
+        </p:nvSpPr>
+        <p:spPr>
+          <a:xfrm>
+            <a:off x="9326880" y="6419088"/>
+            <a:ext cx="1920240" cy="292608"/>
+          </a:xfrm>
+          <a:prstGeom prst="rect">
+            <a:avLst/>
+          </a:prstGeom>
+          <a:noFill/>
+        </p:spPr>
+        <p:txBody>
+          <a:bodyPr wrap="none">
+            <a:spAutoFit/>
+          </a:bodyPr>
+          <a:lstStyle/>
+          <a:p>
+            <a:pPr algn="r"/>
+            <a:r>
+              <a:rPr sz="900">
+                <a:solidFill>
+                  <a:srgbClr val="8A7A76"/>
+                </a:solidFill>
+                <a:latin typeface="Calibri"/>
+              </a:rPr>
+              <a:t>Chương 2</a:t>
+            </a:r>
+          </a:p>
+        </p:txBody>
+      </p:sp>
+    </p:spTree>
+  </p:cSld>
+  <p:clrMapOvr>
+    <a:masterClrMapping/>
+  </p:clrMapOvr>
+</p:sld>
+</file>
+
+<file path=ppt/slides/slide7.xml><?xml version="1.0" encoding="utf-8"?>
 <p:sld xmlns:a="http://schemas.openxmlformats.org/drawingml/2006/main" xmlns:r="http://schemas.openxmlformats.org/officeDocument/2006/relationships" xmlns:p="http://schemas.openxmlformats.org/presentationml/2006/main">
   <p:cSld name="Slide 5">
     <p:bg>
@@ -10875,7 +12216,7 @@
       </p:grpSpPr>
       <p:pic>
         <p:nvPicPr>
-          <p:cNvPr id="2" name="Image 0" descr="assets/logo_tron.png">    </p:cNvPr>
+          <p:cNvPr id="2" name="Image 0" descr="/home/user/comdraft/assets/img/dau-huong.png">    </p:cNvPr>
           <p:cNvPicPr>
             <a:picLocks noChangeAspect="1"/>
           </p:cNvPicPr>
@@ -11197,7 +12538,7 @@
                 <a:ea typeface="Calibri" pitchFamily="34" charset="-122"/>
                 <a:cs typeface="Calibri" pitchFamily="34" charset="-120"/>
               </a:rPr>
-              <a:t>Người nhỏ chào người lớn, nhân viên chào cấp trên trước; giới thiệu người ít quan trọng với người quan trọng hơn; nói rõ tên – chức danh – đơn vị.</a:t>
+              <a:t>Người nhỏ chào trước; giới thiệu người ít quan trọng với người quan trọng hơn</a:t>
             </a:r>
             <a:endParaRPr lang="en-US" sz="1500" dirty="0"/>
           </a:p>
@@ -11284,7 +12625,7 @@
                 <a:ea typeface="Calibri" pitchFamily="34" charset="-122"/>
                 <a:cs typeface="Calibri" pitchFamily="34" charset="-120"/>
               </a:rPr>
-              <a:t>Đứng dậy, nhìn vào mắt, siết vừa phải 2–3 giây; người có vị thế cao hơn hoặc phụ nữ chủ động đưa tay trước; không bắt quá lỏng, quá chặt, quá lâu.</a:t>
+              <a:t>Đứng dậy, nhìn vào mắt, siết vừa phải 2–3 giây</a:t>
             </a:r>
             <a:endParaRPr lang="en-US" sz="1500" dirty="0"/>
           </a:p>
@@ -11371,7 +12712,7 @@
                 <a:ea typeface="Calibri" pitchFamily="34" charset="-122"/>
                 <a:cs typeface="Calibri" pitchFamily="34" charset="-120"/>
               </a:rPr>
-              <a:t>Trao bằng hai tay, mặt chữ hướng về người nhận; nhận bằng hai tay, đọc qua rồi mới cất — đừng nhét ngay vào túi quần.</a:t>
+              <a:t>Hai tay, mặt chữ hướng người nhận; đọc qua rồi mới cất</a:t>
             </a:r>
             <a:endParaRPr lang="en-US" sz="1500" dirty="0"/>
           </a:p>
@@ -11458,7 +12799,7 @@
                 <a:ea typeface="Calibri" pitchFamily="34" charset="-122"/>
                 <a:cs typeface="Calibri" pitchFamily="34" charset="-120"/>
               </a:rPr>
-              <a:t>Thang máy, phòng họp, bàn làm việc mở: giữ trật tự, nhường lối, gõ cửa trước khi vào, không nói to chuyện riêng.</a:t>
+              <a:t>Giữ trật tự, nhường lối, gõ cửa trước khi vào</a:t>
             </a:r>
             <a:endParaRPr lang="en-US" sz="1500" dirty="0"/>
           </a:p>
@@ -11472,7 +12813,328 @@
 </p:sld>
 </file>
 
-<file path=ppt/slides/slide6.xml><?xml version="1.0" encoding="utf-8"?>
+<file path=ppt/slides/slide8.xml><?xml version="1.0" encoding="utf-8"?>
+<p:sld xmlns:a="http://schemas.openxmlformats.org/drawingml/2006/main" xmlns:p="http://schemas.openxmlformats.org/presentationml/2006/main" xmlns:r="http://schemas.openxmlformats.org/officeDocument/2006/relationships">
+  <p:cSld>
+    <p:spTree>
+      <p:nvGrpSpPr>
+        <p:cNvPr id="1" name=""/>
+        <p:cNvGrpSpPr/>
+        <p:nvPr/>
+      </p:nvGrpSpPr>
+      <p:grpSpPr/>
+      <p:sp>
+        <p:nvSpPr>
+          <p:cNvPr id="2" name="Rectangle 1"/>
+          <p:cNvSpPr/>
+          <p:nvPr/>
+        </p:nvSpPr>
+        <p:spPr>
+          <a:xfrm>
+            <a:off x="0" y="0"/>
+            <a:ext cx="12191695" cy="6858000"/>
+          </a:xfrm>
+          <a:prstGeom prst="rect">
+            <a:avLst/>
+          </a:prstGeom>
+          <a:solidFill>
+            <a:srgbClr val="FDFBF8"/>
+          </a:solidFill>
+          <a:ln>
+            <a:noFill/>
+          </a:ln>
+          <a:effectLst/>
+        </p:spPr>
+        <p:style>
+          <a:lnRef idx="1">
+            <a:schemeClr val="accent1"/>
+          </a:lnRef>
+          <a:fillRef idx="3">
+            <a:schemeClr val="accent1"/>
+          </a:fillRef>
+          <a:effectRef idx="2">
+            <a:schemeClr val="accent1"/>
+          </a:effectRef>
+          <a:fontRef idx="minor">
+            <a:schemeClr val="lt1"/>
+          </a:fontRef>
+        </p:style>
+        <p:txBody>
+          <a:bodyPr rtlCol="0" anchor="ctr"/>
+          <a:lstStyle/>
+          <a:p>
+            <a:pPr algn="ctr"/>
+          </a:p>
+        </p:txBody>
+      </p:sp>
+      <p:sp>
+        <p:nvSpPr>
+          <p:cNvPr id="3" name="Rectangle 2"/>
+          <p:cNvSpPr/>
+          <p:nvPr/>
+        </p:nvSpPr>
+        <p:spPr>
+          <a:xfrm>
+            <a:off x="0" y="2103120"/>
+            <a:ext cx="12191695" cy="2743200"/>
+          </a:xfrm>
+          <a:prstGeom prst="rect">
+            <a:avLst/>
+          </a:prstGeom>
+          <a:solidFill>
+            <a:srgbClr val="FDF1EF"/>
+          </a:solidFill>
+          <a:ln>
+            <a:noFill/>
+          </a:ln>
+          <a:effectLst/>
+        </p:spPr>
+        <p:style>
+          <a:lnRef idx="1">
+            <a:schemeClr val="accent1"/>
+          </a:lnRef>
+          <a:fillRef idx="3">
+            <a:schemeClr val="accent1"/>
+          </a:fillRef>
+          <a:effectRef idx="2">
+            <a:schemeClr val="accent1"/>
+          </a:effectRef>
+          <a:fontRef idx="minor">
+            <a:schemeClr val="lt1"/>
+          </a:fontRef>
+        </p:style>
+        <p:txBody>
+          <a:bodyPr rtlCol="0" anchor="ctr"/>
+          <a:lstStyle/>
+          <a:p>
+            <a:pPr algn="ctr"/>
+          </a:p>
+        </p:txBody>
+      </p:sp>
+      <p:sp>
+        <p:nvSpPr>
+          <p:cNvPr id="4" name="Rectangle 3"/>
+          <p:cNvSpPr/>
+          <p:nvPr/>
+        </p:nvSpPr>
+        <p:spPr>
+          <a:xfrm>
+            <a:off x="0" y="0"/>
+            <a:ext cx="274320" cy="6858000"/>
+          </a:xfrm>
+          <a:prstGeom prst="rect">
+            <a:avLst/>
+          </a:prstGeom>
+          <a:solidFill>
+            <a:srgbClr val="DC756A"/>
+          </a:solidFill>
+          <a:ln>
+            <a:noFill/>
+          </a:ln>
+          <a:effectLst/>
+        </p:spPr>
+        <p:style>
+          <a:lnRef idx="1">
+            <a:schemeClr val="accent1"/>
+          </a:lnRef>
+          <a:fillRef idx="3">
+            <a:schemeClr val="accent1"/>
+          </a:fillRef>
+          <a:effectRef idx="2">
+            <a:schemeClr val="accent1"/>
+          </a:effectRef>
+          <a:fontRef idx="minor">
+            <a:schemeClr val="lt1"/>
+          </a:fontRef>
+        </p:style>
+        <p:txBody>
+          <a:bodyPr rtlCol="0" anchor="ctr"/>
+          <a:lstStyle/>
+          <a:p>
+            <a:pPr algn="ctr"/>
+          </a:p>
+        </p:txBody>
+      </p:sp>
+      <p:sp>
+        <p:nvSpPr>
+          <p:cNvPr id="5" name="TextBox 4"/>
+          <p:cNvSpPr txBox="1"/>
+          <p:nvPr/>
+        </p:nvSpPr>
+        <p:spPr>
+          <a:xfrm>
+            <a:off x="1280160" y="2377440"/>
+            <a:ext cx="9692640" cy="411480"/>
+          </a:xfrm>
+          <a:prstGeom prst="rect">
+            <a:avLst/>
+          </a:prstGeom>
+          <a:noFill/>
+        </p:spPr>
+        <p:txBody>
+          <a:bodyPr wrap="none">
+            <a:spAutoFit/>
+          </a:bodyPr>
+          <a:lstStyle/>
+          <a:p>
+            <a:r>
+              <a:rPr sz="1500" b="1">
+                <a:solidFill>
+                  <a:srgbClr val="DC756A"/>
+                </a:solidFill>
+                <a:latin typeface="Calibri"/>
+              </a:rPr>
+              <a:t>MỤC 2.2</a:t>
+            </a:r>
+          </a:p>
+        </p:txBody>
+      </p:sp>
+      <p:sp>
+        <p:nvSpPr>
+          <p:cNvPr id="6" name="TextBox 5"/>
+          <p:cNvSpPr txBox="1"/>
+          <p:nvPr/>
+        </p:nvSpPr>
+        <p:spPr>
+          <a:xfrm>
+            <a:off x="1280160" y="2788920"/>
+            <a:ext cx="9601200" cy="1371600"/>
+          </a:xfrm>
+          <a:prstGeom prst="rect">
+            <a:avLst/>
+          </a:prstGeom>
+          <a:noFill/>
+        </p:spPr>
+        <p:txBody>
+          <a:bodyPr wrap="square">
+            <a:spAutoFit/>
+          </a:bodyPr>
+          <a:lstStyle/>
+          <a:p>
+            <a:r>
+              <a:rPr sz="3800" b="1">
+                <a:solidFill>
+                  <a:srgbClr val="AC4D33"/>
+                </a:solidFill>
+                <a:latin typeface="Cambria"/>
+              </a:rPr>
+              <a:t>Kỹ năng thuyết trình</a:t>
+            </a:r>
+          </a:p>
+        </p:txBody>
+      </p:sp>
+      <p:sp>
+        <p:nvSpPr>
+          <p:cNvPr id="7" name="TextBox 6"/>
+          <p:cNvSpPr txBox="1"/>
+          <p:nvPr/>
+        </p:nvSpPr>
+        <p:spPr>
+          <a:xfrm>
+            <a:off x="1280160" y="4224528"/>
+            <a:ext cx="9418320" cy="640080"/>
+          </a:xfrm>
+          <a:prstGeom prst="rect">
+            <a:avLst/>
+          </a:prstGeom>
+          <a:noFill/>
+        </p:spPr>
+        <p:txBody>
+          <a:bodyPr wrap="square">
+            <a:spAutoFit/>
+          </a:bodyPr>
+          <a:lstStyle/>
+          <a:p>
+            <a:r>
+              <a:rPr sz="1450" i="1">
+                <a:solidFill>
+                  <a:srgbClr val="8A7A76"/>
+                </a:solidFill>
+                <a:latin typeface="Calibri"/>
+              </a:rPr>
+              <a:t>Từ chuẩn bị đến trình bày: làm sao để người nghe nhớ được điều bạn muốn nói.</a:t>
+            </a:r>
+          </a:p>
+        </p:txBody>
+      </p:sp>
+      <p:sp>
+        <p:nvSpPr>
+          <p:cNvPr id="8" name="TextBox 7"/>
+          <p:cNvSpPr txBox="1"/>
+          <p:nvPr/>
+        </p:nvSpPr>
+        <p:spPr>
+          <a:xfrm>
+            <a:off x="502920" y="6419088"/>
+            <a:ext cx="7772400" cy="292608"/>
+          </a:xfrm>
+          <a:prstGeom prst="rect">
+            <a:avLst/>
+          </a:prstGeom>
+          <a:noFill/>
+        </p:spPr>
+        <p:txBody>
+          <a:bodyPr wrap="none">
+            <a:spAutoFit/>
+          </a:bodyPr>
+          <a:lstStyle/>
+          <a:p>
+            <a:r>
+              <a:rPr sz="900">
+                <a:solidFill>
+                  <a:srgbClr val="8A7A76"/>
+                </a:solidFill>
+                <a:latin typeface="Calibri"/>
+              </a:rPr>
+              <a:t>Je m'appelle Huong  •  GV. Đỗ Thùy Hương  •  EC1103</a:t>
+            </a:r>
+          </a:p>
+        </p:txBody>
+      </p:sp>
+      <p:sp>
+        <p:nvSpPr>
+          <p:cNvPr id="9" name="TextBox 8"/>
+          <p:cNvSpPr txBox="1"/>
+          <p:nvPr/>
+        </p:nvSpPr>
+        <p:spPr>
+          <a:xfrm>
+            <a:off x="9326880" y="6419088"/>
+            <a:ext cx="1920240" cy="292608"/>
+          </a:xfrm>
+          <a:prstGeom prst="rect">
+            <a:avLst/>
+          </a:prstGeom>
+          <a:noFill/>
+        </p:spPr>
+        <p:txBody>
+          <a:bodyPr wrap="none">
+            <a:spAutoFit/>
+          </a:bodyPr>
+          <a:lstStyle/>
+          <a:p>
+            <a:pPr algn="r"/>
+            <a:r>
+              <a:rPr sz="900">
+                <a:solidFill>
+                  <a:srgbClr val="8A7A76"/>
+                </a:solidFill>
+                <a:latin typeface="Calibri"/>
+              </a:rPr>
+              <a:t>Chương 2</a:t>
+            </a:r>
+          </a:p>
+        </p:txBody>
+      </p:sp>
+    </p:spTree>
+  </p:cSld>
+  <p:clrMapOvr>
+    <a:masterClrMapping/>
+  </p:clrMapOvr>
+</p:sld>
+</file>
+
+<file path=ppt/slides/slide9.xml><?xml version="1.0" encoding="utf-8"?>
 <p:sld xmlns:a="http://schemas.openxmlformats.org/drawingml/2006/main" xmlns:r="http://schemas.openxmlformats.org/officeDocument/2006/relationships" xmlns:p="http://schemas.openxmlformats.org/presentationml/2006/main">
   <p:cSld name="Slide 6">
     <p:bg>
@@ -11498,7 +13160,7 @@
       </p:grpSpPr>
       <p:pic>
         <p:nvPicPr>
-          <p:cNvPr id="2" name="Image 0" descr="assets/logo_tron.png">    </p:cNvPr>
+          <p:cNvPr id="2" name="Image 0" descr="/home/user/comdraft/assets/img/dau-huong.png">    </p:cNvPr>
           <p:cNvPicPr>
             <a:picLocks noChangeAspect="1"/>
           </p:cNvPicPr>
@@ -12313,1464 +13975,6 @@
           </a:p>
         </p:txBody>
       </p:sp>
-    </p:spTree>
-  </p:cSld>
-  <p:clrMapOvr>
-    <a:masterClrMapping/>
-  </p:clrMapOvr>
-</p:sld>
-</file>
-
-<file path=ppt/slides/slide7.xml><?xml version="1.0" encoding="utf-8"?>
-<p:sld xmlns:a="http://schemas.openxmlformats.org/drawingml/2006/main" xmlns:r="http://schemas.openxmlformats.org/officeDocument/2006/relationships" xmlns:p="http://schemas.openxmlformats.org/presentationml/2006/main">
-  <p:cSld name="Slide 7">
-    <p:bg>
-      <p:bgPr>
-        <a:solidFill>
-          <a:srgbClr val="FDFBF8"/>
-        </a:solidFill>
-      </p:bgPr>
-    </p:bg>
-    <p:spTree>
-      <p:nvGrpSpPr>
-        <p:cNvPr id="1" name=""/>
-        <p:cNvGrpSpPr/>
-        <p:nvPr/>
-      </p:nvGrpSpPr>
-      <p:grpSpPr>
-        <a:xfrm>
-          <a:off x="0" y="0"/>
-          <a:ext cx="0" cy="0"/>
-          <a:chOff x="0" y="0"/>
-          <a:chExt cx="0" cy="0"/>
-        </a:xfrm>
-      </p:grpSpPr>
-      <p:pic>
-        <p:nvPicPr>
-          <p:cNvPr id="2" name="Image 0" descr="assets/logo_tron.png">    </p:cNvPr>
-          <p:cNvPicPr>
-            <a:picLocks noChangeAspect="1"/>
-          </p:cNvPicPr>
-          <p:nvPr/>
-        </p:nvPicPr>
-        <p:blipFill>
-          <a:blip r:embed="rId1"/>
-          <a:stretch>
-            <a:fillRect/>
-          </a:stretch>
-        </p:blipFill>
-        <p:spPr>
-          <a:xfrm>
-            <a:off x="411480" y="6327648"/>
-            <a:ext cx="384048" cy="384048"/>
-          </a:xfrm>
-          <a:prstGeom prst="rect">
-            <a:avLst/>
-          </a:prstGeom>
-        </p:spPr>
-      </p:pic>
-      <p:sp>
-        <p:nvSpPr>
-          <p:cNvPr id="3" name="Text 0"/>
-          <p:cNvSpPr/>
-          <p:nvPr/>
-        </p:nvSpPr>
-        <p:spPr>
-          <a:xfrm>
-            <a:off x="868680" y="6355080"/>
-            <a:ext cx="7498080" cy="310896"/>
-          </a:xfrm>
-          <a:prstGeom prst="rect">
-            <a:avLst/>
-          </a:prstGeom>
-          <a:noFill/>
-          <a:ln/>
-        </p:spPr>
-        <p:txBody>
-          <a:bodyPr wrap="square" lIns="0" tIns="0" rIns="0" bIns="0" rtlCol="0" anchor="ctr"/>
-          <a:lstStyle/>
-          <a:p>
-            <a:pPr indent="0" marL="0">
-              <a:buNone/>
-            </a:pPr>
-            <a:r>
-              <a:rPr lang="en-US" sz="900" dirty="0">
-                <a:solidFill>
-                  <a:srgbClr val="8A7A76"/>
-                </a:solidFill>
-                <a:latin typeface="Calibri" pitchFamily="34" charset="0"/>
-                <a:ea typeface="Calibri" pitchFamily="34" charset="-122"/>
-                <a:cs typeface="Calibri" pitchFamily="34" charset="-120"/>
-              </a:rPr>
-              <a:t>Je m'appelle Huong  •  GV. Đỗ Thùy Hương  •  EC1103</a:t>
-            </a:r>
-            <a:endParaRPr lang="en-US" sz="900" dirty="0"/>
-          </a:p>
-        </p:txBody>
-      </p:sp>
-      <p:sp>
-        <p:nvSpPr>
-          <p:cNvPr id="4" name="Text 1"/>
-          <p:cNvSpPr/>
-          <p:nvPr/>
-        </p:nvSpPr>
-        <p:spPr>
-          <a:xfrm>
-            <a:off x="8503920" y="6355080"/>
-            <a:ext cx="2743200" cy="310896"/>
-          </a:xfrm>
-          <a:prstGeom prst="rect">
-            <a:avLst/>
-          </a:prstGeom>
-          <a:noFill/>
-          <a:ln/>
-        </p:spPr>
-        <p:txBody>
-          <a:bodyPr wrap="square" lIns="0" tIns="0" rIns="0" bIns="0" rtlCol="0" anchor="ctr"/>
-          <a:lstStyle/>
-          <a:p>
-            <a:pPr algn="r" indent="0" marL="0">
-              <a:buNone/>
-            </a:pPr>
-            <a:r>
-              <a:rPr lang="en-US" sz="900" dirty="0">
-                <a:solidFill>
-                  <a:srgbClr val="8A7A76"/>
-                </a:solidFill>
-                <a:latin typeface="Calibri" pitchFamily="34" charset="0"/>
-                <a:ea typeface="Calibri" pitchFamily="34" charset="-122"/>
-                <a:cs typeface="Calibri" pitchFamily="34" charset="-120"/>
-              </a:rPr>
-              <a:t>Chương 2</a:t>
-            </a:r>
-            <a:endParaRPr lang="en-US" sz="900" dirty="0"/>
-          </a:p>
-        </p:txBody>
-      </p:sp>
-      <p:sp>
-        <p:nvSpPr>
-          <p:cNvPr id="5" name="Shape 2"/>
-          <p:cNvSpPr/>
-          <p:nvPr/>
-        </p:nvSpPr>
-        <p:spPr>
-          <a:xfrm>
-            <a:off x="11430000" y="6327648"/>
-            <a:ext cx="365760" cy="365760"/>
-          </a:xfrm>
-          <a:prstGeom prst="ellipse">
-            <a:avLst/>
-          </a:prstGeom>
-          <a:solidFill>
-            <a:srgbClr val="DC756A"/>
-          </a:solidFill>
-          <a:ln/>
-        </p:spPr>
-        <p:txBody>
-          <a:bodyPr/>
-          <a:p/>
-        </p:txBody>
-      </p:sp>
-      <p:sp>
-        <p:nvSpPr>
-          <p:cNvPr id="6" name="Text 3"/>
-          <p:cNvSpPr/>
-          <p:nvPr/>
-        </p:nvSpPr>
-        <p:spPr>
-          <a:xfrm>
-            <a:off x="11430000" y="6327648"/>
-            <a:ext cx="365760" cy="365760"/>
-          </a:xfrm>
-          <a:prstGeom prst="rect">
-            <a:avLst/>
-          </a:prstGeom>
-          <a:noFill/>
-          <a:ln/>
-        </p:spPr>
-        <p:txBody>
-          <a:bodyPr wrap="square" lIns="0" tIns="0" rIns="0" bIns="0" rtlCol="0" anchor="ctr"/>
-          <a:lstStyle/>
-          <a:p>
-            <a:pPr algn="ctr" indent="0" marL="0">
-              <a:buNone/>
-            </a:pPr>
-            <a:r>
-              <a:rPr lang="en-US" sz="1000" b="1" dirty="0">
-                <a:solidFill>
-                  <a:srgbClr val="FFFFFF"/>
-                </a:solidFill>
-                <a:latin typeface="Calibri" pitchFamily="34" charset="0"/>
-                <a:ea typeface="Calibri" pitchFamily="34" charset="-122"/>
-                <a:cs typeface="Calibri" pitchFamily="34" charset="-120"/>
-              </a:rPr>
-              <a:t>7</a:t>
-            </a:r>
-            <a:endParaRPr lang="en-US" sz="1000" dirty="0"/>
-          </a:p>
-        </p:txBody>
-      </p:sp>
-      <p:sp>
-        <p:nvSpPr>
-          <p:cNvPr id="7" name="Text 4"/>
-          <p:cNvSpPr/>
-          <p:nvPr/>
-        </p:nvSpPr>
-        <p:spPr>
-          <a:xfrm>
-            <a:off x="502920" y="310896"/>
-            <a:ext cx="11155680" cy="274320"/>
-          </a:xfrm>
-          <a:prstGeom prst="rect">
-            <a:avLst/>
-          </a:prstGeom>
-          <a:noFill/>
-          <a:ln/>
-        </p:spPr>
-        <p:txBody>
-          <a:bodyPr wrap="square" lIns="0" tIns="0" rIns="0" bIns="0" rtlCol="0" anchor="ctr"/>
-          <a:lstStyle/>
-          <a:p>
-            <a:pPr indent="0" marL="0">
-              <a:buNone/>
-            </a:pPr>
-            <a:r>
-              <a:rPr lang="en-US" sz="1100" b="1" spc="300" kern="0" dirty="0">
-                <a:solidFill>
-                  <a:srgbClr val="DC756A"/>
-                </a:solidFill>
-                <a:latin typeface="Calibri" pitchFamily="34" charset="0"/>
-                <a:ea typeface="Calibri" pitchFamily="34" charset="-122"/>
-                <a:cs typeface="Calibri" pitchFamily="34" charset="-120"/>
-              </a:rPr>
-              <a:t>2.2</a:t>
-            </a:r>
-            <a:endParaRPr lang="en-US" sz="1100" dirty="0"/>
-          </a:p>
-        </p:txBody>
-      </p:sp>
-      <p:sp>
-        <p:nvSpPr>
-          <p:cNvPr id="8" name="Text 5"/>
-          <p:cNvSpPr/>
-          <p:nvPr/>
-        </p:nvSpPr>
-        <p:spPr>
-          <a:xfrm>
-            <a:off x="502920" y="576072"/>
-            <a:ext cx="11155680" cy="713232"/>
-          </a:xfrm>
-          <a:prstGeom prst="rect">
-            <a:avLst/>
-          </a:prstGeom>
-          <a:noFill/>
-          <a:ln/>
-        </p:spPr>
-        <p:txBody>
-          <a:bodyPr wrap="square" lIns="0" tIns="0" rIns="0" bIns="0" rtlCol="0" anchor="ctr"/>
-          <a:lstStyle/>
-          <a:p>
-            <a:pPr indent="0" marL="0">
-              <a:buNone/>
-            </a:pPr>
-            <a:r>
-              <a:rPr lang="en-US" sz="2700" b="1" dirty="0">
-                <a:solidFill>
-                  <a:srgbClr val="AC4D33"/>
-                </a:solidFill>
-                <a:latin typeface="Cambria" pitchFamily="34" charset="0"/>
-                <a:ea typeface="Cambria" pitchFamily="34" charset="-122"/>
-                <a:cs typeface="Cambria" pitchFamily="34" charset="-120"/>
-              </a:rPr>
-              <a:t>Cấu trúc bài thuyết trình</a:t>
-            </a:r>
-            <a:endParaRPr lang="en-US" sz="2700" dirty="0"/>
-          </a:p>
-        </p:txBody>
-      </p:sp>
-      <p:sp>
-        <p:nvSpPr>
-          <p:cNvPr id="9" name="Shape 6"/>
-          <p:cNvSpPr/>
-          <p:nvPr/>
-        </p:nvSpPr>
-        <p:spPr>
-          <a:xfrm>
-            <a:off x="502920" y="1417320"/>
-            <a:ext cx="11201400" cy="1490472"/>
-          </a:xfrm>
-          <a:prstGeom prst="roundRect">
-            <a:avLst>
-              <a:gd name="adj" fmla="val 5521"/>
-            </a:avLst>
-          </a:prstGeom>
-          <a:solidFill>
-            <a:srgbClr val="FDF1EF"/>
-          </a:solidFill>
-          <a:ln w="15875">
-            <a:solidFill>
-              <a:srgbClr val="FBCEC9"/>
-            </a:solidFill>
-            <a:prstDash val="solid"/>
-          </a:ln>
-        </p:spPr>
-        <p:txBody>
-          <a:bodyPr/>
-          <a:p/>
-        </p:txBody>
-      </p:sp>
-      <p:sp>
-        <p:nvSpPr>
-          <p:cNvPr id="10" name="Text 7"/>
-          <p:cNvSpPr/>
-          <p:nvPr/>
-        </p:nvSpPr>
-        <p:spPr>
-          <a:xfrm>
-            <a:off x="722376" y="1472184"/>
-            <a:ext cx="10762488" cy="1380744"/>
-          </a:xfrm>
-          <a:prstGeom prst="rect">
-            <a:avLst/>
-          </a:prstGeom>
-          <a:noFill/>
-          <a:ln/>
-        </p:spPr>
-        <p:txBody>
-          <a:bodyPr wrap="square" lIns="0" tIns="0" rIns="0" bIns="0" rtlCol="0" anchor="ctr"/>
-          <a:lstStyle/>
-          <a:p>
-            <a:pPr indent="0" marL="0">
-              <a:buNone/>
-            </a:pPr>
-            <a:r>
-              <a:rPr lang="en-US" sz="1500" b="1" dirty="0">
-                <a:solidFill>
-                  <a:srgbClr val="AC4D33"/>
-                </a:solidFill>
-                <a:latin typeface="Calibri" pitchFamily="34" charset="0"/>
-                <a:ea typeface="Calibri" pitchFamily="34" charset="-122"/>
-                <a:cs typeface="Calibri" pitchFamily="34" charset="-120"/>
-              </a:rPr>
-              <a:t>Mở đầu (10–15%) — giành lấy sự chú ý</a:t>
-            </a:r>
-            <a:endParaRPr lang="en-US" sz="1500" dirty="0"/>
-          </a:p>
-          <a:p>
-            <a:pPr indent="0" marL="0">
-              <a:buNone/>
-            </a:pPr>
-            <a:r>
-              <a:rPr lang="en-US" sz="1300" dirty="0">
-                <a:solidFill>
-                  <a:srgbClr val="3A2B28"/>
-                </a:solidFill>
-                <a:latin typeface="Calibri" pitchFamily="34" charset="0"/>
-                <a:ea typeface="Calibri" pitchFamily="34" charset="-122"/>
-                <a:cs typeface="Calibri" pitchFamily="34" charset="-120"/>
-              </a:rPr>
-              <a:t>Câu hỏi gây tò mò, con số ấn tượng, câu chuyện ngắn; giới thiệu bản thân và cho người nghe biết lộ trình bài nói.</a:t>
-            </a:r>
-            <a:endParaRPr lang="en-US" sz="1500" dirty="0"/>
-          </a:p>
-        </p:txBody>
-      </p:sp>
-      <p:sp>
-        <p:nvSpPr>
-          <p:cNvPr id="11" name="Shape 8"/>
-          <p:cNvSpPr/>
-          <p:nvPr/>
-        </p:nvSpPr>
-        <p:spPr>
-          <a:xfrm>
-            <a:off x="502920" y="3072384"/>
-            <a:ext cx="11201400" cy="1490472"/>
-          </a:xfrm>
-          <a:prstGeom prst="roundRect">
-            <a:avLst>
-              <a:gd name="adj" fmla="val 5521"/>
-            </a:avLst>
-          </a:prstGeom>
-          <a:solidFill>
-            <a:srgbClr val="FDF1EF"/>
-          </a:solidFill>
-          <a:ln w="15875">
-            <a:solidFill>
-              <a:srgbClr val="FBCEC9"/>
-            </a:solidFill>
-            <a:prstDash val="solid"/>
-          </a:ln>
-        </p:spPr>
-        <p:txBody>
-          <a:bodyPr/>
-          <a:p/>
-        </p:txBody>
-      </p:sp>
-      <p:sp>
-        <p:nvSpPr>
-          <p:cNvPr id="12" name="Text 9"/>
-          <p:cNvSpPr/>
-          <p:nvPr/>
-        </p:nvSpPr>
-        <p:spPr>
-          <a:xfrm>
-            <a:off x="722376" y="3127248"/>
-            <a:ext cx="10762488" cy="1380744"/>
-          </a:xfrm>
-          <a:prstGeom prst="rect">
-            <a:avLst/>
-          </a:prstGeom>
-          <a:noFill/>
-          <a:ln/>
-        </p:spPr>
-        <p:txBody>
-          <a:bodyPr wrap="square" lIns="0" tIns="0" rIns="0" bIns="0" rtlCol="0" anchor="ctr"/>
-          <a:lstStyle/>
-          <a:p>
-            <a:pPr indent="0" marL="0">
-              <a:buNone/>
-            </a:pPr>
-            <a:r>
-              <a:rPr lang="en-US" sz="1500" b="1" dirty="0">
-                <a:solidFill>
-                  <a:srgbClr val="AC4D33"/>
-                </a:solidFill>
-                <a:latin typeface="Calibri" pitchFamily="34" charset="0"/>
-                <a:ea typeface="Calibri" pitchFamily="34" charset="-122"/>
-                <a:cs typeface="Calibri" pitchFamily="34" charset="-120"/>
-              </a:rPr>
-              <a:t>Thân bài (70–80%) — tối đa 3 ý chính</a:t>
-            </a:r>
-            <a:endParaRPr lang="en-US" sz="1500" dirty="0"/>
-          </a:p>
-          <a:p>
-            <a:pPr indent="0" marL="0">
-              <a:buNone/>
-            </a:pPr>
-            <a:r>
-              <a:rPr lang="en-US" sz="1300" dirty="0">
-                <a:solidFill>
-                  <a:srgbClr val="3A2B28"/>
-                </a:solidFill>
-                <a:latin typeface="Calibri" pitchFamily="34" charset="0"/>
-                <a:ea typeface="Calibri" pitchFamily="34" charset="-122"/>
-                <a:cs typeface="Calibri" pitchFamily="34" charset="-120"/>
-              </a:rPr>
-              <a:t>Mỗi ý: luận điểm → dẫn chứng → ví dụ; có câu chuyển ý rõ ràng; đặt ý mạnh nhất ở đầu hoặc cuối.</a:t>
-            </a:r>
-            <a:endParaRPr lang="en-US" sz="1500" dirty="0"/>
-          </a:p>
-        </p:txBody>
-      </p:sp>
-      <p:sp>
-        <p:nvSpPr>
-          <p:cNvPr id="13" name="Shape 10"/>
-          <p:cNvSpPr/>
-          <p:nvPr/>
-        </p:nvSpPr>
-        <p:spPr>
-          <a:xfrm>
-            <a:off x="502920" y="4727448"/>
-            <a:ext cx="11201400" cy="1490472"/>
-          </a:xfrm>
-          <a:prstGeom prst="roundRect">
-            <a:avLst>
-              <a:gd name="adj" fmla="val 5521"/>
-            </a:avLst>
-          </a:prstGeom>
-          <a:solidFill>
-            <a:srgbClr val="FDF1EF"/>
-          </a:solidFill>
-          <a:ln w="15875">
-            <a:solidFill>
-              <a:srgbClr val="FBCEC9"/>
-            </a:solidFill>
-            <a:prstDash val="solid"/>
-          </a:ln>
-        </p:spPr>
-        <p:txBody>
-          <a:bodyPr/>
-          <a:p/>
-        </p:txBody>
-      </p:sp>
-      <p:sp>
-        <p:nvSpPr>
-          <p:cNvPr id="14" name="Text 11"/>
-          <p:cNvSpPr/>
-          <p:nvPr/>
-        </p:nvSpPr>
-        <p:spPr>
-          <a:xfrm>
-            <a:off x="722376" y="4782312"/>
-            <a:ext cx="10762488" cy="1380744"/>
-          </a:xfrm>
-          <a:prstGeom prst="rect">
-            <a:avLst/>
-          </a:prstGeom>
-          <a:noFill/>
-          <a:ln/>
-        </p:spPr>
-        <p:txBody>
-          <a:bodyPr wrap="square" lIns="0" tIns="0" rIns="0" bIns="0" rtlCol="0" anchor="ctr"/>
-          <a:lstStyle/>
-          <a:p>
-            <a:pPr indent="0" marL="0">
-              <a:buNone/>
-            </a:pPr>
-            <a:r>
-              <a:rPr lang="en-US" sz="1500" b="1" dirty="0">
-                <a:solidFill>
-                  <a:srgbClr val="AC4D33"/>
-                </a:solidFill>
-                <a:latin typeface="Calibri" pitchFamily="34" charset="0"/>
-                <a:ea typeface="Calibri" pitchFamily="34" charset="-122"/>
-                <a:cs typeface="Calibri" pitchFamily="34" charset="-120"/>
-              </a:rPr>
-              <a:t>Kết luận (10–15%) — đọng lại một điều</a:t>
-            </a:r>
-            <a:endParaRPr lang="en-US" sz="1500" dirty="0"/>
-          </a:p>
-          <a:p>
-            <a:pPr indent="0" marL="0">
-              <a:buNone/>
-            </a:pPr>
-            <a:r>
-              <a:rPr lang="en-US" sz="1300" dirty="0">
-                <a:solidFill>
-                  <a:srgbClr val="3A2B28"/>
-                </a:solidFill>
-                <a:latin typeface="Calibri" pitchFamily="34" charset="0"/>
-                <a:ea typeface="Calibri" pitchFamily="34" charset="-122"/>
-                <a:cs typeface="Calibri" pitchFamily="34" charset="-120"/>
-              </a:rPr>
-              <a:t>Tóm tắt 3 ý, nhấn thông điệp cốt lõi, kêu gọi hành động cụ thể; chuẩn bị sẵn phần hỏi – đáp.</a:t>
-            </a:r>
-            <a:endParaRPr lang="en-US" sz="1500" dirty="0"/>
-          </a:p>
-        </p:txBody>
-      </p:sp>
-    </p:spTree>
-  </p:cSld>
-  <p:clrMapOvr>
-    <a:masterClrMapping/>
-  </p:clrMapOvr>
-</p:sld>
-</file>
-
-<file path=ppt/slides/slide8.xml><?xml version="1.0" encoding="utf-8"?>
-<p:sld xmlns:a="http://schemas.openxmlformats.org/drawingml/2006/main" xmlns:r="http://schemas.openxmlformats.org/officeDocument/2006/relationships" xmlns:p="http://schemas.openxmlformats.org/presentationml/2006/main">
-  <p:cSld name="Slide 8">
-    <p:bg>
-      <p:bgPr>
-        <a:solidFill>
-          <a:srgbClr val="FDFBF8"/>
-        </a:solidFill>
-      </p:bgPr>
-    </p:bg>
-    <p:spTree>
-      <p:nvGrpSpPr>
-        <p:cNvPr id="1" name=""/>
-        <p:cNvGrpSpPr/>
-        <p:nvPr/>
-      </p:nvGrpSpPr>
-      <p:grpSpPr>
-        <a:xfrm>
-          <a:off x="0" y="0"/>
-          <a:ext cx="0" cy="0"/>
-          <a:chOff x="0" y="0"/>
-          <a:chExt cx="0" cy="0"/>
-        </a:xfrm>
-      </p:grpSpPr>
-      <p:pic>
-        <p:nvPicPr>
-          <p:cNvPr id="2" name="Image 0" descr="assets/logo_tron.png">    </p:cNvPr>
-          <p:cNvPicPr>
-            <a:picLocks noChangeAspect="1"/>
-          </p:cNvPicPr>
-          <p:nvPr/>
-        </p:nvPicPr>
-        <p:blipFill>
-          <a:blip r:embed="rId1"/>
-          <a:stretch>
-            <a:fillRect/>
-          </a:stretch>
-        </p:blipFill>
-        <p:spPr>
-          <a:xfrm>
-            <a:off x="411480" y="6327648"/>
-            <a:ext cx="384048" cy="384048"/>
-          </a:xfrm>
-          <a:prstGeom prst="rect">
-            <a:avLst/>
-          </a:prstGeom>
-        </p:spPr>
-      </p:pic>
-      <p:sp>
-        <p:nvSpPr>
-          <p:cNvPr id="3" name="Text 0"/>
-          <p:cNvSpPr/>
-          <p:nvPr/>
-        </p:nvSpPr>
-        <p:spPr>
-          <a:xfrm>
-            <a:off x="868680" y="6355080"/>
-            <a:ext cx="7498080" cy="310896"/>
-          </a:xfrm>
-          <a:prstGeom prst="rect">
-            <a:avLst/>
-          </a:prstGeom>
-          <a:noFill/>
-          <a:ln/>
-        </p:spPr>
-        <p:txBody>
-          <a:bodyPr wrap="square" lIns="0" tIns="0" rIns="0" bIns="0" rtlCol="0" anchor="ctr"/>
-          <a:lstStyle/>
-          <a:p>
-            <a:pPr indent="0" marL="0">
-              <a:buNone/>
-            </a:pPr>
-            <a:r>
-              <a:rPr lang="en-US" sz="900" dirty="0">
-                <a:solidFill>
-                  <a:srgbClr val="8A7A76"/>
-                </a:solidFill>
-                <a:latin typeface="Calibri" pitchFamily="34" charset="0"/>
-                <a:ea typeface="Calibri" pitchFamily="34" charset="-122"/>
-                <a:cs typeface="Calibri" pitchFamily="34" charset="-120"/>
-              </a:rPr>
-              <a:t>Je m'appelle Huong  •  GV. Đỗ Thùy Hương  •  EC1103</a:t>
-            </a:r>
-            <a:endParaRPr lang="en-US" sz="900" dirty="0"/>
-          </a:p>
-        </p:txBody>
-      </p:sp>
-      <p:sp>
-        <p:nvSpPr>
-          <p:cNvPr id="4" name="Text 1"/>
-          <p:cNvSpPr/>
-          <p:nvPr/>
-        </p:nvSpPr>
-        <p:spPr>
-          <a:xfrm>
-            <a:off x="8503920" y="6355080"/>
-            <a:ext cx="2743200" cy="310896"/>
-          </a:xfrm>
-          <a:prstGeom prst="rect">
-            <a:avLst/>
-          </a:prstGeom>
-          <a:noFill/>
-          <a:ln/>
-        </p:spPr>
-        <p:txBody>
-          <a:bodyPr wrap="square" lIns="0" tIns="0" rIns="0" bIns="0" rtlCol="0" anchor="ctr"/>
-          <a:lstStyle/>
-          <a:p>
-            <a:pPr algn="r" indent="0" marL="0">
-              <a:buNone/>
-            </a:pPr>
-            <a:r>
-              <a:rPr lang="en-US" sz="900" dirty="0">
-                <a:solidFill>
-                  <a:srgbClr val="8A7A76"/>
-                </a:solidFill>
-                <a:latin typeface="Calibri" pitchFamily="34" charset="0"/>
-                <a:ea typeface="Calibri" pitchFamily="34" charset="-122"/>
-                <a:cs typeface="Calibri" pitchFamily="34" charset="-120"/>
-              </a:rPr>
-              <a:t>Chương 2</a:t>
-            </a:r>
-            <a:endParaRPr lang="en-US" sz="900" dirty="0"/>
-          </a:p>
-        </p:txBody>
-      </p:sp>
-      <p:sp>
-        <p:nvSpPr>
-          <p:cNvPr id="5" name="Shape 2"/>
-          <p:cNvSpPr/>
-          <p:nvPr/>
-        </p:nvSpPr>
-        <p:spPr>
-          <a:xfrm>
-            <a:off x="11430000" y="6327648"/>
-            <a:ext cx="365760" cy="365760"/>
-          </a:xfrm>
-          <a:prstGeom prst="ellipse">
-            <a:avLst/>
-          </a:prstGeom>
-          <a:solidFill>
-            <a:srgbClr val="DC756A"/>
-          </a:solidFill>
-          <a:ln/>
-        </p:spPr>
-        <p:txBody>
-          <a:bodyPr/>
-          <a:p/>
-        </p:txBody>
-      </p:sp>
-      <p:sp>
-        <p:nvSpPr>
-          <p:cNvPr id="6" name="Text 3"/>
-          <p:cNvSpPr/>
-          <p:nvPr/>
-        </p:nvSpPr>
-        <p:spPr>
-          <a:xfrm>
-            <a:off x="11430000" y="6327648"/>
-            <a:ext cx="365760" cy="365760"/>
-          </a:xfrm>
-          <a:prstGeom prst="rect">
-            <a:avLst/>
-          </a:prstGeom>
-          <a:noFill/>
-          <a:ln/>
-        </p:spPr>
-        <p:txBody>
-          <a:bodyPr wrap="square" lIns="0" tIns="0" rIns="0" bIns="0" rtlCol="0" anchor="ctr"/>
-          <a:lstStyle/>
-          <a:p>
-            <a:pPr algn="ctr" indent="0" marL="0">
-              <a:buNone/>
-            </a:pPr>
-            <a:r>
-              <a:rPr lang="en-US" sz="1000" b="1" dirty="0">
-                <a:solidFill>
-                  <a:srgbClr val="FFFFFF"/>
-                </a:solidFill>
-                <a:latin typeface="Calibri" pitchFamily="34" charset="0"/>
-                <a:ea typeface="Calibri" pitchFamily="34" charset="-122"/>
-                <a:cs typeface="Calibri" pitchFamily="34" charset="-120"/>
-              </a:rPr>
-              <a:t>8</a:t>
-            </a:r>
-            <a:endParaRPr lang="en-US" sz="1000" dirty="0"/>
-          </a:p>
-        </p:txBody>
-      </p:sp>
-      <p:sp>
-        <p:nvSpPr>
-          <p:cNvPr id="7" name="Text 4"/>
-          <p:cNvSpPr/>
-          <p:nvPr/>
-        </p:nvSpPr>
-        <p:spPr>
-          <a:xfrm>
-            <a:off x="502920" y="310896"/>
-            <a:ext cx="11155680" cy="274320"/>
-          </a:xfrm>
-          <a:prstGeom prst="rect">
-            <a:avLst/>
-          </a:prstGeom>
-          <a:noFill/>
-          <a:ln/>
-        </p:spPr>
-        <p:txBody>
-          <a:bodyPr wrap="square" lIns="0" tIns="0" rIns="0" bIns="0" rtlCol="0" anchor="ctr"/>
-          <a:lstStyle/>
-          <a:p>
-            <a:pPr indent="0" marL="0">
-              <a:buNone/>
-            </a:pPr>
-            <a:r>
-              <a:rPr lang="en-US" sz="1100" b="1" spc="300" kern="0" dirty="0">
-                <a:solidFill>
-                  <a:srgbClr val="DC756A"/>
-                </a:solidFill>
-                <a:latin typeface="Calibri" pitchFamily="34" charset="0"/>
-                <a:ea typeface="Calibri" pitchFamily="34" charset="-122"/>
-                <a:cs typeface="Calibri" pitchFamily="34" charset="-120"/>
-              </a:rPr>
-              <a:t>2.2</a:t>
-            </a:r>
-            <a:endParaRPr lang="en-US" sz="1100" dirty="0"/>
-          </a:p>
-        </p:txBody>
-      </p:sp>
-      <p:sp>
-        <p:nvSpPr>
-          <p:cNvPr id="8" name="Text 5"/>
-          <p:cNvSpPr/>
-          <p:nvPr/>
-        </p:nvSpPr>
-        <p:spPr>
-          <a:xfrm>
-            <a:off x="502920" y="576072"/>
-            <a:ext cx="11155680" cy="713232"/>
-          </a:xfrm>
-          <a:prstGeom prst="rect">
-            <a:avLst/>
-          </a:prstGeom>
-          <a:noFill/>
-          <a:ln/>
-        </p:spPr>
-        <p:txBody>
-          <a:bodyPr wrap="square" lIns="0" tIns="0" rIns="0" bIns="0" rtlCol="0" anchor="ctr"/>
-          <a:lstStyle/>
-          <a:p>
-            <a:pPr indent="0" marL="0">
-              <a:buNone/>
-            </a:pPr>
-            <a:r>
-              <a:rPr lang="en-US" sz="2700" b="1" dirty="0">
-                <a:solidFill>
-                  <a:srgbClr val="AC4D33"/>
-                </a:solidFill>
-                <a:latin typeface="Cambria" pitchFamily="34" charset="0"/>
-                <a:ea typeface="Cambria" pitchFamily="34" charset="-122"/>
-                <a:cs typeface="Cambria" pitchFamily="34" charset="-120"/>
-              </a:rPr>
-              <a:t>Trình bày tự tin trước đám đông</a:t>
-            </a:r>
-            <a:endParaRPr lang="en-US" sz="2700" dirty="0"/>
-          </a:p>
-        </p:txBody>
-      </p:sp>
-      <p:sp>
-        <p:nvSpPr>
-          <p:cNvPr id="9" name="Shape 6"/>
-          <p:cNvSpPr/>
-          <p:nvPr/>
-        </p:nvSpPr>
-        <p:spPr>
-          <a:xfrm>
-            <a:off x="502920" y="1417320"/>
-            <a:ext cx="5509260" cy="2308860"/>
-          </a:xfrm>
-          <a:prstGeom prst="roundRect">
-            <a:avLst>
-              <a:gd name="adj" fmla="val 3564"/>
-            </a:avLst>
-          </a:prstGeom>
-          <a:solidFill>
-            <a:srgbClr val="FDF1EF"/>
-          </a:solidFill>
-          <a:ln w="15875">
-            <a:solidFill>
-              <a:srgbClr val="FBCEC9"/>
-            </a:solidFill>
-            <a:prstDash val="solid"/>
-          </a:ln>
-        </p:spPr>
-        <p:txBody>
-          <a:bodyPr/>
-          <a:p/>
-        </p:txBody>
-      </p:sp>
-      <p:sp>
-        <p:nvSpPr>
-          <p:cNvPr id="10" name="Text 7"/>
-          <p:cNvSpPr/>
-          <p:nvPr/>
-        </p:nvSpPr>
-        <p:spPr>
-          <a:xfrm>
-            <a:off x="722376" y="1490472"/>
-            <a:ext cx="5070348" cy="2162556"/>
-          </a:xfrm>
-          <a:prstGeom prst="rect">
-            <a:avLst/>
-          </a:prstGeom>
-          <a:noFill/>
-          <a:ln/>
-        </p:spPr>
-        <p:txBody>
-          <a:bodyPr wrap="square" lIns="0" tIns="0" rIns="0" bIns="0" rtlCol="0" anchor="ctr"/>
-          <a:lstStyle/>
-          <a:p>
-            <a:pPr indent="0" marL="0">
-              <a:buNone/>
-            </a:pPr>
-            <a:r>
-              <a:rPr lang="en-US" sz="1500" b="1" dirty="0">
-                <a:solidFill>
-                  <a:srgbClr val="AC4D33"/>
-                </a:solidFill>
-                <a:latin typeface="Calibri" pitchFamily="34" charset="0"/>
-                <a:ea typeface="Calibri" pitchFamily="34" charset="-122"/>
-                <a:cs typeface="Calibri" pitchFamily="34" charset="-120"/>
-              </a:rPr>
-              <a:t>Ngôn ngữ cơ thể</a:t>
-            </a:r>
-            <a:endParaRPr lang="en-US" sz="1500" dirty="0"/>
-          </a:p>
-          <a:p>
-            <a:pPr indent="0" marL="0">
-              <a:buNone/>
-            </a:pPr>
-            <a:r>
-              <a:rPr lang="en-US" sz="1250" dirty="0">
-                <a:solidFill>
-                  <a:srgbClr val="3A2B28"/>
-                </a:solidFill>
-                <a:latin typeface="Calibri" pitchFamily="34" charset="0"/>
-                <a:ea typeface="Calibri" pitchFamily="34" charset="-122"/>
-                <a:cs typeface="Calibri" pitchFamily="34" charset="-120"/>
-              </a:rPr>
-              <a:t>Đứng vững, mở vai, di chuyển có chủ đích; giao tiếp mắt luân phiên khắp phòng; tay minh họa tự nhiên, không đút túi hay vặn bút.</a:t>
-            </a:r>
-            <a:endParaRPr lang="en-US" sz="1500" dirty="0"/>
-          </a:p>
-        </p:txBody>
-      </p:sp>
-      <p:sp>
-        <p:nvSpPr>
-          <p:cNvPr id="11" name="Shape 8"/>
-          <p:cNvSpPr/>
-          <p:nvPr/>
-        </p:nvSpPr>
-        <p:spPr>
-          <a:xfrm>
-            <a:off x="6195060" y="1417320"/>
-            <a:ext cx="5509260" cy="2308860"/>
-          </a:xfrm>
-          <a:prstGeom prst="roundRect">
-            <a:avLst>
-              <a:gd name="adj" fmla="val 3564"/>
-            </a:avLst>
-          </a:prstGeom>
-          <a:solidFill>
-            <a:srgbClr val="FDF1EF"/>
-          </a:solidFill>
-          <a:ln w="15875">
-            <a:solidFill>
-              <a:srgbClr val="FBCEC9"/>
-            </a:solidFill>
-            <a:prstDash val="solid"/>
-          </a:ln>
-        </p:spPr>
-        <p:txBody>
-          <a:bodyPr/>
-          <a:p/>
-        </p:txBody>
-      </p:sp>
-      <p:sp>
-        <p:nvSpPr>
-          <p:cNvPr id="12" name="Text 9"/>
-          <p:cNvSpPr/>
-          <p:nvPr/>
-        </p:nvSpPr>
-        <p:spPr>
-          <a:xfrm>
-            <a:off x="6414516" y="1490472"/>
-            <a:ext cx="5070348" cy="2162556"/>
-          </a:xfrm>
-          <a:prstGeom prst="rect">
-            <a:avLst/>
-          </a:prstGeom>
-          <a:noFill/>
-          <a:ln/>
-        </p:spPr>
-        <p:txBody>
-          <a:bodyPr wrap="square" lIns="0" tIns="0" rIns="0" bIns="0" rtlCol="0" anchor="ctr"/>
-          <a:lstStyle/>
-          <a:p>
-            <a:pPr indent="0" marL="0">
-              <a:buNone/>
-            </a:pPr>
-            <a:r>
-              <a:rPr lang="en-US" sz="1500" b="1" dirty="0">
-                <a:solidFill>
-                  <a:srgbClr val="AC4D33"/>
-                </a:solidFill>
-                <a:latin typeface="Calibri" pitchFamily="34" charset="0"/>
-                <a:ea typeface="Calibri" pitchFamily="34" charset="-122"/>
-                <a:cs typeface="Calibri" pitchFamily="34" charset="-120"/>
-              </a:rPr>
-              <a:t>Giọng nói</a:t>
-            </a:r>
-            <a:endParaRPr lang="en-US" sz="1500" dirty="0"/>
-          </a:p>
-          <a:p>
-            <a:pPr indent="0" marL="0">
-              <a:buNone/>
-            </a:pPr>
-            <a:r>
-              <a:rPr lang="en-US" sz="1250" dirty="0">
-                <a:solidFill>
-                  <a:srgbClr val="3A2B28"/>
-                </a:solidFill>
-                <a:latin typeface="Calibri" pitchFamily="34" charset="0"/>
-                <a:ea typeface="Calibri" pitchFamily="34" charset="-122"/>
-                <a:cs typeface="Calibri" pitchFamily="34" charset="-120"/>
-              </a:rPr>
-              <a:t>Nói to rõ, thay đổi tốc độ và ngữ điệu; dừng 1–2 giây trước ý quan trọng — khoảng lặng là gia vị của bài nói.</a:t>
-            </a:r>
-            <a:endParaRPr lang="en-US" sz="1500" dirty="0"/>
-          </a:p>
-        </p:txBody>
-      </p:sp>
-      <p:sp>
-        <p:nvSpPr>
-          <p:cNvPr id="13" name="Shape 10"/>
-          <p:cNvSpPr/>
-          <p:nvPr/>
-        </p:nvSpPr>
-        <p:spPr>
-          <a:xfrm>
-            <a:off x="502920" y="3909060"/>
-            <a:ext cx="5509260" cy="2308860"/>
-          </a:xfrm>
-          <a:prstGeom prst="roundRect">
-            <a:avLst>
-              <a:gd name="adj" fmla="val 3564"/>
-            </a:avLst>
-          </a:prstGeom>
-          <a:solidFill>
-            <a:srgbClr val="FDF1EF"/>
-          </a:solidFill>
-          <a:ln w="15875">
-            <a:solidFill>
-              <a:srgbClr val="FBCEC9"/>
-            </a:solidFill>
-            <a:prstDash val="solid"/>
-          </a:ln>
-        </p:spPr>
-        <p:txBody>
-          <a:bodyPr/>
-          <a:p/>
-        </p:txBody>
-      </p:sp>
-      <p:sp>
-        <p:nvSpPr>
-          <p:cNvPr id="14" name="Text 11"/>
-          <p:cNvSpPr/>
-          <p:nvPr/>
-        </p:nvSpPr>
-        <p:spPr>
-          <a:xfrm>
-            <a:off x="722376" y="3982212"/>
-            <a:ext cx="5070348" cy="2162556"/>
-          </a:xfrm>
-          <a:prstGeom prst="rect">
-            <a:avLst/>
-          </a:prstGeom>
-          <a:noFill/>
-          <a:ln/>
-        </p:spPr>
-        <p:txBody>
-          <a:bodyPr wrap="square" lIns="0" tIns="0" rIns="0" bIns="0" rtlCol="0" anchor="ctr"/>
-          <a:lstStyle/>
-          <a:p>
-            <a:pPr indent="0" marL="0">
-              <a:buNone/>
-            </a:pPr>
-            <a:r>
-              <a:rPr lang="en-US" sz="1500" b="1" dirty="0">
-                <a:solidFill>
-                  <a:srgbClr val="AC4D33"/>
-                </a:solidFill>
-                <a:latin typeface="Calibri" pitchFamily="34" charset="0"/>
-                <a:ea typeface="Calibri" pitchFamily="34" charset="-122"/>
-                <a:cs typeface="Calibri" pitchFamily="34" charset="-120"/>
-              </a:rPr>
-              <a:t>Vượt qua run sợ</a:t>
-            </a:r>
-            <a:endParaRPr lang="en-US" sz="1500" dirty="0"/>
-          </a:p>
-          <a:p>
-            <a:pPr indent="0" marL="0">
-              <a:buNone/>
-            </a:pPr>
-            <a:r>
-              <a:rPr lang="en-US" sz="1250" dirty="0">
-                <a:solidFill>
-                  <a:srgbClr val="3A2B28"/>
-                </a:solidFill>
-                <a:latin typeface="Calibri" pitchFamily="34" charset="0"/>
-                <a:ea typeface="Calibri" pitchFamily="34" charset="-122"/>
-                <a:cs typeface="Calibri" pitchFamily="34" charset="-120"/>
-              </a:rPr>
-              <a:t>Run là bình thường; chuẩn bị kỹ + đến sớm làm quen không gian + hít thở sâu + tập trung vào thông điệp thay vì bản thân.</a:t>
-            </a:r>
-            <a:endParaRPr lang="en-US" sz="1500" dirty="0"/>
-          </a:p>
-        </p:txBody>
-      </p:sp>
-      <p:sp>
-        <p:nvSpPr>
-          <p:cNvPr id="15" name="Shape 12"/>
-          <p:cNvSpPr/>
-          <p:nvPr/>
-        </p:nvSpPr>
-        <p:spPr>
-          <a:xfrm>
-            <a:off x="6195060" y="3909060"/>
-            <a:ext cx="5509260" cy="2308860"/>
-          </a:xfrm>
-          <a:prstGeom prst="roundRect">
-            <a:avLst>
-              <a:gd name="adj" fmla="val 3564"/>
-            </a:avLst>
-          </a:prstGeom>
-          <a:solidFill>
-            <a:srgbClr val="FDF1EF"/>
-          </a:solidFill>
-          <a:ln w="15875">
-            <a:solidFill>
-              <a:srgbClr val="FBCEC9"/>
-            </a:solidFill>
-            <a:prstDash val="solid"/>
-          </a:ln>
-        </p:spPr>
-        <p:txBody>
-          <a:bodyPr/>
-          <a:p/>
-        </p:txBody>
-      </p:sp>
-      <p:sp>
-        <p:nvSpPr>
-          <p:cNvPr id="16" name="Text 13"/>
-          <p:cNvSpPr/>
-          <p:nvPr/>
-        </p:nvSpPr>
-        <p:spPr>
-          <a:xfrm>
-            <a:off x="6414516" y="3982212"/>
-            <a:ext cx="5070348" cy="2162556"/>
-          </a:xfrm>
-          <a:prstGeom prst="rect">
-            <a:avLst/>
-          </a:prstGeom>
-          <a:noFill/>
-          <a:ln/>
-        </p:spPr>
-        <p:txBody>
-          <a:bodyPr wrap="square" lIns="0" tIns="0" rIns="0" bIns="0" rtlCol="0" anchor="ctr"/>
-          <a:lstStyle/>
-          <a:p>
-            <a:pPr indent="0" marL="0">
-              <a:buNone/>
-            </a:pPr>
-            <a:r>
-              <a:rPr lang="en-US" sz="1500" b="1" dirty="0">
-                <a:solidFill>
-                  <a:srgbClr val="AC4D33"/>
-                </a:solidFill>
-                <a:latin typeface="Calibri" pitchFamily="34" charset="0"/>
-                <a:ea typeface="Calibri" pitchFamily="34" charset="-122"/>
-                <a:cs typeface="Calibri" pitchFamily="34" charset="-120"/>
-              </a:rPr>
-              <a:t>Xử lý câu hỏi</a:t>
-            </a:r>
-            <a:endParaRPr lang="en-US" sz="1500" dirty="0"/>
-          </a:p>
-          <a:p>
-            <a:pPr indent="0" marL="0">
-              <a:buNone/>
-            </a:pPr>
-            <a:r>
-              <a:rPr lang="en-US" sz="1250" dirty="0">
-                <a:solidFill>
-                  <a:srgbClr val="3A2B28"/>
-                </a:solidFill>
-                <a:latin typeface="Calibri" pitchFamily="34" charset="0"/>
-                <a:ea typeface="Calibri" pitchFamily="34" charset="-122"/>
-                <a:cs typeface="Calibri" pitchFamily="34" charset="-120"/>
-              </a:rPr>
-              <a:t>Lắng nghe hết câu hỏi, cảm ơn, trả lời ngắn gọn; chưa chắc thì hẹn trả lời sau — trung thực hơn là đoán bừa.</a:t>
-            </a:r>
-            <a:endParaRPr lang="en-US" sz="1500" dirty="0"/>
-          </a:p>
-        </p:txBody>
-      </p:sp>
-    </p:spTree>
-  </p:cSld>
-  <p:clrMapOvr>
-    <a:masterClrMapping/>
-  </p:clrMapOvr>
-</p:sld>
-</file>
-
-<file path=ppt/slides/slide9.xml><?xml version="1.0" encoding="utf-8"?>
-<p:sld xmlns:a="http://schemas.openxmlformats.org/drawingml/2006/main" xmlns:r="http://schemas.openxmlformats.org/officeDocument/2006/relationships" xmlns:p="http://schemas.openxmlformats.org/presentationml/2006/main">
-  <p:cSld name="Slide 9">
-    <p:bg>
-      <p:bgPr>
-        <a:solidFill>
-          <a:srgbClr val="FDFBF8"/>
-        </a:solidFill>
-      </p:bgPr>
-    </p:bg>
-    <p:spTree>
-      <p:nvGrpSpPr>
-        <p:cNvPr id="1" name=""/>
-        <p:cNvGrpSpPr/>
-        <p:nvPr/>
-      </p:nvGrpSpPr>
-      <p:grpSpPr>
-        <a:xfrm>
-          <a:off x="0" y="0"/>
-          <a:ext cx="0" cy="0"/>
-          <a:chOff x="0" y="0"/>
-          <a:chExt cx="0" cy="0"/>
-        </a:xfrm>
-      </p:grpSpPr>
-      <p:pic>
-        <p:nvPicPr>
-          <p:cNvPr id="2" name="Image 0" descr="assets/logo_tron.png">    </p:cNvPr>
-          <p:cNvPicPr>
-            <a:picLocks noChangeAspect="1"/>
-          </p:cNvPicPr>
-          <p:nvPr/>
-        </p:nvPicPr>
-        <p:blipFill>
-          <a:blip r:embed="rId1"/>
-          <a:stretch>
-            <a:fillRect/>
-          </a:stretch>
-        </p:blipFill>
-        <p:spPr>
-          <a:xfrm>
-            <a:off x="411480" y="6327648"/>
-            <a:ext cx="384048" cy="384048"/>
-          </a:xfrm>
-          <a:prstGeom prst="rect">
-            <a:avLst/>
-          </a:prstGeom>
-        </p:spPr>
-      </p:pic>
-      <p:sp>
-        <p:nvSpPr>
-          <p:cNvPr id="3" name="Text 0"/>
-          <p:cNvSpPr/>
-          <p:nvPr/>
-        </p:nvSpPr>
-        <p:spPr>
-          <a:xfrm>
-            <a:off x="868680" y="6355080"/>
-            <a:ext cx="7498080" cy="310896"/>
-          </a:xfrm>
-          <a:prstGeom prst="rect">
-            <a:avLst/>
-          </a:prstGeom>
-          <a:noFill/>
-          <a:ln/>
-        </p:spPr>
-        <p:txBody>
-          <a:bodyPr wrap="square" lIns="0" tIns="0" rIns="0" bIns="0" rtlCol="0" anchor="ctr"/>
-          <a:lstStyle/>
-          <a:p>
-            <a:pPr indent="0" marL="0">
-              <a:buNone/>
-            </a:pPr>
-            <a:r>
-              <a:rPr lang="en-US" sz="900" dirty="0">
-                <a:solidFill>
-                  <a:srgbClr val="8A7A76"/>
-                </a:solidFill>
-                <a:latin typeface="Calibri" pitchFamily="34" charset="0"/>
-                <a:ea typeface="Calibri" pitchFamily="34" charset="-122"/>
-                <a:cs typeface="Calibri" pitchFamily="34" charset="-120"/>
-              </a:rPr>
-              <a:t>Je m'appelle Huong  •  GV. Đỗ Thùy Hương  •  EC1103</a:t>
-            </a:r>
-            <a:endParaRPr lang="en-US" sz="900" dirty="0"/>
-          </a:p>
-        </p:txBody>
-      </p:sp>
-      <p:sp>
-        <p:nvSpPr>
-          <p:cNvPr id="4" name="Text 1"/>
-          <p:cNvSpPr/>
-          <p:nvPr/>
-        </p:nvSpPr>
-        <p:spPr>
-          <a:xfrm>
-            <a:off x="8503920" y="6355080"/>
-            <a:ext cx="2743200" cy="310896"/>
-          </a:xfrm>
-          <a:prstGeom prst="rect">
-            <a:avLst/>
-          </a:prstGeom>
-          <a:noFill/>
-          <a:ln/>
-        </p:spPr>
-        <p:txBody>
-          <a:bodyPr wrap="square" lIns="0" tIns="0" rIns="0" bIns="0" rtlCol="0" anchor="ctr"/>
-          <a:lstStyle/>
-          <a:p>
-            <a:pPr algn="r" indent="0" marL="0">
-              <a:buNone/>
-            </a:pPr>
-            <a:r>
-              <a:rPr lang="en-US" sz="900" dirty="0">
-                <a:solidFill>
-                  <a:srgbClr val="8A7A76"/>
-                </a:solidFill>
-                <a:latin typeface="Calibri" pitchFamily="34" charset="0"/>
-                <a:ea typeface="Calibri" pitchFamily="34" charset="-122"/>
-                <a:cs typeface="Calibri" pitchFamily="34" charset="-120"/>
-              </a:rPr>
-              <a:t>Chương 2</a:t>
-            </a:r>
-            <a:endParaRPr lang="en-US" sz="900" dirty="0"/>
-          </a:p>
-        </p:txBody>
-      </p:sp>
-      <p:sp>
-        <p:nvSpPr>
-          <p:cNvPr id="5" name="Shape 2"/>
-          <p:cNvSpPr/>
-          <p:nvPr/>
-        </p:nvSpPr>
-        <p:spPr>
-          <a:xfrm>
-            <a:off x="11430000" y="6327648"/>
-            <a:ext cx="365760" cy="365760"/>
-          </a:xfrm>
-          <a:prstGeom prst="ellipse">
-            <a:avLst/>
-          </a:prstGeom>
-          <a:solidFill>
-            <a:srgbClr val="DC756A"/>
-          </a:solidFill>
-          <a:ln/>
-        </p:spPr>
-        <p:txBody>
-          <a:bodyPr/>
-          <a:p/>
-        </p:txBody>
-      </p:sp>
-      <p:sp>
-        <p:nvSpPr>
-          <p:cNvPr id="6" name="Text 3"/>
-          <p:cNvSpPr/>
-          <p:nvPr/>
-        </p:nvSpPr>
-        <p:spPr>
-          <a:xfrm>
-            <a:off x="11430000" y="6327648"/>
-            <a:ext cx="365760" cy="365760"/>
-          </a:xfrm>
-          <a:prstGeom prst="rect">
-            <a:avLst/>
-          </a:prstGeom>
-          <a:noFill/>
-          <a:ln/>
-        </p:spPr>
-        <p:txBody>
-          <a:bodyPr wrap="square" lIns="0" tIns="0" rIns="0" bIns="0" rtlCol="0" anchor="ctr"/>
-          <a:lstStyle/>
-          <a:p>
-            <a:pPr algn="ctr" indent="0" marL="0">
-              <a:buNone/>
-            </a:pPr>
-            <a:r>
-              <a:rPr lang="en-US" sz="1000" b="1" dirty="0">
-                <a:solidFill>
-                  <a:srgbClr val="FFFFFF"/>
-                </a:solidFill>
-                <a:latin typeface="Calibri" pitchFamily="34" charset="0"/>
-                <a:ea typeface="Calibri" pitchFamily="34" charset="-122"/>
-                <a:cs typeface="Calibri" pitchFamily="34" charset="-120"/>
-              </a:rPr>
-              <a:t>9</a:t>
-            </a:r>
-            <a:endParaRPr lang="en-US" sz="1000" dirty="0"/>
-          </a:p>
-        </p:txBody>
-      </p:sp>
-      <p:sp>
-        <p:nvSpPr>
-          <p:cNvPr id="7" name="Text 4"/>
-          <p:cNvSpPr/>
-          <p:nvPr/>
-        </p:nvSpPr>
-        <p:spPr>
-          <a:xfrm>
-            <a:off x="502920" y="310896"/>
-            <a:ext cx="11155680" cy="274320"/>
-          </a:xfrm>
-          <a:prstGeom prst="rect">
-            <a:avLst/>
-          </a:prstGeom>
-          <a:noFill/>
-          <a:ln/>
-        </p:spPr>
-        <p:txBody>
-          <a:bodyPr wrap="square" lIns="0" tIns="0" rIns="0" bIns="0" rtlCol="0" anchor="ctr"/>
-          <a:lstStyle/>
-          <a:p>
-            <a:pPr indent="0" marL="0">
-              <a:buNone/>
-            </a:pPr>
-            <a:r>
-              <a:rPr lang="en-US" sz="1100" b="1" spc="300" kern="0" dirty="0">
-                <a:solidFill>
-                  <a:srgbClr val="DC756A"/>
-                </a:solidFill>
-                <a:latin typeface="Calibri" pitchFamily="34" charset="0"/>
-                <a:ea typeface="Calibri" pitchFamily="34" charset="-122"/>
-                <a:cs typeface="Calibri" pitchFamily="34" charset="-120"/>
-              </a:rPr>
-              <a:t>2.3</a:t>
-            </a:r>
-            <a:endParaRPr lang="en-US" sz="1100" dirty="0"/>
-          </a:p>
-        </p:txBody>
-      </p:sp>
-      <p:sp>
-        <p:nvSpPr>
-          <p:cNvPr id="8" name="Text 5"/>
-          <p:cNvSpPr/>
-          <p:nvPr/>
-        </p:nvSpPr>
-        <p:spPr>
-          <a:xfrm>
-            <a:off x="502920" y="576072"/>
-            <a:ext cx="11155680" cy="713232"/>
-          </a:xfrm>
-          <a:prstGeom prst="rect">
-            <a:avLst/>
-          </a:prstGeom>
-          <a:noFill/>
-          <a:ln/>
-        </p:spPr>
-        <p:txBody>
-          <a:bodyPr wrap="square" lIns="0" tIns="0" rIns="0" bIns="0" rtlCol="0" anchor="ctr"/>
-          <a:lstStyle/>
-          <a:p>
-            <a:pPr indent="0" marL="0">
-              <a:buNone/>
-            </a:pPr>
-            <a:r>
-              <a:rPr lang="en-US" sz="2700" b="1" dirty="0">
-                <a:solidFill>
-                  <a:srgbClr val="AC4D33"/>
-                </a:solidFill>
-                <a:latin typeface="Cambria" pitchFamily="34" charset="0"/>
-                <a:ea typeface="Cambria" pitchFamily="34" charset="-122"/>
-                <a:cs typeface="Cambria" pitchFamily="34" charset="-120"/>
-              </a:rPr>
-              <a:t>Nghe khác lắng nghe: 5 mức độ</a:t>
-            </a:r>
-            <a:endParaRPr lang="en-US" sz="2700" dirty="0"/>
-          </a:p>
-        </p:txBody>
-      </p:sp>
-      <p:pic>
-        <p:nvPicPr>
-          <p:cNvPr id="9" name="Picture 8" descr="c2-5-muc-lang-nghe-nt.png"/>
-          <p:cNvPicPr>
-            <a:picLocks noChangeAspect="1"/>
-          </p:cNvPicPr>
-          <p:nvPr/>
-        </p:nvPicPr>
-        <p:blipFill>
-          <a:blip r:embed="rId4"/>
-          <a:stretch>
-            <a:fillRect/>
-          </a:stretch>
-        </p:blipFill>
-        <p:spPr>
-          <a:xfrm>
-            <a:off x="472287" y="1481328"/>
-            <a:ext cx="11247120" cy="4097165"/>
-          </a:xfrm>
-          <a:prstGeom prst="rect">
-            <a:avLst/>
-          </a:prstGeom>
-        </p:spPr>
-      </p:pic>
     </p:spTree>
   </p:cSld>
   <p:clrMapOvr>
@@ -13822,14 +14026,108 @@
     </a:clrScheme>
     <a:fontScheme name="Office">
       <a:majorFont>
-        <a:latin typeface="Cambria" panose="020F0302020204030204"/>
-        <a:ea typeface="Cambria"/>
-        <a:cs typeface="Cambria"/>
+        <a:latin typeface="Calibri Light" panose="020F0302020204030204"/>
+        <a:ea typeface=""/>
+        <a:cs typeface=""/>
+        <a:font script="Jpan" typeface="游ゴシック Light"/>
+        <a:font script="Hang" typeface="맑은 고딕"/>
+        <a:font script="Hans" typeface="等线 Light"/>
+        <a:font script="Hant" typeface="新細明體"/>
+        <a:font script="Arab" typeface="Times New Roman"/>
+        <a:font script="Hebr" typeface="Times New Roman"/>
+        <a:font script="Thai" typeface="Angsana New"/>
+        <a:font script="Ethi" typeface="Nyala"/>
+        <a:font script="Beng" typeface="Vrinda"/>
+        <a:font script="Gujr" typeface="Shruti"/>
+        <a:font script="Khmr" typeface="MoolBoran"/>
+        <a:font script="Knda" typeface="Tunga"/>
+        <a:font script="Guru" typeface="Raavi"/>
+        <a:font script="Cans" typeface="Euphemia"/>
+        <a:font script="Cher" typeface="Plantagenet Cherokee"/>
+        <a:font script="Yiii" typeface="Microsoft Yi Baiti"/>
+        <a:font script="Tibt" typeface="Microsoft Himalaya"/>
+        <a:font script="Thaa" typeface="MV Boli"/>
+        <a:font script="Deva" typeface="Mangal"/>
+        <a:font script="Telu" typeface="Gautami"/>
+        <a:font script="Taml" typeface="Latha"/>
+        <a:font script="Syrc" typeface="Estrangelo Edessa"/>
+        <a:font script="Orya" typeface="Kalinga"/>
+        <a:font script="Mlym" typeface="Kartika"/>
+        <a:font script="Laoo" typeface="DokChampa"/>
+        <a:font script="Sinh" typeface="Iskoola Pota"/>
+        <a:font script="Mong" typeface="Mongolian Baiti"/>
+        <a:font script="Viet" typeface="Times New Roman"/>
+        <a:font script="Uigh" typeface="Microsoft Uighur"/>
+        <a:font script="Geor" typeface="Sylfaen"/>
+        <a:font script="Armn" typeface="Arial"/>
+        <a:font script="Bugi" typeface="Leelawadee UI"/>
+        <a:font script="Bopo" typeface="Microsoft JhengHei"/>
+        <a:font script="Java" typeface="Javanese Text"/>
+        <a:font script="Lisu" typeface="Segoe UI"/>
+        <a:font script="Mymr" typeface="Myanmar Text"/>
+        <a:font script="Nkoo" typeface="Ebrima"/>
+        <a:font script="Olck" typeface="Nirmala UI"/>
+        <a:font script="Osma" typeface="Ebrima"/>
+        <a:font script="Phag" typeface="Phagspa"/>
+        <a:font script="Syrn" typeface="Estrangelo Edessa"/>
+        <a:font script="Syrj" typeface="Estrangelo Edessa"/>
+        <a:font script="Syre" typeface="Estrangelo Edessa"/>
+        <a:font script="Sora" typeface="Nirmala UI"/>
+        <a:font script="Tale" typeface="Microsoft Tai Le"/>
+        <a:font script="Talu" typeface="Microsoft New Tai Lue"/>
+        <a:font script="Tfng" typeface="Ebrima"/>
       </a:majorFont>
       <a:minorFont>
         <a:latin typeface="Calibri" panose="020F0502020204030204"/>
-        <a:ea typeface="Calibri"/>
-        <a:cs typeface="Calibri"/>
+        <a:ea typeface=""/>
+        <a:cs typeface=""/>
+        <a:font script="Jpan" typeface="游ゴシック"/>
+        <a:font script="Hang" typeface="맑은 고딕"/>
+        <a:font script="Hans" typeface="等线"/>
+        <a:font script="Hant" typeface="新細明體"/>
+        <a:font script="Arab" typeface="Arial"/>
+        <a:font script="Hebr" typeface="Arial"/>
+        <a:font script="Thai" typeface="Cordia New"/>
+        <a:font script="Ethi" typeface="Nyala"/>
+        <a:font script="Beng" typeface="Vrinda"/>
+        <a:font script="Gujr" typeface="Shruti"/>
+        <a:font script="Khmr" typeface="DaunPenh"/>
+        <a:font script="Knda" typeface="Tunga"/>
+        <a:font script="Guru" typeface="Raavi"/>
+        <a:font script="Cans" typeface="Euphemia"/>
+        <a:font script="Cher" typeface="Plantagenet Cherokee"/>
+        <a:font script="Yiii" typeface="Microsoft Yi Baiti"/>
+        <a:font script="Tibt" typeface="Microsoft Himalaya"/>
+        <a:font script="Thaa" typeface="MV Boli"/>
+        <a:font script="Deva" typeface="Mangal"/>
+        <a:font script="Telu" typeface="Gautami"/>
+        <a:font script="Taml" typeface="Latha"/>
+        <a:font script="Syrc" typeface="Estrangelo Edessa"/>
+        <a:font script="Orya" typeface="Kalinga"/>
+        <a:font script="Mlym" typeface="Kartika"/>
+        <a:font script="Laoo" typeface="DokChampa"/>
+        <a:font script="Sinh" typeface="Iskoola Pota"/>
+        <a:font script="Mong" typeface="Mongolian Baiti"/>
+        <a:font script="Viet" typeface="Arial"/>
+        <a:font script="Uigh" typeface="Microsoft Uighur"/>
+        <a:font script="Geor" typeface="Sylfaen"/>
+        <a:font script="Armn" typeface="Arial"/>
+        <a:font script="Bugi" typeface="Leelawadee UI"/>
+        <a:font script="Bopo" typeface="Microsoft JhengHei"/>
+        <a:font script="Java" typeface="Javanese Text"/>
+        <a:font script="Lisu" typeface="Segoe UI"/>
+        <a:font script="Mymr" typeface="Myanmar Text"/>
+        <a:font script="Nkoo" typeface="Ebrima"/>
+        <a:font script="Olck" typeface="Nirmala UI"/>
+        <a:font script="Osma" typeface="Ebrima"/>
+        <a:font script="Phag" typeface="Phagspa"/>
+        <a:font script="Syrn" typeface="Estrangelo Edessa"/>
+        <a:font script="Syrj" typeface="Estrangelo Edessa"/>
+        <a:font script="Syre" typeface="Estrangelo Edessa"/>
+        <a:font script="Sora" typeface="Nirmala UI"/>
+        <a:font script="Tale" typeface="Microsoft Tai Le"/>
+        <a:font script="Talu" typeface="Microsoft New Tai Lue"/>
+        <a:font script="Tfng" typeface="Ebrima"/>
       </a:minorFont>
     </a:fontScheme>
     <a:fmtScheme name="Office">

--- a/slides/02-ky-nang-chuyen-nghiep.pptx
+++ b/slides/02-ky-nang-chuyen-nghiep.pptx
@@ -520,10 +520,23 @@
           <a:lstStyle/>
           <a:p>
             <a:r>
-              <a:rPr lang="en-US" dirty="0"/>
-              <a:t/>
-            </a:r>
-            <a:endParaRPr lang="en-US" dirty="0"/>
+              <a:t>MỞ ĐẦU (2 phút)</a:t>
+            </a:r>
+          </a:p>
+          <a:p>
+            <a:r>
+              <a:t>• Nhắc lại 1 câu về chương trước: mô hình 5 khâu + 5 nguyên tắc.</a:t>
+            </a:r>
+          </a:p>
+          <a:p>
+            <a:r>
+              <a:t>• Vào đề bằng câu hỏi: "Bạn có bao giờ đánh giá một người chỉ sau 10 giây gặp mặt chưa?"</a:t>
+            </a:r>
+          </a:p>
+          <a:p>
+            <a:r>
+              <a:t>• Chốt: chương này là 4 kỹ năng dùng hằng ngày suốt đời đi làm.</a:t>
+            </a:r>
           </a:p>
         </p:txBody>
       </p:sp>
@@ -1479,48 +1492,7 @@
           <a:lstStyle/>
           <a:p>
             <a:r>
-              <a:t>QUY TẮC 4×20 (4 phút)</a:t>
-            </a:r>
-          </a:p>
-          <a:p>
-            <a:r>
-              <a:t>• Hỏi trước khi giảng: "Theo bạn, người ta mất bao lâu để hình thành ấn tượng về mình?"</a:t>
-            </a:r>
-          </a:p>
-          <a:p>
-            <a:r>
-              <a:t>• Đi qua 4 con số 20, mỗi con số cho một ví dụ ngắn.</a:t>
-            </a:r>
-          </a:p>
-          <a:p>
-            <a:r>
-              <a:t>• DIỄN THỬ: cô bước vào lớp hai lần — lần cúi mặt bước nhanh, lần ngẩng cao vai mở mỉm cười. Hỏi lớp thấy khác gì.</a:t>
-            </a:r>
-          </a:p>
-          <a:p>
-            <a:r>
-              <a:t>• CHỐT: ấn tượng ban đầu ĐƯỢC CHUẨN BỊ, không phải may mắn.</a:t>
-            </a:r>
-          </a:p>
-          <a:p/>
-          <a:p>
-            <a:r>
-              <a:t>NÓI ĐỦ Ý (phần đã rút khỏi slide)</a:t>
-            </a:r>
-          </a:p>
-          <a:p>
-            <a:r>
-              <a:t>• Vài giây đầu: não bộ hình thành đánh giá gần như tức thì từ ngoại hình, thần thái, cách chào — và ấn tượng đầu rất khó đảo ngược về sau.</a:t>
-            </a:r>
-          </a:p>
-          <a:p>
-            <a:r>
-              <a:t>• Quy tắc 4×20 đầy đủ: 20 giây đầu tiên • 20 bước chân đầu tiên • 20 cm gương mặt (ánh mắt, nụ cười) • 20 từ đầu tiên — chuẩn bị kỹ cả bốn.</a:t>
-            </a:r>
-          </a:p>
-          <a:p>
-            <a:r>
-              <a:t>• Ba trụ cột: trang phục phù hợp bối cảnh VÀ vị trí; thần thái tự tin, thân thiện; lời chào – giới thiệu rõ ràng, đúng nghi thức.</a:t>
+              <a:t>CHUYỂN MỤC (30 giây).</a:t>
             </a:r>
           </a:p>
         </p:txBody>
@@ -1912,10 +1884,49 @@
           <a:lstStyle/>
           <a:p>
             <a:r>
-              <a:rPr lang="en-US" dirty="0"/>
-              <a:t/>
-            </a:r>
-            <a:endParaRPr lang="en-US" dirty="0"/>
+              <a:t>QUY TẮC 4×20 (4 phút)</a:t>
+            </a:r>
+          </a:p>
+          <a:p>
+            <a:r>
+              <a:t>• Hỏi trước khi giảng: "Theo bạn, người ta mất bao lâu để hình thành ấn tượng về mình?"</a:t>
+            </a:r>
+          </a:p>
+          <a:p>
+            <a:r>
+              <a:t>• Đi qua 4 con số 20, mỗi con số cho một ví dụ ngắn.</a:t>
+            </a:r>
+          </a:p>
+          <a:p>
+            <a:r>
+              <a:t>• DIỄN THỬ: cô bước vào lớp hai lần — lần cúi mặt bước nhanh, lần ngẩng cao vai mở mỉm cười. Hỏi lớp thấy khác gì.</a:t>
+            </a:r>
+          </a:p>
+          <a:p>
+            <a:r>
+              <a:t>• CHỐT: ấn tượng ban đầu ĐƯỢC CHUẨN BỊ, không phải may mắn.</a:t>
+            </a:r>
+          </a:p>
+          <a:p/>
+          <a:p>
+            <a:r>
+              <a:t>NÓI ĐỦ Ý (phần đã rút khỏi slide)</a:t>
+            </a:r>
+          </a:p>
+          <a:p>
+            <a:r>
+              <a:t>• Vài giây đầu: não bộ hình thành đánh giá gần như tức thì từ ngoại hình, thần thái, cách chào — và ấn tượng đầu rất khó đảo ngược về sau.</a:t>
+            </a:r>
+          </a:p>
+          <a:p>
+            <a:r>
+              <a:t>• Quy tắc 4×20 đầy đủ: 20 giây đầu tiên • 20 bước chân đầu tiên • 20 cm gương mặt (ánh mắt, nụ cười) • 20 từ đầu tiên — chuẩn bị kỹ cả bốn.</a:t>
+            </a:r>
+          </a:p>
+          <a:p>
+            <a:r>
+              <a:t>• Ba trụ cột: trang phục phù hợp bối cảnh VÀ vị trí; thần thái tự tin, thân thiện; lời chào – giới thiệu rõ ràng, đúng nghi thức.</a:t>
+            </a:r>
           </a:p>
         </p:txBody>
       </p:sp>
